--- a/Presentation/AETERNA_프로젝트_심사발표.pptx
+++ b/Presentation/AETERNA_프로젝트_심사발표.pptx
@@ -114,6 +114,11 @@
       </a:defRPr>
     </a:lvl9pPr>
   </p:defaultTextStyle>
+  <p:extLst>
+    <p:ext uri="{EFAFB233-063F-42B5-8137-9DF3F51BA10A}">
+      <p15:sldGuideLst xmlns:p15="http://schemas.microsoft.com/office/powerpoint/2012/main"/>
+    </p:ext>
+  </p:extLst>
 </p:presentation>
 </file>
 
@@ -3623,7 +3628,7 @@
               </a:defRPr>
             </a:pPr>
             <a:r>
-              <a:rPr sz="1050" b="0" i="0">
+              <a:rPr sz="1050" b="0" i="0" dirty="0">
                 <a:solidFill>
                   <a:srgbClr val="5E6470"/>
                 </a:solidFill>
@@ -3631,8 +3636,27 @@
                 <a:ea typeface="Noto Sans KR"/>
                 <a:cs typeface="Noto Sans KR"/>
               </a:rPr>
-              <a:t>02</a:t>
-            </a:r>
+              <a:t>0</a:t>
+            </a:r>
+            <a:r>
+              <a:rPr lang="en-US" sz="1050" b="0" i="0" dirty="0">
+                <a:solidFill>
+                  <a:srgbClr val="5E6470"/>
+                </a:solidFill>
+                <a:latin typeface="Noto Sans KR"/>
+                <a:ea typeface="Noto Sans KR"/>
+                <a:cs typeface="Noto Sans KR"/>
+              </a:rPr>
+              <a:t>3</a:t>
+            </a:r>
+            <a:endParaRPr sz="1050" b="0" i="0" dirty="0">
+              <a:solidFill>
+                <a:srgbClr val="5E6470"/>
+              </a:solidFill>
+              <a:latin typeface="Noto Sans KR"/>
+              <a:ea typeface="Noto Sans KR"/>
+              <a:cs typeface="Noto Sans KR"/>
+            </a:endParaRPr>
           </a:p>
         </p:txBody>
       </p:sp>
@@ -5827,7 +5851,35 @@
                 <a:ea typeface="Noto Sans KR"/>
                 <a:cs typeface="Noto Sans KR"/>
               </a:rPr>
-              <a:t>WorkFlow</a:t>
+              <a:t>Work</a:t>
+            </a:r>
+            <a:r>
+              <a:rPr lang="en-US" sz="3225" b="1" dirty="0" err="1">
+                <a:solidFill>
+                  <a:schemeClr val="accent6">
+                    <a:lumMod val="40000"/>
+                    <a:lumOff val="60000"/>
+                  </a:schemeClr>
+                </a:solidFill>
+                <a:latin typeface="Noto Sans KR"/>
+                <a:ea typeface="Noto Sans KR"/>
+                <a:cs typeface="Noto Sans KR"/>
+              </a:rPr>
+              <a:t>F</a:t>
+            </a:r>
+            <a:r>
+              <a:rPr lang="en-US" sz="3225" b="1" i="0" dirty="0" err="1">
+                <a:solidFill>
+                  <a:schemeClr val="accent6">
+                    <a:lumMod val="40000"/>
+                    <a:lumOff val="60000"/>
+                  </a:schemeClr>
+                </a:solidFill>
+                <a:latin typeface="Noto Sans KR"/>
+                <a:ea typeface="Noto Sans KR"/>
+                <a:cs typeface="Noto Sans KR"/>
+              </a:rPr>
+              <a:t>low</a:t>
             </a:r>
             <a:r>
               <a:rPr lang="en-US" sz="3225" b="1" i="0" dirty="0">
@@ -5940,7 +5992,7 @@
               </a:defRPr>
             </a:pPr>
             <a:r>
-              <a:rPr sz="1050" b="0" i="0">
+              <a:rPr sz="1050" b="0" i="0" dirty="0">
                 <a:solidFill>
                   <a:srgbClr val="5E6470"/>
                 </a:solidFill>
@@ -5948,8 +6000,27 @@
                 <a:ea typeface="Noto Sans KR"/>
                 <a:cs typeface="Noto Sans KR"/>
               </a:rPr>
-              <a:t>03</a:t>
-            </a:r>
+              <a:t>0</a:t>
+            </a:r>
+            <a:r>
+              <a:rPr lang="en-US" sz="1050" b="0" i="0" dirty="0">
+                <a:solidFill>
+                  <a:srgbClr val="5E6470"/>
+                </a:solidFill>
+                <a:latin typeface="Noto Sans KR"/>
+                <a:ea typeface="Noto Sans KR"/>
+                <a:cs typeface="Noto Sans KR"/>
+              </a:rPr>
+              <a:t>4</a:t>
+            </a:r>
+            <a:endParaRPr sz="1050" b="0" i="0" dirty="0">
+              <a:solidFill>
+                <a:srgbClr val="5E6470"/>
+              </a:solidFill>
+              <a:latin typeface="Noto Sans KR"/>
+              <a:ea typeface="Noto Sans KR"/>
+              <a:cs typeface="Noto Sans KR"/>
+            </a:endParaRPr>
           </a:p>
         </p:txBody>
       </p:sp>
@@ -7600,13 +7671,35 @@
           <a:prstGeom prst="rect">
             <a:avLst/>
           </a:prstGeom>
-          <a:solidFill>
-            <a:schemeClr val="accent6">
-              <a:lumMod val="20000"/>
-              <a:lumOff val="80000"/>
-              <a:alpha val="70000"/>
-            </a:schemeClr>
-          </a:solidFill>
+          <a:gradFill>
+            <a:gsLst>
+              <a:gs pos="0">
+                <a:schemeClr val="accent6">
+                  <a:lumMod val="40000"/>
+                  <a:lumOff val="60000"/>
+                </a:schemeClr>
+              </a:gs>
+              <a:gs pos="74000">
+                <a:schemeClr val="accent1">
+                  <a:lumMod val="45000"/>
+                  <a:lumOff val="55000"/>
+                </a:schemeClr>
+              </a:gs>
+              <a:gs pos="83000">
+                <a:schemeClr val="accent1">
+                  <a:lumMod val="45000"/>
+                  <a:lumOff val="55000"/>
+                </a:schemeClr>
+              </a:gs>
+              <a:gs pos="100000">
+                <a:schemeClr val="accent1">
+                  <a:lumMod val="30000"/>
+                  <a:lumOff val="70000"/>
+                </a:schemeClr>
+              </a:gs>
+            </a:gsLst>
+            <a:lin ang="5400000" scaled="1"/>
+          </a:gradFill>
           <a:ln w="0">
             <a:noFill/>
             <a:prstDash val="solid"/>
@@ -8003,13 +8096,35 @@
           <a:prstGeom prst="rect">
             <a:avLst/>
           </a:prstGeom>
-          <a:solidFill>
-            <a:schemeClr val="accent6">
-              <a:lumMod val="20000"/>
-              <a:lumOff val="80000"/>
-              <a:alpha val="70000"/>
-            </a:schemeClr>
-          </a:solidFill>
+          <a:gradFill>
+            <a:gsLst>
+              <a:gs pos="0">
+                <a:schemeClr val="accent6">
+                  <a:lumMod val="40000"/>
+                  <a:lumOff val="60000"/>
+                </a:schemeClr>
+              </a:gs>
+              <a:gs pos="74000">
+                <a:schemeClr val="accent1">
+                  <a:lumMod val="45000"/>
+                  <a:lumOff val="55000"/>
+                </a:schemeClr>
+              </a:gs>
+              <a:gs pos="83000">
+                <a:schemeClr val="accent1">
+                  <a:lumMod val="45000"/>
+                  <a:lumOff val="55000"/>
+                </a:schemeClr>
+              </a:gs>
+              <a:gs pos="100000">
+                <a:schemeClr val="accent1">
+                  <a:lumMod val="30000"/>
+                  <a:lumOff val="70000"/>
+                </a:schemeClr>
+              </a:gs>
+            </a:gsLst>
+            <a:lin ang="5400000" scaled="1"/>
+          </a:gradFill>
           <a:ln w="0">
             <a:noFill/>
             <a:prstDash val="solid"/>
@@ -8399,7 +8514,7 @@
         </p:blipFill>
         <p:spPr>
           <a:xfrm>
-            <a:off x="6478" y="0"/>
+            <a:off x="6478" y="-41577"/>
             <a:ext cx="12185522" cy="6858000"/>
           </a:xfrm>
           <a:prstGeom prst="rect">
@@ -8510,7 +8625,7 @@
               </a:defRPr>
             </a:pPr>
             <a:r>
-              <a:rPr lang="ko-KR" altLang="en-US" sz="3225" b="1" i="0" dirty="0" err="1">
+              <a:rPr lang="en-US" sz="3225" b="1" dirty="0">
                 <a:solidFill>
                   <a:schemeClr val="accent6">
                     <a:lumMod val="40000"/>
@@ -8521,7 +8636,21 @@
                 <a:ea typeface="Noto Sans KR"/>
                 <a:cs typeface="Noto Sans KR"/>
               </a:rPr>
-              <a:t>ㅇ</a:t>
+              <a:t>Scenario </a:t>
+            </a:r>
+            <a:r>
+              <a:rPr lang="en-US" sz="3225" b="1" i="0" dirty="0">
+                <a:solidFill>
+                  <a:schemeClr val="accent6">
+                    <a:lumMod val="40000"/>
+                    <a:lumOff val="60000"/>
+                  </a:schemeClr>
+                </a:solidFill>
+                <a:latin typeface="Noto Sans KR"/>
+                <a:ea typeface="Noto Sans KR"/>
+                <a:cs typeface="Noto Sans KR"/>
+              </a:rPr>
+              <a:t>Game Loop</a:t>
             </a:r>
             <a:endParaRPr sz="3225" b="1" i="0" dirty="0">
               <a:solidFill>
@@ -8620,7 +8749,7 @@
               </a:defRPr>
             </a:pPr>
             <a:r>
-              <a:rPr sz="1050" b="0" i="0">
+              <a:rPr sz="1050" b="0" i="0" dirty="0">
                 <a:solidFill>
                   <a:srgbClr val="5E6470"/>
                 </a:solidFill>
@@ -8628,7 +8757,634 @@
                 <a:ea typeface="Noto Sans KR"/>
                 <a:cs typeface="Noto Sans KR"/>
               </a:rPr>
-              <a:t>04</a:t>
+              <a:t>0</a:t>
+            </a:r>
+            <a:r>
+              <a:rPr lang="en-US" sz="1050" b="0" i="0" dirty="0">
+                <a:solidFill>
+                  <a:srgbClr val="5E6470"/>
+                </a:solidFill>
+                <a:latin typeface="Noto Sans KR"/>
+                <a:ea typeface="Noto Sans KR"/>
+                <a:cs typeface="Noto Sans KR"/>
+              </a:rPr>
+              <a:t>5</a:t>
+            </a:r>
+            <a:endParaRPr sz="1050" b="0" i="0" dirty="0">
+              <a:solidFill>
+                <a:srgbClr val="5E6470"/>
+              </a:solidFill>
+              <a:latin typeface="Noto Sans KR"/>
+              <a:ea typeface="Noto Sans KR"/>
+              <a:cs typeface="Noto Sans KR"/>
+            </a:endParaRPr>
+          </a:p>
+        </p:txBody>
+      </p:sp>
+      <p:pic>
+        <p:nvPicPr>
+          <p:cNvPr id="8" name="그림 7">
+            <a:extLst>
+              <a:ext uri="{FF2B5EF4-FFF2-40B4-BE49-F238E27FC236}">
+                <a16:creationId xmlns:a16="http://schemas.microsoft.com/office/drawing/2014/main" id="{75799A48-1F8C-BA0A-74BA-96C716BA02E3}"/>
+              </a:ext>
+            </a:extLst>
+          </p:cNvPr>
+          <p:cNvPicPr>
+            <a:picLocks noChangeAspect="1"/>
+          </p:cNvPicPr>
+          <p:nvPr/>
+        </p:nvPicPr>
+        <p:blipFill>
+          <a:blip r:embed="rId4">
+            <a:extLst>
+              <a:ext uri="{28A0092B-C50C-407E-A947-70E740481C1C}">
+                <a14:useLocalDpi xmlns:a14="http://schemas.microsoft.com/office/drawing/2010/main" val="0"/>
+              </a:ext>
+            </a:extLst>
+          </a:blip>
+          <a:stretch>
+            <a:fillRect/>
+          </a:stretch>
+        </p:blipFill>
+        <p:spPr>
+          <a:xfrm>
+            <a:off x="623313" y="1847849"/>
+            <a:ext cx="4855853" cy="3976169"/>
+          </a:xfrm>
+          <a:prstGeom prst="rect">
+            <a:avLst/>
+          </a:prstGeom>
+        </p:spPr>
+      </p:pic>
+      <p:sp>
+        <p:nvSpPr>
+          <p:cNvPr id="37" name="사각형: 둥근 모서리 36">
+            <a:extLst>
+              <a:ext uri="{FF2B5EF4-FFF2-40B4-BE49-F238E27FC236}">
+                <a16:creationId xmlns:a16="http://schemas.microsoft.com/office/drawing/2014/main" id="{9061FE1F-3C51-54EE-6E0A-680A4AB54939}"/>
+              </a:ext>
+            </a:extLst>
+          </p:cNvPr>
+          <p:cNvSpPr/>
+          <p:nvPr/>
+        </p:nvSpPr>
+        <p:spPr>
+          <a:xfrm>
+            <a:off x="6096000" y="1695451"/>
+            <a:ext cx="5670884" cy="2389038"/>
+          </a:xfrm>
+          <a:prstGeom prst="roundRect">
+            <a:avLst/>
+          </a:prstGeom>
+          <a:gradFill>
+            <a:gsLst>
+              <a:gs pos="0">
+                <a:schemeClr val="accent6">
+                  <a:lumMod val="40000"/>
+                  <a:lumOff val="60000"/>
+                </a:schemeClr>
+              </a:gs>
+              <a:gs pos="74000">
+                <a:schemeClr val="accent1">
+                  <a:lumMod val="45000"/>
+                  <a:lumOff val="55000"/>
+                </a:schemeClr>
+              </a:gs>
+              <a:gs pos="83000">
+                <a:schemeClr val="accent1">
+                  <a:lumMod val="45000"/>
+                  <a:lumOff val="55000"/>
+                </a:schemeClr>
+              </a:gs>
+              <a:gs pos="100000">
+                <a:schemeClr val="accent1">
+                  <a:lumMod val="30000"/>
+                  <a:lumOff val="70000"/>
+                </a:schemeClr>
+              </a:gs>
+            </a:gsLst>
+            <a:lin ang="5400000" scaled="1"/>
+          </a:gradFill>
+          <a:ln w="63500">
+            <a:noFill/>
+          </a:ln>
+        </p:spPr>
+        <p:style>
+          <a:lnRef idx="2">
+            <a:schemeClr val="accent1">
+              <a:shade val="15000"/>
+            </a:schemeClr>
+          </a:lnRef>
+          <a:fillRef idx="1">
+            <a:schemeClr val="accent1"/>
+          </a:fillRef>
+          <a:effectRef idx="0">
+            <a:schemeClr val="accent1"/>
+          </a:effectRef>
+          <a:fontRef idx="minor">
+            <a:schemeClr val="lt1"/>
+          </a:fontRef>
+        </p:style>
+        <p:txBody>
+          <a:bodyPr rtlCol="0" anchor="ctr"/>
+          <a:lstStyle/>
+          <a:p>
+            <a:pPr algn="ctr"/>
+            <a:endParaRPr lang="ko-KR" altLang="en-US"/>
+          </a:p>
+        </p:txBody>
+      </p:sp>
+      <p:sp>
+        <p:nvSpPr>
+          <p:cNvPr id="36" name="workflow-clarity-text">
+            <a:extLst>
+              <a:ext uri="{FF2B5EF4-FFF2-40B4-BE49-F238E27FC236}">
+                <a16:creationId xmlns:a16="http://schemas.microsoft.com/office/drawing/2014/main" id="{B8B9FB7B-4BAD-F1EA-656D-A578C5D654D2}"/>
+              </a:ext>
+            </a:extLst>
+          </p:cNvPr>
+          <p:cNvSpPr>
+            <a:spLocks noGrp="1"/>
+          </p:cNvSpPr>
+          <p:nvPr/>
+        </p:nvSpPr>
+        <p:spPr>
+          <a:xfrm>
+            <a:off x="6343650" y="1924049"/>
+            <a:ext cx="5299576" cy="2460029"/>
+          </a:xfrm>
+          <a:prstGeom prst="rect">
+            <a:avLst/>
+          </a:prstGeom>
+          <a:noFill/>
+          <a:ln w="0">
+            <a:noFill/>
+            <a:prstDash val="solid"/>
+          </a:ln>
+        </p:spPr>
+        <p:txBody>
+          <a:bodyPr lIns="0" tIns="0" rIns="0" bIns="0" anchor="t">
+            <a:normAutofit/>
+          </a:bodyPr>
+          <a:lstStyle/>
+          <a:p>
+            <a:pPr algn="l">
+              <a:defRPr sz="1500" b="0" i="0">
+                <a:solidFill>
+                  <a:srgbClr val="FFFFFF"/>
+                </a:solidFill>
+                <a:latin typeface="Noto Sans KR"/>
+                <a:ea typeface="Noto Sans KR"/>
+                <a:cs typeface="Noto Sans KR"/>
+              </a:defRPr>
+            </a:pPr>
+            <a:r>
+              <a:rPr lang="ko-KR" altLang="en-US" sz="2400" b="1" dirty="0">
+                <a:solidFill>
+                  <a:schemeClr val="bg1"/>
+                </a:solidFill>
+                <a:latin typeface="Noto Sans KR"/>
+                <a:ea typeface="Noto Sans KR"/>
+                <a:cs typeface="Noto Sans KR"/>
+              </a:rPr>
+              <a:t>반복 플레이 구조</a:t>
+            </a:r>
+            <a:endParaRPr lang="en-US" altLang="ko-KR" sz="2400" b="1" dirty="0">
+              <a:solidFill>
+                <a:schemeClr val="bg1"/>
+              </a:solidFill>
+              <a:latin typeface="Noto Sans KR"/>
+              <a:ea typeface="Noto Sans KR"/>
+              <a:cs typeface="Noto Sans KR"/>
+            </a:endParaRPr>
+          </a:p>
+          <a:p>
+            <a:pPr algn="l">
+              <a:defRPr sz="1500" b="0" i="0">
+                <a:solidFill>
+                  <a:srgbClr val="FFFFFF"/>
+                </a:solidFill>
+                <a:latin typeface="Noto Sans KR"/>
+                <a:ea typeface="Noto Sans KR"/>
+                <a:cs typeface="Noto Sans KR"/>
+              </a:defRPr>
+            </a:pPr>
+            <a:endParaRPr lang="en-US" sz="1500" b="0" i="0" dirty="0">
+              <a:solidFill>
+                <a:schemeClr val="bg1"/>
+              </a:solidFill>
+              <a:latin typeface="Noto Sans KR"/>
+              <a:ea typeface="Noto Sans KR"/>
+              <a:cs typeface="Noto Sans KR"/>
+            </a:endParaRPr>
+          </a:p>
+          <a:p>
+            <a:pPr marL="285750" indent="-285750">
+              <a:buFontTx/>
+              <a:buChar char="-"/>
+              <a:defRPr sz="1500" b="0" i="0">
+                <a:solidFill>
+                  <a:srgbClr val="FFFFFF"/>
+                </a:solidFill>
+                <a:latin typeface="Noto Sans KR"/>
+                <a:ea typeface="Noto Sans KR"/>
+                <a:cs typeface="Noto Sans KR"/>
+              </a:defRPr>
+            </a:pPr>
+            <a:r>
+              <a:rPr lang="ko-KR" altLang="en-US" sz="1600" b="1" i="0" dirty="0">
+                <a:solidFill>
+                  <a:schemeClr val="bg1"/>
+                </a:solidFill>
+                <a:latin typeface="Noto Sans KR"/>
+                <a:ea typeface="Noto Sans KR"/>
+                <a:cs typeface="Noto Sans KR"/>
+              </a:rPr>
+              <a:t>수첩의 규칙을 먼저 확인한다</a:t>
+            </a:r>
+            <a:r>
+              <a:rPr lang="en-US" altLang="ko-KR" sz="1600" b="1" i="0" dirty="0">
+                <a:solidFill>
+                  <a:schemeClr val="bg1"/>
+                </a:solidFill>
+                <a:latin typeface="Noto Sans KR"/>
+                <a:ea typeface="Noto Sans KR"/>
+                <a:cs typeface="Noto Sans KR"/>
+              </a:rPr>
+              <a:t>.</a:t>
+            </a:r>
+          </a:p>
+          <a:p>
+            <a:pPr marL="285750" indent="-285750">
+              <a:buFontTx/>
+              <a:buChar char="-"/>
+              <a:defRPr sz="1500" b="0" i="0">
+                <a:solidFill>
+                  <a:srgbClr val="FFFFFF"/>
+                </a:solidFill>
+                <a:latin typeface="Noto Sans KR"/>
+                <a:ea typeface="Noto Sans KR"/>
+                <a:cs typeface="Noto Sans KR"/>
+              </a:defRPr>
+            </a:pPr>
+            <a:r>
+              <a:rPr lang="ko-KR" altLang="en-US" sz="1600" b="1" dirty="0">
+                <a:solidFill>
+                  <a:schemeClr val="bg1"/>
+                </a:solidFill>
+                <a:latin typeface="Noto Sans KR"/>
+                <a:ea typeface="Noto Sans KR"/>
+                <a:cs typeface="Noto Sans KR"/>
+              </a:rPr>
+              <a:t>전시장을 순찰하며 변화를 관찰한다</a:t>
+            </a:r>
+            <a:r>
+              <a:rPr lang="en-US" altLang="ko-KR" sz="1600" b="1" dirty="0">
+                <a:solidFill>
+                  <a:schemeClr val="bg1"/>
+                </a:solidFill>
+                <a:latin typeface="Noto Sans KR"/>
+                <a:ea typeface="Noto Sans KR"/>
+                <a:cs typeface="Noto Sans KR"/>
+              </a:rPr>
+              <a:t>.</a:t>
+            </a:r>
+          </a:p>
+          <a:p>
+            <a:pPr marL="285750" indent="-285750">
+              <a:buFontTx/>
+              <a:buChar char="-"/>
+              <a:defRPr sz="1500" b="0" i="0">
+                <a:solidFill>
+                  <a:srgbClr val="FFFFFF"/>
+                </a:solidFill>
+                <a:latin typeface="Noto Sans KR"/>
+                <a:ea typeface="Noto Sans KR"/>
+                <a:cs typeface="Noto Sans KR"/>
+              </a:defRPr>
+            </a:pPr>
+            <a:r>
+              <a:rPr lang="ko-KR" altLang="en-US" sz="1600" b="1" i="0" dirty="0">
+                <a:solidFill>
+                  <a:schemeClr val="bg1"/>
+                </a:solidFill>
+                <a:latin typeface="Noto Sans KR"/>
+                <a:ea typeface="Noto Sans KR"/>
+                <a:cs typeface="Noto Sans KR"/>
+              </a:rPr>
+              <a:t>배터리 스캔을 통해 자원 회복한다</a:t>
+            </a:r>
+            <a:r>
+              <a:rPr lang="en-US" altLang="ko-KR" sz="1600" b="1" i="0" dirty="0">
+                <a:solidFill>
+                  <a:schemeClr val="bg1"/>
+                </a:solidFill>
+                <a:latin typeface="Noto Sans KR"/>
+                <a:ea typeface="Noto Sans KR"/>
+                <a:cs typeface="Noto Sans KR"/>
+              </a:rPr>
+              <a:t>.</a:t>
+            </a:r>
+          </a:p>
+          <a:p>
+            <a:pPr marL="285750" indent="-285750">
+              <a:buFontTx/>
+              <a:buChar char="-"/>
+              <a:defRPr sz="1500" b="0" i="0">
+                <a:solidFill>
+                  <a:srgbClr val="FFFFFF"/>
+                </a:solidFill>
+                <a:latin typeface="Noto Sans KR"/>
+                <a:ea typeface="Noto Sans KR"/>
+                <a:cs typeface="Noto Sans KR"/>
+              </a:defRPr>
+            </a:pPr>
+            <a:r>
+              <a:rPr lang="ko-KR" altLang="en-US" sz="1600" b="1" dirty="0">
+                <a:solidFill>
+                  <a:schemeClr val="bg1"/>
+                </a:solidFill>
+                <a:latin typeface="Noto Sans KR"/>
+                <a:ea typeface="Noto Sans KR"/>
+                <a:cs typeface="Noto Sans KR"/>
+              </a:rPr>
+              <a:t>우측 </a:t>
+            </a:r>
+            <a:r>
+              <a:rPr lang="en-US" altLang="ko-KR" sz="1600" b="1" dirty="0">
+                <a:solidFill>
+                  <a:schemeClr val="bg1"/>
+                </a:solidFill>
+                <a:latin typeface="Noto Sans KR"/>
+                <a:ea typeface="Noto Sans KR"/>
+                <a:cs typeface="Noto Sans KR"/>
+              </a:rPr>
+              <a:t>UI(</a:t>
+            </a:r>
+            <a:r>
+              <a:rPr lang="ko-KR" altLang="en-US" sz="1600" b="1" dirty="0">
+                <a:solidFill>
+                  <a:schemeClr val="bg1"/>
+                </a:solidFill>
+                <a:latin typeface="Noto Sans KR"/>
+                <a:ea typeface="Noto Sans KR"/>
+                <a:cs typeface="Noto Sans KR"/>
+              </a:rPr>
+              <a:t>레이더와 퀘스트</a:t>
+            </a:r>
+            <a:r>
+              <a:rPr lang="en-US" altLang="ko-KR" sz="1600" b="1" dirty="0">
+                <a:solidFill>
+                  <a:schemeClr val="bg1"/>
+                </a:solidFill>
+                <a:latin typeface="Noto Sans KR"/>
+                <a:ea typeface="Noto Sans KR"/>
+                <a:cs typeface="Noto Sans KR"/>
+              </a:rPr>
+              <a:t>)</a:t>
+            </a:r>
+            <a:r>
+              <a:rPr lang="ko-KR" altLang="en-US" sz="1600" b="1" dirty="0">
+                <a:solidFill>
+                  <a:schemeClr val="bg1"/>
+                </a:solidFill>
+                <a:latin typeface="Noto Sans KR"/>
+                <a:ea typeface="Noto Sans KR"/>
+                <a:cs typeface="Noto Sans KR"/>
+              </a:rPr>
+              <a:t>를 보며 퀘스트를 진행한다</a:t>
+            </a:r>
+            <a:r>
+              <a:rPr lang="en-US" altLang="ko-KR" sz="1600" b="1" dirty="0">
+                <a:solidFill>
+                  <a:schemeClr val="bg1"/>
+                </a:solidFill>
+                <a:latin typeface="Noto Sans KR"/>
+                <a:ea typeface="Noto Sans KR"/>
+                <a:cs typeface="Noto Sans KR"/>
+              </a:rPr>
+              <a:t>.</a:t>
+            </a:r>
+            <a:endParaRPr lang="en-US" altLang="ko-KR" sz="1600" b="1" i="0" dirty="0">
+              <a:solidFill>
+                <a:schemeClr val="bg1"/>
+              </a:solidFill>
+              <a:latin typeface="Noto Sans KR"/>
+              <a:ea typeface="Noto Sans KR"/>
+              <a:cs typeface="Noto Sans KR"/>
+            </a:endParaRPr>
+          </a:p>
+          <a:p>
+            <a:pPr marL="285750" indent="-285750">
+              <a:buFontTx/>
+              <a:buChar char="-"/>
+              <a:defRPr sz="1500" b="0" i="0">
+                <a:solidFill>
+                  <a:srgbClr val="FFFFFF"/>
+                </a:solidFill>
+                <a:latin typeface="Noto Sans KR"/>
+                <a:ea typeface="Noto Sans KR"/>
+                <a:cs typeface="Noto Sans KR"/>
+              </a:defRPr>
+            </a:pPr>
+            <a:r>
+              <a:rPr lang="ko-KR" altLang="en-US" sz="1600" b="1" i="0" dirty="0">
+                <a:solidFill>
+                  <a:schemeClr val="bg1"/>
+                </a:solidFill>
+                <a:latin typeface="Noto Sans KR"/>
+                <a:ea typeface="Noto Sans KR"/>
+                <a:cs typeface="Noto Sans KR"/>
+              </a:rPr>
+              <a:t>각 </a:t>
+            </a:r>
+            <a:r>
+              <a:rPr lang="en-US" altLang="ko-KR" sz="1600" b="1" i="0" dirty="0">
+                <a:solidFill>
+                  <a:schemeClr val="bg1"/>
+                </a:solidFill>
+                <a:latin typeface="Noto Sans KR"/>
+                <a:ea typeface="Noto Sans KR"/>
+                <a:cs typeface="Noto Sans KR"/>
+              </a:rPr>
+              <a:t>Day(Scenario)</a:t>
+            </a:r>
+            <a:r>
+              <a:rPr lang="ko-KR" altLang="en-US" sz="1600" b="1" i="0" dirty="0">
+                <a:solidFill>
+                  <a:schemeClr val="bg1"/>
+                </a:solidFill>
+                <a:latin typeface="Noto Sans KR"/>
+                <a:ea typeface="Noto Sans KR"/>
+                <a:cs typeface="Noto Sans KR"/>
+              </a:rPr>
+              <a:t>마다 규칙과 클리어 조건은 상이하다</a:t>
+            </a:r>
+            <a:r>
+              <a:rPr lang="en-US" altLang="ko-KR" sz="1600" b="1" i="0" dirty="0">
+                <a:solidFill>
+                  <a:schemeClr val="bg1"/>
+                </a:solidFill>
+                <a:latin typeface="Noto Sans KR"/>
+                <a:ea typeface="Noto Sans KR"/>
+                <a:cs typeface="Noto Sans KR"/>
+              </a:rPr>
+              <a:t>.</a:t>
+            </a:r>
+            <a:endParaRPr lang="en-US" sz="1600" b="0" i="0" dirty="0">
+              <a:solidFill>
+                <a:schemeClr val="bg1"/>
+              </a:solidFill>
+              <a:latin typeface="Noto Sans KR"/>
+              <a:ea typeface="Noto Sans KR"/>
+              <a:cs typeface="Noto Sans KR"/>
+            </a:endParaRPr>
+          </a:p>
+        </p:txBody>
+      </p:sp>
+      <p:sp>
+        <p:nvSpPr>
+          <p:cNvPr id="39" name="사각형: 둥근 모서리 38">
+            <a:extLst>
+              <a:ext uri="{FF2B5EF4-FFF2-40B4-BE49-F238E27FC236}">
+                <a16:creationId xmlns:a16="http://schemas.microsoft.com/office/drawing/2014/main" id="{4482B751-B7F0-6EE5-4441-1D4D2291594D}"/>
+              </a:ext>
+            </a:extLst>
+          </p:cNvPr>
+          <p:cNvSpPr/>
+          <p:nvPr/>
+        </p:nvSpPr>
+        <p:spPr>
+          <a:xfrm>
+            <a:off x="6096000" y="4594274"/>
+            <a:ext cx="5595854" cy="1136550"/>
+          </a:xfrm>
+          <a:prstGeom prst="roundRect">
+            <a:avLst/>
+          </a:prstGeom>
+          <a:gradFill flip="none" rotWithShape="1">
+            <a:gsLst>
+              <a:gs pos="0">
+                <a:srgbClr val="ECC78D"/>
+              </a:gs>
+              <a:gs pos="72000">
+                <a:srgbClr val="FF0000"/>
+              </a:gs>
+              <a:gs pos="83000">
+                <a:srgbClr val="FF0000"/>
+              </a:gs>
+              <a:gs pos="100000">
+                <a:schemeClr val="accent2">
+                  <a:lumMod val="30000"/>
+                  <a:lumOff val="70000"/>
+                </a:schemeClr>
+              </a:gs>
+            </a:gsLst>
+            <a:lin ang="5400000" scaled="1"/>
+            <a:tileRect/>
+          </a:gradFill>
+          <a:ln>
+            <a:noFill/>
+          </a:ln>
+        </p:spPr>
+        <p:style>
+          <a:lnRef idx="2">
+            <a:schemeClr val="accent1">
+              <a:shade val="15000"/>
+            </a:schemeClr>
+          </a:lnRef>
+          <a:fillRef idx="1">
+            <a:schemeClr val="accent1"/>
+          </a:fillRef>
+          <a:effectRef idx="0">
+            <a:schemeClr val="accent1"/>
+          </a:effectRef>
+          <a:fontRef idx="minor">
+            <a:schemeClr val="lt1"/>
+          </a:fontRef>
+        </p:style>
+        <p:txBody>
+          <a:bodyPr rtlCol="0" anchor="ctr"/>
+          <a:lstStyle/>
+          <a:p>
+            <a:pPr algn="ctr"/>
+            <a:r>
+              <a:rPr lang="ko-KR" altLang="en-US" b="1" dirty="0">
+                <a:solidFill>
+                  <a:schemeClr val="bg1"/>
+                </a:solidFill>
+                <a:latin typeface="Noto Sans KR"/>
+                <a:ea typeface="Noto Sans KR"/>
+                <a:cs typeface="Noto Sans KR"/>
+              </a:rPr>
+              <a:t>다만</a:t>
+            </a:r>
+            <a:r>
+              <a:rPr lang="en-US" altLang="ko-KR" b="1" dirty="0">
+                <a:solidFill>
+                  <a:schemeClr val="bg1"/>
+                </a:solidFill>
+                <a:latin typeface="Noto Sans KR"/>
+                <a:ea typeface="Noto Sans KR"/>
+                <a:cs typeface="Noto Sans KR"/>
+              </a:rPr>
+              <a:t>, </a:t>
+            </a:r>
+            <a:r>
+              <a:rPr lang="ko-KR" altLang="en-US" b="1" dirty="0">
+                <a:solidFill>
+                  <a:schemeClr val="bg1"/>
+                </a:solidFill>
+                <a:latin typeface="Noto Sans KR"/>
+                <a:ea typeface="Noto Sans KR"/>
+                <a:cs typeface="Noto Sans KR"/>
+              </a:rPr>
+              <a:t>규칙을 어기면 해당 </a:t>
+            </a:r>
+            <a:r>
+              <a:rPr lang="en-US" altLang="ko-KR" b="1" dirty="0">
+                <a:solidFill>
+                  <a:schemeClr val="bg1"/>
+                </a:solidFill>
+                <a:latin typeface="Noto Sans KR"/>
+                <a:ea typeface="Noto Sans KR"/>
+                <a:cs typeface="Noto Sans KR"/>
+              </a:rPr>
+              <a:t>Day</a:t>
+            </a:r>
+            <a:r>
+              <a:rPr lang="ko-KR" altLang="en-US" b="1" dirty="0">
+                <a:solidFill>
+                  <a:schemeClr val="bg1"/>
+                </a:solidFill>
+                <a:latin typeface="Noto Sans KR"/>
+                <a:ea typeface="Noto Sans KR"/>
+                <a:cs typeface="Noto Sans KR"/>
+              </a:rPr>
+              <a:t>가 </a:t>
+            </a:r>
+            <a:r>
+              <a:rPr lang="ko-KR" altLang="en-US" b="1" dirty="0" err="1">
+                <a:solidFill>
+                  <a:schemeClr val="bg1"/>
+                </a:solidFill>
+                <a:latin typeface="Noto Sans KR"/>
+                <a:ea typeface="Noto Sans KR"/>
+                <a:cs typeface="Noto Sans KR"/>
+              </a:rPr>
+              <a:t>재시작된다</a:t>
+            </a:r>
+            <a:r>
+              <a:rPr lang="en-US" altLang="ko-KR" b="1" dirty="0">
+                <a:solidFill>
+                  <a:schemeClr val="bg1"/>
+                </a:solidFill>
+                <a:latin typeface="Noto Sans KR"/>
+                <a:ea typeface="Noto Sans KR"/>
+                <a:cs typeface="Noto Sans KR"/>
+              </a:rPr>
+              <a:t>.</a:t>
             </a:r>
           </a:p>
         </p:txBody>
@@ -8916,7 +9672,7 @@
               </a:defRPr>
             </a:pPr>
             <a:r>
-              <a:rPr sz="1050" b="0" i="0">
+              <a:rPr sz="1050" b="0" i="0" dirty="0">
                 <a:solidFill>
                   <a:srgbClr val="5E6470"/>
                 </a:solidFill>
@@ -8924,8 +9680,27 @@
                 <a:ea typeface="Noto Sans KR"/>
                 <a:cs typeface="Noto Sans KR"/>
               </a:rPr>
-              <a:t>05</a:t>
-            </a:r>
+              <a:t>0</a:t>
+            </a:r>
+            <a:r>
+              <a:rPr lang="en-US" sz="1050" b="0" i="0" dirty="0">
+                <a:solidFill>
+                  <a:srgbClr val="5E6470"/>
+                </a:solidFill>
+                <a:latin typeface="Noto Sans KR"/>
+                <a:ea typeface="Noto Sans KR"/>
+                <a:cs typeface="Noto Sans KR"/>
+              </a:rPr>
+              <a:t>6</a:t>
+            </a:r>
+            <a:endParaRPr sz="1050" b="0" i="0" dirty="0">
+              <a:solidFill>
+                <a:srgbClr val="5E6470"/>
+              </a:solidFill>
+              <a:latin typeface="Noto Sans KR"/>
+              <a:ea typeface="Noto Sans KR"/>
+              <a:cs typeface="Noto Sans KR"/>
+            </a:endParaRPr>
           </a:p>
         </p:txBody>
       </p:sp>
@@ -12488,6 +13263,83 @@
                   <a:lumMod val="20000"/>
                   <a:lumOff val="80000"/>
                 </a:schemeClr>
+              </a:solidFill>
+              <a:latin typeface="Noto Sans KR"/>
+              <a:ea typeface="Noto Sans KR"/>
+              <a:cs typeface="Noto Sans KR"/>
+            </a:endParaRPr>
+          </a:p>
+        </p:txBody>
+      </p:sp>
+      <p:sp>
+        <p:nvSpPr>
+          <p:cNvPr id="40" name="page-5">
+            <a:extLst>
+              <a:ext uri="{FF2B5EF4-FFF2-40B4-BE49-F238E27FC236}">
+                <a16:creationId xmlns:a16="http://schemas.microsoft.com/office/drawing/2014/main" id="{03893DD9-E268-FA7D-03C0-7ACE97B14FCA}"/>
+              </a:ext>
+            </a:extLst>
+          </p:cNvPr>
+          <p:cNvSpPr>
+            <a:spLocks noGrp="1"/>
+          </p:cNvSpPr>
+          <p:nvPr/>
+        </p:nvSpPr>
+        <p:spPr>
+          <a:xfrm>
+            <a:off x="11144250" y="6400800"/>
+            <a:ext cx="533400" cy="209550"/>
+          </a:xfrm>
+          <a:prstGeom prst="rect">
+            <a:avLst/>
+          </a:prstGeom>
+          <a:noFill/>
+          <a:ln w="0">
+            <a:noFill/>
+            <a:prstDash val="solid"/>
+          </a:ln>
+        </p:spPr>
+        <p:txBody>
+          <a:bodyPr lIns="0" tIns="0" rIns="0" bIns="0" anchor="t">
+            <a:normAutofit/>
+          </a:bodyPr>
+          <a:lstStyle/>
+          <a:p>
+            <a:pPr algn="r">
+              <a:defRPr sz="1050" b="0" i="0">
+                <a:solidFill>
+                  <a:srgbClr val="5E6470"/>
+                </a:solidFill>
+                <a:latin typeface="Noto Sans KR"/>
+                <a:ea typeface="Noto Sans KR"/>
+                <a:cs typeface="Noto Sans KR"/>
+              </a:defRPr>
+            </a:pPr>
+            <a:r>
+              <a:rPr sz="1050" b="0" i="0" dirty="0">
+                <a:solidFill>
+                  <a:srgbClr val="5E6470"/>
+                </a:solidFill>
+                <a:latin typeface="Noto Sans KR"/>
+                <a:ea typeface="Noto Sans KR"/>
+                <a:cs typeface="Noto Sans KR"/>
+              </a:rPr>
+              <a:t>0</a:t>
+            </a:r>
+            <a:r>
+              <a:rPr lang="en-US" sz="1050" dirty="0">
+                <a:solidFill>
+                  <a:srgbClr val="5E6470"/>
+                </a:solidFill>
+                <a:latin typeface="Noto Sans KR"/>
+                <a:ea typeface="Noto Sans KR"/>
+                <a:cs typeface="Noto Sans KR"/>
+              </a:rPr>
+              <a:t>7</a:t>
+            </a:r>
+            <a:endParaRPr sz="1050" b="0" i="0" dirty="0">
+              <a:solidFill>
+                <a:srgbClr val="5E6470"/>
               </a:solidFill>
               <a:latin typeface="Noto Sans KR"/>
               <a:ea typeface="Noto Sans KR"/>

--- a/Presentation/AETERNA_프로젝트_심사발표.pptx
+++ b/Presentation/AETERNA_프로젝트_심사발표.pptx
@@ -3434,7 +3434,7 @@
               </a:defRPr>
             </a:pPr>
             <a:r>
-              <a:rPr sz="3225" b="1" i="0" dirty="0" err="1">
+              <a:rPr lang="en-US" sz="3225" b="1" dirty="0">
                 <a:solidFill>
                   <a:schemeClr val="accent6">
                     <a:lumMod val="40000"/>
@@ -3445,91 +3445,7 @@
                 <a:ea typeface="Noto Sans KR"/>
                 <a:cs typeface="Noto Sans KR"/>
               </a:rPr>
-              <a:t>규칙을</a:t>
-            </a:r>
-            <a:r>
-              <a:rPr sz="3225" b="1" i="0" dirty="0">
-                <a:solidFill>
-                  <a:schemeClr val="accent6">
-                    <a:lumMod val="40000"/>
-                    <a:lumOff val="60000"/>
-                  </a:schemeClr>
-                </a:solidFill>
-                <a:latin typeface="Noto Sans KR"/>
-                <a:ea typeface="Noto Sans KR"/>
-                <a:cs typeface="Noto Sans KR"/>
-              </a:rPr>
-              <a:t> </a:t>
-            </a:r>
-            <a:r>
-              <a:rPr sz="3225" b="1" i="0" dirty="0" err="1">
-                <a:solidFill>
-                  <a:schemeClr val="accent6">
-                    <a:lumMod val="40000"/>
-                    <a:lumOff val="60000"/>
-                  </a:schemeClr>
-                </a:solidFill>
-                <a:latin typeface="Noto Sans KR"/>
-                <a:ea typeface="Noto Sans KR"/>
-                <a:cs typeface="Noto Sans KR"/>
-              </a:rPr>
-              <a:t>읽는</a:t>
-            </a:r>
-            <a:r>
-              <a:rPr sz="3225" b="1" i="0" dirty="0">
-                <a:solidFill>
-                  <a:schemeClr val="accent6">
-                    <a:lumMod val="40000"/>
-                    <a:lumOff val="60000"/>
-                  </a:schemeClr>
-                </a:solidFill>
-                <a:latin typeface="Noto Sans KR"/>
-                <a:ea typeface="Noto Sans KR"/>
-                <a:cs typeface="Noto Sans KR"/>
-              </a:rPr>
-              <a:t> </a:t>
-            </a:r>
-            <a:r>
-              <a:rPr sz="3225" b="1" i="0" dirty="0" err="1">
-                <a:solidFill>
-                  <a:schemeClr val="accent6">
-                    <a:lumMod val="40000"/>
-                    <a:lumOff val="60000"/>
-                  </a:schemeClr>
-                </a:solidFill>
-                <a:latin typeface="Noto Sans KR"/>
-                <a:ea typeface="Noto Sans KR"/>
-                <a:cs typeface="Noto Sans KR"/>
-              </a:rPr>
-              <a:t>순간부터</a:t>
-            </a:r>
-            <a:r>
-              <a:rPr sz="3225" b="1" i="0" dirty="0">
-                <a:solidFill>
-                  <a:schemeClr val="accent6">
-                    <a:lumMod val="40000"/>
-                    <a:lumOff val="60000"/>
-                  </a:schemeClr>
-                </a:solidFill>
-                <a:latin typeface="Noto Sans KR"/>
-                <a:ea typeface="Noto Sans KR"/>
-                <a:cs typeface="Noto Sans KR"/>
-              </a:rPr>
-              <a:t> </a:t>
-            </a:r>
-            <a:r>
-              <a:rPr sz="3225" b="1" i="0" dirty="0" err="1">
-                <a:solidFill>
-                  <a:schemeClr val="accent6">
-                    <a:lumMod val="40000"/>
-                    <a:lumOff val="60000"/>
-                  </a:schemeClr>
-                </a:solidFill>
-                <a:latin typeface="Noto Sans KR"/>
-                <a:ea typeface="Noto Sans KR"/>
-                <a:cs typeface="Noto Sans KR"/>
-              </a:rPr>
-              <a:t>시작</a:t>
+              <a:t>Game Overview</a:t>
             </a:r>
             <a:endParaRPr sz="3225" b="1" i="0" dirty="0">
               <a:solidFill>
@@ -5837,63 +5753,7 @@
                 <a:ea typeface="Noto Sans KR"/>
                 <a:cs typeface="Noto Sans KR"/>
               </a:rPr>
-              <a:t>Develop </a:t>
-            </a:r>
-            <a:r>
-              <a:rPr lang="en-US" sz="3225" b="1" i="0" dirty="0" err="1">
-                <a:solidFill>
-                  <a:schemeClr val="accent6">
-                    <a:lumMod val="40000"/>
-                    <a:lumOff val="60000"/>
-                  </a:schemeClr>
-                </a:solidFill>
-                <a:latin typeface="Noto Sans KR"/>
-                <a:ea typeface="Noto Sans KR"/>
-                <a:cs typeface="Noto Sans KR"/>
-              </a:rPr>
-              <a:t>Work</a:t>
-            </a:r>
-            <a:r>
-              <a:rPr lang="en-US" sz="3225" b="1" dirty="0" err="1">
-                <a:solidFill>
-                  <a:schemeClr val="accent6">
-                    <a:lumMod val="40000"/>
-                    <a:lumOff val="60000"/>
-                  </a:schemeClr>
-                </a:solidFill>
-                <a:latin typeface="Noto Sans KR"/>
-                <a:ea typeface="Noto Sans KR"/>
-                <a:cs typeface="Noto Sans KR"/>
-              </a:rPr>
-              <a:t>F</a:t>
-            </a:r>
-            <a:r>
-              <a:rPr lang="en-US" sz="3225" b="1" i="0" dirty="0" err="1">
-                <a:solidFill>
-                  <a:schemeClr val="accent6">
-                    <a:lumMod val="40000"/>
-                    <a:lumOff val="60000"/>
-                  </a:schemeClr>
-                </a:solidFill>
-                <a:latin typeface="Noto Sans KR"/>
-                <a:ea typeface="Noto Sans KR"/>
-                <a:cs typeface="Noto Sans KR"/>
-              </a:rPr>
-              <a:t>low</a:t>
-            </a:r>
-            <a:r>
-              <a:rPr lang="en-US" sz="3225" b="1" i="0" dirty="0">
-                <a:solidFill>
-                  <a:schemeClr val="accent6">
-                    <a:lumMod val="40000"/>
-                    <a:lumOff val="60000"/>
-                  </a:schemeClr>
-                </a:solidFill>
-                <a:latin typeface="Noto Sans KR"/>
-                <a:ea typeface="Noto Sans KR"/>
-                <a:cs typeface="Noto Sans KR"/>
-              </a:rPr>
-              <a:t> with AI</a:t>
+              <a:t>AI-Assisted Development</a:t>
             </a:r>
             <a:endParaRPr sz="3225" b="1" i="0" dirty="0">
               <a:solidFill>
@@ -8636,21 +8496,7 @@
                 <a:ea typeface="Noto Sans KR"/>
                 <a:cs typeface="Noto Sans KR"/>
               </a:rPr>
-              <a:t>Scenario </a:t>
-            </a:r>
-            <a:r>
-              <a:rPr lang="en-US" sz="3225" b="1" i="0" dirty="0">
-                <a:solidFill>
-                  <a:schemeClr val="accent6">
-                    <a:lumMod val="40000"/>
-                    <a:lumOff val="60000"/>
-                  </a:schemeClr>
-                </a:solidFill>
-                <a:latin typeface="Noto Sans KR"/>
-                <a:ea typeface="Noto Sans KR"/>
-                <a:cs typeface="Noto Sans KR"/>
-              </a:rPr>
-              <a:t>Game Loop</a:t>
+              <a:t>Core Gameplay Loop</a:t>
             </a:r>
             <a:endParaRPr sz="3225" b="1" i="0" dirty="0">
               <a:solidFill>
@@ -9562,7 +9408,7 @@
               </a:defRPr>
             </a:pPr>
             <a:r>
-              <a:rPr lang="ko-KR" altLang="en-US" sz="3225" b="1" i="0" dirty="0">
+              <a:rPr lang="en-US" sz="3225" b="1" dirty="0">
                 <a:solidFill>
                   <a:schemeClr val="accent6">
                     <a:lumMod val="40000"/>
@@ -9573,7 +9419,7 @@
                 <a:ea typeface="Noto Sans KR"/>
                 <a:cs typeface="Noto Sans KR"/>
               </a:rPr>
-              <a:t>역할</a:t>
+              <a:t>Main Role</a:t>
             </a:r>
             <a:endParaRPr sz="3225" b="1" i="0" dirty="0">
               <a:solidFill>
@@ -9873,6 +9719,17 @@
               </a:defRPr>
             </a:pPr>
             <a:r>
+              <a:rPr lang="ko-KR" altLang="en-US" sz="1350" b="1" i="0" dirty="0">
+                <a:solidFill>
+                  <a:srgbClr val="3D8DFF"/>
+                </a:solidFill>
+                <a:latin typeface="Noto Sans KR"/>
+                <a:ea typeface="Noto Sans KR"/>
+                <a:cs typeface="Noto Sans KR"/>
+              </a:rPr>
+              <a:t>협업 주도 및 </a:t>
+            </a:r>
+            <a:r>
               <a:rPr sz="1350" b="1" i="0" dirty="0" err="1">
                 <a:solidFill>
                   <a:srgbClr val="3D8DFF"/>
@@ -9914,27 +9771,8 @@
                 <a:ea typeface="Noto Sans KR"/>
                 <a:cs typeface="Noto Sans KR"/>
               </a:rPr>
-              <a:t> · 3D </a:t>
-            </a:r>
-            <a:r>
-              <a:rPr sz="1350" b="1" i="0" dirty="0" err="1">
-                <a:solidFill>
-                  <a:srgbClr val="3D8DFF"/>
-                </a:solidFill>
-                <a:latin typeface="Noto Sans KR"/>
-                <a:ea typeface="Noto Sans KR"/>
-                <a:cs typeface="Noto Sans KR"/>
-              </a:rPr>
-              <a:t>환경</a:t>
-            </a:r>
-            <a:endParaRPr sz="1350" b="1" i="0" dirty="0">
-              <a:solidFill>
-                <a:srgbClr val="3D8DFF"/>
-              </a:solidFill>
-              <a:latin typeface="Noto Sans KR"/>
-              <a:ea typeface="Noto Sans KR"/>
-              <a:cs typeface="Noto Sans KR"/>
-            </a:endParaRPr>
+              <a:t> </a:t>
+            </a:r>
           </a:p>
         </p:txBody>
       </p:sp>
@@ -10243,7 +10081,40 @@
                 <a:ea typeface="Noto Sans KR"/>
                 <a:cs typeface="Noto Sans KR"/>
               </a:rPr>
-              <a:t> · </a:t>
+              <a:t> </a:t>
+            </a:r>
+            <a:r>
+              <a:rPr lang="ko-KR" altLang="en-US" sz="1350" b="1" dirty="0">
+                <a:solidFill>
+                  <a:srgbClr val="3D8DFF"/>
+                </a:solidFill>
+                <a:latin typeface="Noto Sans KR"/>
+                <a:ea typeface="Noto Sans KR"/>
+                <a:cs typeface="Noto Sans KR"/>
+              </a:rPr>
+              <a:t>및</a:t>
+            </a:r>
+            <a:r>
+              <a:rPr sz="1350" b="1" i="0" dirty="0">
+                <a:solidFill>
+                  <a:srgbClr val="3D8DFF"/>
+                </a:solidFill>
+                <a:latin typeface="Noto Sans KR"/>
+                <a:ea typeface="Noto Sans KR"/>
+                <a:cs typeface="Noto Sans KR"/>
+              </a:rPr>
+              <a:t> </a:t>
+            </a:r>
+            <a:r>
+              <a:rPr lang="ko-KR" altLang="en-US" sz="1350" b="1" i="0" dirty="0">
+                <a:solidFill>
+                  <a:srgbClr val="3D8DFF"/>
+                </a:solidFill>
+                <a:latin typeface="Noto Sans KR"/>
+                <a:ea typeface="Noto Sans KR"/>
+                <a:cs typeface="Noto Sans KR"/>
+              </a:rPr>
+              <a:t>시스템 </a:t>
             </a:r>
             <a:r>
               <a:rPr sz="1350" b="1" i="0" dirty="0" err="1">
@@ -11442,7 +11313,7 @@
               </a:defRPr>
             </a:pPr>
             <a:r>
-              <a:rPr sz="3225" b="1" i="0" dirty="0">
+              <a:rPr lang="en-US" sz="3225" b="1" i="0" dirty="0">
                 <a:solidFill>
                   <a:schemeClr val="accent6">
                     <a:lumMod val="40000"/>
@@ -11453,105 +11324,7 @@
                 <a:ea typeface="Noto Sans KR"/>
                 <a:cs typeface="Noto Sans KR"/>
               </a:rPr>
-              <a:t>PC </a:t>
-            </a:r>
-            <a:r>
-              <a:rPr sz="3225" b="1" i="0" dirty="0" err="1">
-                <a:solidFill>
-                  <a:schemeClr val="accent6">
-                    <a:lumMod val="40000"/>
-                    <a:lumOff val="60000"/>
-                  </a:schemeClr>
-                </a:solidFill>
-                <a:latin typeface="Noto Sans KR"/>
-                <a:ea typeface="Noto Sans KR"/>
-                <a:cs typeface="Noto Sans KR"/>
-              </a:rPr>
-              <a:t>미스터리·공포</a:t>
-            </a:r>
-            <a:r>
-              <a:rPr sz="3225" b="1" i="0" dirty="0">
-                <a:solidFill>
-                  <a:schemeClr val="accent6">
-                    <a:lumMod val="40000"/>
-                    <a:lumOff val="60000"/>
-                  </a:schemeClr>
-                </a:solidFill>
-                <a:latin typeface="Noto Sans KR"/>
-                <a:ea typeface="Noto Sans KR"/>
-                <a:cs typeface="Noto Sans KR"/>
-              </a:rPr>
-              <a:t> </a:t>
-            </a:r>
-            <a:r>
-              <a:rPr sz="3225" b="1" i="0" dirty="0" err="1">
-                <a:solidFill>
-                  <a:schemeClr val="accent6">
-                    <a:lumMod val="40000"/>
-                    <a:lumOff val="60000"/>
-                  </a:schemeClr>
-                </a:solidFill>
-                <a:latin typeface="Noto Sans KR"/>
-                <a:ea typeface="Noto Sans KR"/>
-                <a:cs typeface="Noto Sans KR"/>
-              </a:rPr>
-              <a:t>게임</a:t>
-            </a:r>
-            <a:r>
-              <a:rPr sz="3225" b="1" i="0" dirty="0">
-                <a:solidFill>
-                  <a:schemeClr val="accent6">
-                    <a:lumMod val="40000"/>
-                    <a:lumOff val="60000"/>
-                  </a:schemeClr>
-                </a:solidFill>
-                <a:latin typeface="Noto Sans KR"/>
-                <a:ea typeface="Noto Sans KR"/>
-                <a:cs typeface="Noto Sans KR"/>
-              </a:rPr>
-              <a:t> </a:t>
-            </a:r>
-            <a:r>
-              <a:rPr sz="3225" b="1" i="0" dirty="0" err="1">
-                <a:solidFill>
-                  <a:schemeClr val="accent6">
-                    <a:lumMod val="40000"/>
-                    <a:lumOff val="60000"/>
-                  </a:schemeClr>
-                </a:solidFill>
-                <a:latin typeface="Noto Sans KR"/>
-                <a:ea typeface="Noto Sans KR"/>
-                <a:cs typeface="Noto Sans KR"/>
-              </a:rPr>
-              <a:t>이용자</a:t>
-            </a:r>
-            <a:r>
-              <a:rPr lang="en-US" sz="3225" b="1" dirty="0">
-                <a:solidFill>
-                  <a:schemeClr val="accent6">
-                    <a:lumMod val="40000"/>
-                    <a:lumOff val="60000"/>
-                  </a:schemeClr>
-                </a:solidFill>
-                <a:latin typeface="Noto Sans KR"/>
-                <a:ea typeface="Noto Sans KR"/>
-                <a:cs typeface="Noto Sans KR"/>
-              </a:rPr>
-              <a:t> </a:t>
-            </a:r>
-            <a:r>
-              <a:rPr lang="ko-KR" altLang="en-US" sz="3225" b="1" dirty="0">
-                <a:solidFill>
-                  <a:schemeClr val="accent6">
-                    <a:lumMod val="40000"/>
-                    <a:lumOff val="60000"/>
-                  </a:schemeClr>
-                </a:solidFill>
-                <a:latin typeface="Noto Sans KR"/>
-                <a:ea typeface="Noto Sans KR"/>
-                <a:cs typeface="Noto Sans KR"/>
-              </a:rPr>
-              <a:t>타겟</a:t>
+              <a:t>Market Potential</a:t>
             </a:r>
             <a:endParaRPr sz="3225" b="1" i="0" dirty="0">
               <a:solidFill>
@@ -11697,8 +11470,8 @@
           </a:bodyPr>
           <a:lstStyle/>
           <a:p>
-            <a:pPr algn="l">
-              <a:defRPr sz="2925" b="1" i="0">
+            <a:pPr>
+              <a:defRPr sz="3225" b="1" i="0">
                 <a:solidFill>
                   <a:srgbClr val="111318"/>
                 </a:solidFill>
@@ -11708,52 +11481,66 @@
               </a:defRPr>
             </a:pPr>
             <a:r>
-              <a:rPr sz="2925" b="1" i="0" dirty="0" err="1">
-                <a:solidFill>
-                  <a:schemeClr val="accent6">
-                    <a:lumMod val="20000"/>
-                    <a:lumOff val="80000"/>
-                  </a:schemeClr>
-                </a:solidFill>
-                <a:latin typeface="Noto Sans KR"/>
-                <a:ea typeface="Noto Sans KR"/>
-                <a:cs typeface="Noto Sans KR"/>
-              </a:rPr>
-              <a:t>규칙을</a:t>
-            </a:r>
-            <a:r>
-              <a:rPr sz="2925" b="1" i="0" dirty="0">
-                <a:solidFill>
-                  <a:schemeClr val="accent6">
-                    <a:lumMod val="20000"/>
-                    <a:lumOff val="80000"/>
-                  </a:schemeClr>
-                </a:solidFill>
-                <a:latin typeface="Noto Sans KR"/>
-                <a:ea typeface="Noto Sans KR"/>
-                <a:cs typeface="Noto Sans KR"/>
-              </a:rPr>
-              <a:t> </a:t>
-            </a:r>
-            <a:r>
-              <a:rPr sz="2925" b="1" i="0" dirty="0" err="1">
-                <a:solidFill>
-                  <a:schemeClr val="accent6">
-                    <a:lumMod val="20000"/>
-                    <a:lumOff val="80000"/>
-                  </a:schemeClr>
-                </a:solidFill>
-                <a:latin typeface="Noto Sans KR"/>
-                <a:ea typeface="Noto Sans KR"/>
-                <a:cs typeface="Noto Sans KR"/>
-              </a:rPr>
-              <a:t>해석하고</a:t>
-            </a:r>
-            <a:endParaRPr sz="2925" b="1" i="0" dirty="0">
+              <a:rPr lang="en-US" altLang="ko-KR" sz="3200" b="1" dirty="0">
+                <a:solidFill>
+                  <a:schemeClr val="accent6">
+                    <a:lumMod val="40000"/>
+                    <a:lumOff val="60000"/>
+                  </a:schemeClr>
+                </a:solidFill>
+                <a:latin typeface="Noto Sans KR"/>
+                <a:ea typeface="Noto Sans KR"/>
+                <a:cs typeface="Noto Sans KR"/>
+              </a:rPr>
+              <a:t>PC </a:t>
+            </a:r>
+            <a:r>
+              <a:rPr lang="ko-KR" altLang="en-US" sz="3200" b="1" dirty="0">
+                <a:solidFill>
+                  <a:schemeClr val="accent6">
+                    <a:lumMod val="40000"/>
+                    <a:lumOff val="60000"/>
+                  </a:schemeClr>
+                </a:solidFill>
+                <a:latin typeface="Noto Sans KR"/>
+                <a:ea typeface="Noto Sans KR"/>
+                <a:cs typeface="Noto Sans KR"/>
+              </a:rPr>
+              <a:t>미스터리</a:t>
+            </a:r>
+            <a:r>
+              <a:rPr lang="en-US" altLang="ko-KR" sz="3200" b="1" dirty="0">
+                <a:solidFill>
+                  <a:schemeClr val="accent6">
+                    <a:lumMod val="40000"/>
+                    <a:lumOff val="60000"/>
+                  </a:schemeClr>
+                </a:solidFill>
+                <a:latin typeface="Noto Sans KR"/>
+                <a:ea typeface="Noto Sans KR"/>
+                <a:cs typeface="Noto Sans KR"/>
+              </a:rPr>
+              <a:t>·</a:t>
+            </a:r>
+            <a:r>
+              <a:rPr lang="ko-KR" altLang="en-US" sz="3200" b="1" dirty="0">
+                <a:solidFill>
+                  <a:schemeClr val="accent6">
+                    <a:lumMod val="40000"/>
+                    <a:lumOff val="60000"/>
+                  </a:schemeClr>
+                </a:solidFill>
+                <a:latin typeface="Noto Sans KR"/>
+                <a:ea typeface="Noto Sans KR"/>
+                <a:cs typeface="Noto Sans KR"/>
+              </a:rPr>
+              <a:t>공포 </a:t>
+            </a:r>
+            <a:endParaRPr lang="en-US" altLang="ko-KR" sz="3200" b="1" dirty="0">
               <a:solidFill>
                 <a:schemeClr val="accent6">
-                  <a:lumMod val="20000"/>
-                  <a:lumOff val="80000"/>
+                  <a:lumMod val="40000"/>
+                  <a:lumOff val="60000"/>
                 </a:schemeClr>
               </a:solidFill>
               <a:latin typeface="Noto Sans KR"/>
@@ -11762,8 +11549,8 @@
             </a:endParaRPr>
           </a:p>
           <a:p>
-            <a:pPr algn="l">
-              <a:defRPr sz="2925" b="1" i="0">
+            <a:pPr>
+              <a:defRPr sz="3225" b="1" i="0">
                 <a:solidFill>
                   <a:srgbClr val="111318"/>
                 </a:solidFill>
@@ -11773,165 +11560,19 @@
               </a:defRPr>
             </a:pPr>
             <a:r>
-              <a:rPr lang="ko-KR" altLang="en-US" sz="2925" b="1" dirty="0">
-                <a:solidFill>
-                  <a:schemeClr val="accent6">
-                    <a:lumMod val="20000"/>
-                    <a:lumOff val="80000"/>
-                  </a:schemeClr>
-                </a:solidFill>
-                <a:latin typeface="Noto Sans KR"/>
-                <a:ea typeface="Noto Sans KR"/>
-                <a:cs typeface="Noto Sans KR"/>
-              </a:rPr>
-              <a:t>자원</a:t>
-            </a:r>
-            <a:r>
-              <a:rPr sz="2925" b="1" i="0" dirty="0">
-                <a:solidFill>
-                  <a:schemeClr val="accent6">
-                    <a:lumMod val="20000"/>
-                    <a:lumOff val="80000"/>
-                  </a:schemeClr>
-                </a:solidFill>
-                <a:latin typeface="Noto Sans KR"/>
-                <a:ea typeface="Noto Sans KR"/>
-                <a:cs typeface="Noto Sans KR"/>
-              </a:rPr>
-              <a:t>을 </a:t>
-            </a:r>
-            <a:r>
-              <a:rPr sz="2925" b="1" i="0" dirty="0" err="1">
-                <a:solidFill>
-                  <a:schemeClr val="accent6">
-                    <a:lumMod val="20000"/>
-                    <a:lumOff val="80000"/>
-                  </a:schemeClr>
-                </a:solidFill>
-                <a:latin typeface="Noto Sans KR"/>
-                <a:ea typeface="Noto Sans KR"/>
-                <a:cs typeface="Noto Sans KR"/>
-              </a:rPr>
-              <a:t>관리하는</a:t>
-            </a:r>
-            <a:endParaRPr sz="2925" b="1" i="0" dirty="0">
-              <a:solidFill>
-                <a:schemeClr val="accent6">
-                  <a:lumMod val="20000"/>
-                  <a:lumOff val="80000"/>
-                </a:schemeClr>
-              </a:solidFill>
-              <a:latin typeface="Noto Sans KR"/>
-              <a:ea typeface="Noto Sans KR"/>
-              <a:cs typeface="Noto Sans KR"/>
-            </a:endParaRPr>
-          </a:p>
-          <a:p>
-            <a:pPr algn="l">
-              <a:defRPr sz="2925" b="1" i="0">
-                <a:solidFill>
-                  <a:srgbClr val="111318"/>
-                </a:solidFill>
-                <a:latin typeface="Noto Sans KR"/>
-                <a:ea typeface="Noto Sans KR"/>
-                <a:cs typeface="Noto Sans KR"/>
-              </a:defRPr>
-            </a:pPr>
-            <a:r>
-              <a:rPr lang="en-US" sz="2925" b="1" dirty="0">
-                <a:solidFill>
-                  <a:schemeClr val="accent6">
-                    <a:lumMod val="20000"/>
-                    <a:lumOff val="80000"/>
-                  </a:schemeClr>
-                </a:solidFill>
-                <a:latin typeface="Noto Sans KR"/>
-                <a:ea typeface="Noto Sans KR"/>
-                <a:cs typeface="Noto Sans KR"/>
-              </a:rPr>
-              <a:t>1</a:t>
-            </a:r>
-            <a:r>
-              <a:rPr lang="ko-KR" altLang="en-US" sz="2925" b="1" dirty="0">
-                <a:solidFill>
-                  <a:schemeClr val="accent6">
-                    <a:lumMod val="20000"/>
-                    <a:lumOff val="80000"/>
-                  </a:schemeClr>
-                </a:solidFill>
-                <a:latin typeface="Noto Sans KR"/>
-                <a:ea typeface="Noto Sans KR"/>
-                <a:cs typeface="Noto Sans KR"/>
-              </a:rPr>
-              <a:t>인칭</a:t>
-            </a:r>
-            <a:r>
-              <a:rPr sz="2925" b="1" i="0" dirty="0">
-                <a:solidFill>
-                  <a:schemeClr val="accent6">
-                    <a:lumMod val="20000"/>
-                    <a:lumOff val="80000"/>
-                  </a:schemeClr>
-                </a:solidFill>
-                <a:latin typeface="Noto Sans KR"/>
-                <a:ea typeface="Noto Sans KR"/>
-                <a:cs typeface="Noto Sans KR"/>
-              </a:rPr>
-              <a:t> </a:t>
-            </a:r>
-            <a:r>
-              <a:rPr sz="2925" b="1" i="0" dirty="0" err="1">
-                <a:solidFill>
-                  <a:schemeClr val="accent6">
-                    <a:lumMod val="20000"/>
-                    <a:lumOff val="80000"/>
-                  </a:schemeClr>
-                </a:solidFill>
-                <a:latin typeface="Noto Sans KR"/>
-                <a:ea typeface="Noto Sans KR"/>
-                <a:cs typeface="Noto Sans KR"/>
-              </a:rPr>
-              <a:t>플레이</a:t>
-            </a:r>
-            <a:r>
-              <a:rPr sz="2925" b="1" i="0" dirty="0">
-                <a:solidFill>
-                  <a:schemeClr val="accent6">
-                    <a:lumMod val="20000"/>
-                    <a:lumOff val="80000"/>
-                  </a:schemeClr>
-                </a:solidFill>
-                <a:latin typeface="Noto Sans KR"/>
-                <a:ea typeface="Noto Sans KR"/>
-                <a:cs typeface="Noto Sans KR"/>
-              </a:rPr>
-              <a:t> </a:t>
-            </a:r>
-            <a:r>
-              <a:rPr sz="2925" b="1" i="0" dirty="0" err="1">
-                <a:solidFill>
-                  <a:schemeClr val="accent6">
-                    <a:lumMod val="20000"/>
-                    <a:lumOff val="80000"/>
-                  </a:schemeClr>
-                </a:solidFill>
-                <a:latin typeface="Noto Sans KR"/>
-                <a:ea typeface="Noto Sans KR"/>
-                <a:cs typeface="Noto Sans KR"/>
-              </a:rPr>
-              <a:t>경험</a:t>
-            </a:r>
-            <a:endParaRPr sz="2925" b="1" i="0" dirty="0">
-              <a:solidFill>
-                <a:schemeClr val="accent6">
-                  <a:lumMod val="20000"/>
-                  <a:lumOff val="80000"/>
-                </a:schemeClr>
-              </a:solidFill>
-              <a:latin typeface="Noto Sans KR"/>
-              <a:ea typeface="Noto Sans KR"/>
-              <a:cs typeface="Noto Sans KR"/>
-            </a:endParaRPr>
+              <a:rPr lang="ko-KR" altLang="en-US" sz="3200" b="1" dirty="0">
+                <a:solidFill>
+                  <a:schemeClr val="accent6">
+                    <a:lumMod val="40000"/>
+                    <a:lumOff val="60000"/>
+                  </a:schemeClr>
+                </a:solidFill>
+                <a:latin typeface="Noto Sans KR"/>
+                <a:ea typeface="Noto Sans KR"/>
+                <a:cs typeface="Noto Sans KR"/>
+              </a:rPr>
+              <a:t>게임 이용자 타겟</a:t>
+            </a:r>
           </a:p>
         </p:txBody>
       </p:sp>
@@ -11980,6 +11621,20 @@
               </a:defRPr>
             </a:pPr>
             <a:r>
+              <a:rPr lang="ko-KR" altLang="en-US" sz="1575" dirty="0">
+                <a:solidFill>
+                  <a:schemeClr val="accent6">
+                    <a:lumMod val="20000"/>
+                    <a:lumOff val="80000"/>
+                  </a:schemeClr>
+                </a:solidFill>
+                <a:latin typeface="Noto Sans KR"/>
+                <a:ea typeface="Noto Sans KR"/>
+                <a:cs typeface="Noto Sans KR"/>
+              </a:rPr>
+              <a:t>미스터리한 </a:t>
+            </a:r>
+            <a:r>
               <a:rPr sz="1575" b="0" i="0" dirty="0" err="1">
                 <a:solidFill>
                   <a:schemeClr val="accent6">
@@ -11994,144 +11649,46 @@
               <a:t>박물관</a:t>
             </a:r>
             <a:r>
-              <a:rPr sz="1575" b="0" i="0" dirty="0">
-                <a:solidFill>
-                  <a:schemeClr val="accent6">
-                    <a:lumMod val="20000"/>
-                    <a:lumOff val="80000"/>
-                  </a:schemeClr>
-                </a:solidFill>
-                <a:latin typeface="Noto Sans KR"/>
-                <a:ea typeface="Noto Sans KR"/>
-                <a:cs typeface="Noto Sans KR"/>
-              </a:rPr>
-              <a:t> </a:t>
-            </a:r>
-            <a:r>
-              <a:rPr sz="1575" b="0" i="0" dirty="0" err="1">
-                <a:solidFill>
-                  <a:schemeClr val="accent6">
-                    <a:lumMod val="20000"/>
-                    <a:lumOff val="80000"/>
-                  </a:schemeClr>
-                </a:solidFill>
-                <a:latin typeface="Noto Sans KR"/>
-                <a:ea typeface="Noto Sans KR"/>
-                <a:cs typeface="Noto Sans KR"/>
-              </a:rPr>
-              <a:t>야간</a:t>
-            </a:r>
-            <a:r>
-              <a:rPr sz="1575" b="0" i="0" dirty="0">
-                <a:solidFill>
-                  <a:schemeClr val="accent6">
-                    <a:lumMod val="20000"/>
-                    <a:lumOff val="80000"/>
-                  </a:schemeClr>
-                </a:solidFill>
-                <a:latin typeface="Noto Sans KR"/>
-                <a:ea typeface="Noto Sans KR"/>
-                <a:cs typeface="Noto Sans KR"/>
-              </a:rPr>
-              <a:t> </a:t>
-            </a:r>
-            <a:r>
-              <a:rPr sz="1575" b="0" i="0" dirty="0" err="1">
-                <a:solidFill>
-                  <a:schemeClr val="accent6">
-                    <a:lumMod val="20000"/>
-                    <a:lumOff val="80000"/>
-                  </a:schemeClr>
-                </a:solidFill>
-                <a:latin typeface="Noto Sans KR"/>
-                <a:ea typeface="Noto Sans KR"/>
-                <a:cs typeface="Noto Sans KR"/>
-              </a:rPr>
-              <a:t>근무와</a:t>
-            </a:r>
-            <a:r>
-              <a:rPr sz="1575" b="0" i="0" dirty="0">
-                <a:solidFill>
-                  <a:schemeClr val="accent6">
-                    <a:lumMod val="20000"/>
-                    <a:lumOff val="80000"/>
-                  </a:schemeClr>
-                </a:solidFill>
-                <a:latin typeface="Noto Sans KR"/>
-                <a:ea typeface="Noto Sans KR"/>
-                <a:cs typeface="Noto Sans KR"/>
-              </a:rPr>
-              <a:t> </a:t>
-            </a:r>
-            <a:r>
-              <a:rPr sz="1575" b="0" i="0" dirty="0" err="1">
-                <a:solidFill>
-                  <a:schemeClr val="accent6">
-                    <a:lumMod val="20000"/>
-                    <a:lumOff val="80000"/>
-                  </a:schemeClr>
-                </a:solidFill>
-                <a:latin typeface="Noto Sans KR"/>
-                <a:ea typeface="Noto Sans KR"/>
-                <a:cs typeface="Noto Sans KR"/>
-              </a:rPr>
-              <a:t>나폴리탄</a:t>
-            </a:r>
-            <a:r>
-              <a:rPr sz="1575" b="0" i="0" dirty="0">
-                <a:solidFill>
-                  <a:schemeClr val="accent6">
-                    <a:lumMod val="20000"/>
-                    <a:lumOff val="80000"/>
-                  </a:schemeClr>
-                </a:solidFill>
-                <a:latin typeface="Noto Sans KR"/>
-                <a:ea typeface="Noto Sans KR"/>
-                <a:cs typeface="Noto Sans KR"/>
-              </a:rPr>
-              <a:t> </a:t>
-            </a:r>
-            <a:r>
-              <a:rPr sz="1575" b="0" i="0" dirty="0" err="1">
-                <a:solidFill>
-                  <a:schemeClr val="accent6">
-                    <a:lumMod val="20000"/>
-                    <a:lumOff val="80000"/>
-                  </a:schemeClr>
-                </a:solidFill>
-                <a:latin typeface="Noto Sans KR"/>
-                <a:ea typeface="Noto Sans KR"/>
-                <a:cs typeface="Noto Sans KR"/>
-              </a:rPr>
-              <a:t>수칙을</a:t>
-            </a:r>
-            <a:r>
-              <a:rPr sz="1575" b="0" i="0" dirty="0">
-                <a:solidFill>
-                  <a:schemeClr val="accent6">
-                    <a:lumMod val="20000"/>
-                    <a:lumOff val="80000"/>
-                  </a:schemeClr>
-                </a:solidFill>
-                <a:latin typeface="Noto Sans KR"/>
-                <a:ea typeface="Noto Sans KR"/>
-                <a:cs typeface="Noto Sans KR"/>
-              </a:rPr>
-              <a:t> </a:t>
-            </a:r>
-            <a:r>
-              <a:rPr sz="1575" b="0" i="0" dirty="0" err="1">
-                <a:solidFill>
-                  <a:schemeClr val="accent6">
-                    <a:lumMod val="20000"/>
-                    <a:lumOff val="80000"/>
-                  </a:schemeClr>
-                </a:solidFill>
-                <a:latin typeface="Noto Sans KR"/>
-                <a:ea typeface="Noto Sans KR"/>
-                <a:cs typeface="Noto Sans KR"/>
-              </a:rPr>
-              <a:t>결합해</a:t>
+              <a:rPr lang="ko-KR" altLang="en-US" sz="1575" dirty="0">
+                <a:solidFill>
+                  <a:schemeClr val="accent6">
+                    <a:lumMod val="20000"/>
+                    <a:lumOff val="80000"/>
+                  </a:schemeClr>
+                </a:solidFill>
+                <a:latin typeface="Noto Sans KR"/>
+                <a:ea typeface="Noto Sans KR"/>
+                <a:cs typeface="Noto Sans KR"/>
+              </a:rPr>
+              <a:t>의 풍경과 몰입도를 높이는 </a:t>
+            </a:r>
+            <a:r>
+              <a:rPr lang="en-US" altLang="ko-KR" sz="1575" dirty="0">
+                <a:solidFill>
+                  <a:schemeClr val="accent6">
+                    <a:lumMod val="20000"/>
+                    <a:lumOff val="80000"/>
+                  </a:schemeClr>
+                </a:solidFill>
+                <a:latin typeface="Noto Sans KR"/>
+                <a:ea typeface="Noto Sans KR"/>
+                <a:cs typeface="Noto Sans KR"/>
+              </a:rPr>
+              <a:t>BGM</a:t>
+            </a:r>
+            <a:r>
+              <a:rPr lang="ko-KR" altLang="en-US" sz="1575" dirty="0">
+                <a:solidFill>
+                  <a:schemeClr val="accent6">
+                    <a:lumMod val="20000"/>
+                    <a:lumOff val="80000"/>
+                  </a:schemeClr>
+                </a:solidFill>
+                <a:latin typeface="Noto Sans KR"/>
+                <a:ea typeface="Noto Sans KR"/>
+                <a:cs typeface="Noto Sans KR"/>
+              </a:rPr>
+              <a:t>으로</a:t>
             </a:r>
             <a:endParaRPr sz="1575" b="0" i="0" dirty="0">
               <a:solidFill>
@@ -12224,7 +11781,21 @@
                 <a:ea typeface="Noto Sans KR"/>
                 <a:cs typeface="Noto Sans KR"/>
               </a:rPr>
-              <a:t>콘셉트를</a:t>
+              <a:t>콘셉트</a:t>
+            </a:r>
+            <a:r>
+              <a:rPr lang="ko-KR" altLang="en-US" sz="1575" b="0" i="0" dirty="0">
+                <a:solidFill>
+                  <a:schemeClr val="accent6">
+                    <a:lumMod val="20000"/>
+                    <a:lumOff val="80000"/>
+                  </a:schemeClr>
+                </a:solidFill>
+                <a:latin typeface="Noto Sans KR"/>
+                <a:ea typeface="Noto Sans KR"/>
+                <a:cs typeface="Noto Sans KR"/>
+              </a:rPr>
+              <a:t>가</a:t>
             </a:r>
             <a:r>
               <a:rPr sz="1575" b="0" i="0" dirty="0">
@@ -12280,38 +11851,24 @@
                 <a:ea typeface="Noto Sans KR"/>
                 <a:cs typeface="Noto Sans KR"/>
               </a:rPr>
-              <a:t>전달할</a:t>
-            </a:r>
-            <a:r>
-              <a:rPr sz="1575" b="0" i="0" dirty="0">
-                <a:solidFill>
-                  <a:schemeClr val="accent6">
-                    <a:lumMod val="20000"/>
-                    <a:lumOff val="80000"/>
-                  </a:schemeClr>
-                </a:solidFill>
-                <a:latin typeface="Noto Sans KR"/>
-                <a:ea typeface="Noto Sans KR"/>
-                <a:cs typeface="Noto Sans KR"/>
-              </a:rPr>
-              <a:t> 수 </a:t>
-            </a:r>
-            <a:r>
-              <a:rPr sz="1575" b="0" i="0" dirty="0" err="1">
-                <a:solidFill>
-                  <a:schemeClr val="accent6">
-                    <a:lumMod val="20000"/>
-                    <a:lumOff val="80000"/>
-                  </a:schemeClr>
-                </a:solidFill>
-                <a:latin typeface="Noto Sans KR"/>
-                <a:ea typeface="Noto Sans KR"/>
-                <a:cs typeface="Noto Sans KR"/>
-              </a:rPr>
-              <a:t>있다</a:t>
-            </a:r>
-            <a:r>
-              <a:rPr sz="1575" b="0" i="0" dirty="0">
+              <a:t>전달</a:t>
+            </a:r>
+            <a:r>
+              <a:rPr lang="ko-KR" altLang="en-US" sz="1575" b="0" i="0" dirty="0">
+                <a:solidFill>
+                  <a:schemeClr val="accent6">
+                    <a:lumMod val="20000"/>
+                    <a:lumOff val="80000"/>
+                  </a:schemeClr>
+                </a:solidFill>
+                <a:latin typeface="Noto Sans KR"/>
+                <a:ea typeface="Noto Sans KR"/>
+                <a:cs typeface="Noto Sans KR"/>
+              </a:rPr>
+              <a:t>됩니다</a:t>
+            </a:r>
+            <a:r>
+              <a:rPr lang="en-US" altLang="ko-KR" sz="1575" b="0" i="0" dirty="0">
                 <a:solidFill>
                   <a:schemeClr val="accent6">
                     <a:lumMod val="20000"/>
@@ -12324,6 +11881,17 @@
               </a:rPr>
               <a:t>.</a:t>
             </a:r>
+            <a:endParaRPr sz="1575" b="0" i="0" dirty="0">
+              <a:solidFill>
+                <a:schemeClr val="accent6">
+                  <a:lumMod val="20000"/>
+                  <a:lumOff val="80000"/>
+                </a:schemeClr>
+              </a:solidFill>
+              <a:latin typeface="Noto Sans KR"/>
+              <a:ea typeface="Noto Sans KR"/>
+              <a:cs typeface="Noto Sans KR"/>
+            </a:endParaRPr>
           </a:p>
         </p:txBody>
       </p:sp>
@@ -13010,7 +12578,7 @@
               <a:t> </a:t>
             </a:r>
             <a:r>
-              <a:rPr sz="1500" b="1" i="0" dirty="0" err="1">
+              <a:rPr lang="ko-KR" altLang="en-US" sz="1500" b="1" dirty="0">
                 <a:solidFill>
                   <a:srgbClr val="3D8DFF"/>
                 </a:solidFill>
@@ -13018,7 +12586,7 @@
                 <a:ea typeface="Noto Sans KR"/>
                 <a:cs typeface="Noto Sans KR"/>
               </a:rPr>
-              <a:t>준비</a:t>
+              <a:t>시 가정</a:t>
             </a:r>
             <a:endParaRPr sz="1500" b="1" i="0" dirty="0">
               <a:solidFill>

--- a/Presentation/AETERNA_프로젝트_심사발표.pptx
+++ b/Presentation/AETERNA_프로젝트_심사발표.pptx
@@ -9,10 +9,10 @@
   </p:notesMasterIdLst>
   <p:sldIdLst>
     <p:sldId id="256" r:id="rId2"/>
-    <p:sldId id="264" r:id="rId3"/>
-    <p:sldId id="257" r:id="rId4"/>
-    <p:sldId id="258" r:id="rId5"/>
-    <p:sldId id="259" r:id="rId6"/>
+    <p:sldId id="257" r:id="rId3"/>
+    <p:sldId id="258" r:id="rId4"/>
+    <p:sldId id="259" r:id="rId5"/>
+    <p:sldId id="266" r:id="rId6"/>
     <p:sldId id="260" r:id="rId7"/>
     <p:sldId id="262" r:id="rId8"/>
     <p:sldId id="265" r:id="rId9"/>
@@ -380,13 +380,7 @@
   <p:cSld>
     <p:spTree>
       <p:nvGrpSpPr>
-        <p:cNvPr id="1" name="">
-          <a:extLst>
-            <a:ext uri="{FF2B5EF4-FFF2-40B4-BE49-F238E27FC236}">
-              <a16:creationId xmlns:a16="http://schemas.microsoft.com/office/drawing/2014/main" id="{81D31DFC-8D25-1460-1F90-CCCCAA78D70D}"/>
-            </a:ext>
-          </a:extLst>
-        </p:cNvPr>
+        <p:cNvPr id="1" name=""/>
         <p:cNvGrpSpPr/>
         <p:nvPr/>
       </p:nvGrpSpPr>
@@ -400,13 +394,7 @@
       </p:grpSpPr>
       <p:sp>
         <p:nvSpPr>
-          <p:cNvPr id="2" name="Slide Image Placeholder 1">
-            <a:extLst>
-              <a:ext uri="{FF2B5EF4-FFF2-40B4-BE49-F238E27FC236}">
-                <a16:creationId xmlns:a16="http://schemas.microsoft.com/office/drawing/2014/main" id="{72B9EE7C-F0BC-8255-F07F-23705D958F7B}"/>
-              </a:ext>
-            </a:extLst>
-          </p:cNvPr>
+          <p:cNvPr id="2" name="Slide Image Placeholder 1"/>
           <p:cNvSpPr>
             <a:spLocks noGrp="1" noRot="1" noChangeAspect="1"/>
           </p:cNvSpPr>
@@ -418,13 +406,7 @@
       </p:sp>
       <p:sp>
         <p:nvSpPr>
-          <p:cNvPr id="3" name="Notes Placeholder 2">
-            <a:extLst>
-              <a:ext uri="{FF2B5EF4-FFF2-40B4-BE49-F238E27FC236}">
-                <a16:creationId xmlns:a16="http://schemas.microsoft.com/office/drawing/2014/main" id="{9103123A-321F-D3F7-C0B4-9675AF91D6E3}"/>
-              </a:ext>
-            </a:extLst>
-          </p:cNvPr>
+          <p:cNvPr id="3" name="Notes Placeholder 2"/>
           <p:cNvSpPr>
             <a:spLocks noGrp="1"/>
           </p:cNvSpPr>
@@ -443,20 +425,19 @@
           </a:p>
           <a:p>
             <a:r>
-              <a:t>C:\Users\godli\Downloads\FINAL-PRESENTATION_v2.pdf (project title, concept, team members)</a:t>
+              <a:t>C:\Users\godli\Downloads\FINAL-PRESENTATION_v2.pdf (game sequence, notebook, time and battery systems)</a:t>
+            </a:r>
+          </a:p>
+          <a:p>
+            <a:r>
+              <a:t>C:\Users\godli\OneDrive\Documents\카카오톡 받은 파일\첨부.  2026 AI에이전트 기반 언리얼 개발 워크프로세스 자동화 완성 과정 프로젝트 심사 및 컨설팅 계획_ 공유용.pdf (planning evaluation criteria)</a:t>
             </a:r>
           </a:p>
         </p:txBody>
       </p:sp>
       <p:sp>
         <p:nvSpPr>
-          <p:cNvPr id="4" name="Slide Number Placeholder 3">
-            <a:extLst>
-              <a:ext uri="{FF2B5EF4-FFF2-40B4-BE49-F238E27FC236}">
-                <a16:creationId xmlns:a16="http://schemas.microsoft.com/office/drawing/2014/main" id="{C24F3233-13F7-26A5-D863-99924CB2AE9F}"/>
-              </a:ext>
-            </a:extLst>
-          </p:cNvPr>
+          <p:cNvPr id="4" name="Slide Number Placeholder 3"/>
           <p:cNvSpPr>
             <a:spLocks noGrp="1"/>
           </p:cNvSpPr>
@@ -474,11 +455,6 @@
         </p:txBody>
       </p:sp>
     </p:spTree>
-    <p:extLst>
-      <p:ext uri="{BB962C8B-B14F-4D97-AF65-F5344CB8AC3E}">
-        <p14:creationId xmlns:p14="http://schemas.microsoft.com/office/powerpoint/2010/main" val="3152188715"/>
-      </p:ext>
-    </p:extLst>
   </p:cSld>
   <p:clrMapOvr>
     <a:masterClrMapping/>
@@ -536,12 +512,7 @@
           </a:p>
           <a:p>
             <a:r>
-              <a:t>C:\Users\godli\Downloads\FINAL-PRESENTATION_v2.pdf (game sequence, notebook, time and battery systems)</a:t>
-            </a:r>
-          </a:p>
-          <a:p>
-            <a:r>
-              <a:t>C:\Users\godli\OneDrive\Documents\카카오톡 받은 파일\첨부.  2026 AI에이전트 기반 언리얼 개발 워크프로세스 자동화 완성 과정 프로젝트 심사 및 컨설팅 계획_ 공유용.pdf (planning evaluation criteria)</a:t>
+              <a:t>C:\Users\godli\Downloads\FINAL-PRESENTATION_v2.pdf (Rider, CLAUDE.md, ComfyUI, Flow AI, GitHub, build validation)</a:t>
             </a:r>
           </a:p>
         </p:txBody>
@@ -623,7 +594,7 @@
           </a:p>
           <a:p>
             <a:r>
-              <a:t>C:\Users\godli\Downloads\FINAL-PRESENTATION_v2.pdf (Rider, CLAUDE.md, ComfyUI, Flow AI, GitHub, build validation)</a:t>
+              <a:t>C:\Users\godli\Downloads\FINAL-PRESENTATION_v2.pdf (notebook, time, interaction, battery and rule violation systems)</a:t>
             </a:r>
           </a:p>
         </p:txBody>
@@ -660,7 +631,13 @@
   <p:cSld>
     <p:spTree>
       <p:nvGrpSpPr>
-        <p:cNvPr id="1" name=""/>
+        <p:cNvPr id="1" name="">
+          <a:extLst>
+            <a:ext uri="{FF2B5EF4-FFF2-40B4-BE49-F238E27FC236}">
+              <a16:creationId xmlns:a16="http://schemas.microsoft.com/office/drawing/2014/main" id="{A9077DC1-05B4-E7E0-AF49-C31C3E214E5E}"/>
+            </a:ext>
+          </a:extLst>
+        </p:cNvPr>
         <p:cNvGrpSpPr/>
         <p:nvPr/>
       </p:nvGrpSpPr>
@@ -674,7 +651,13 @@
       </p:grpSpPr>
       <p:sp>
         <p:nvSpPr>
-          <p:cNvPr id="2" name="Slide Image Placeholder 1"/>
+          <p:cNvPr id="2" name="Slide Image Placeholder 1">
+            <a:extLst>
+              <a:ext uri="{FF2B5EF4-FFF2-40B4-BE49-F238E27FC236}">
+                <a16:creationId xmlns:a16="http://schemas.microsoft.com/office/drawing/2014/main" id="{E9C769D9-16D2-0321-463C-E821C7128FF1}"/>
+              </a:ext>
+            </a:extLst>
+          </p:cNvPr>
           <p:cNvSpPr>
             <a:spLocks noGrp="1" noRot="1" noChangeAspect="1"/>
           </p:cNvSpPr>
@@ -686,7 +669,13 @@
       </p:sp>
       <p:sp>
         <p:nvSpPr>
-          <p:cNvPr id="3" name="Notes Placeholder 2"/>
+          <p:cNvPr id="3" name="Notes Placeholder 2">
+            <a:extLst>
+              <a:ext uri="{FF2B5EF4-FFF2-40B4-BE49-F238E27FC236}">
+                <a16:creationId xmlns:a16="http://schemas.microsoft.com/office/drawing/2014/main" id="{1539E152-8389-B4AE-E3C1-3DAC66F9D439}"/>
+              </a:ext>
+            </a:extLst>
+          </p:cNvPr>
           <p:cNvSpPr>
             <a:spLocks noGrp="1"/>
           </p:cNvSpPr>
@@ -712,7 +701,13 @@
       </p:sp>
       <p:sp>
         <p:nvSpPr>
-          <p:cNvPr id="4" name="Slide Number Placeholder 3"/>
+          <p:cNvPr id="4" name="Slide Number Placeholder 3">
+            <a:extLst>
+              <a:ext uri="{FF2B5EF4-FFF2-40B4-BE49-F238E27FC236}">
+                <a16:creationId xmlns:a16="http://schemas.microsoft.com/office/drawing/2014/main" id="{E140372C-1996-AA99-0A25-4B4EC1FB27F9}"/>
+              </a:ext>
+            </a:extLst>
+          </p:cNvPr>
           <p:cNvSpPr>
             <a:spLocks noGrp="1"/>
           </p:cNvSpPr>
@@ -730,6 +725,11 @@
         </p:txBody>
       </p:sp>
     </p:spTree>
+    <p:extLst>
+      <p:ext uri="{BB962C8B-B14F-4D97-AF65-F5344CB8AC3E}">
+        <p14:creationId xmlns:p14="http://schemas.microsoft.com/office/powerpoint/2010/main" val="698851367"/>
+      </p:ext>
+    </p:extLst>
   </p:cSld>
   <p:clrMapOvr>
     <a:masterClrMapping/>
@@ -2244,1039 +2244,6 @@
 <file path=ppt/slides/slide2.xml><?xml version="1.0" encoding="utf-8"?>
 <p:sld xmlns:a="http://schemas.openxmlformats.org/drawingml/2006/main" xmlns:r="http://schemas.openxmlformats.org/officeDocument/2006/relationships" xmlns:p="http://schemas.openxmlformats.org/presentationml/2006/main">
   <p:cSld>
-    <p:spTree>
-      <p:nvGrpSpPr>
-        <p:cNvPr id="1" name="">
-          <a:extLst>
-            <a:ext uri="{FF2B5EF4-FFF2-40B4-BE49-F238E27FC236}">
-              <a16:creationId xmlns:a16="http://schemas.microsoft.com/office/drawing/2014/main" id="{E01F9A86-9AD0-6A26-F7CB-A76C64B34C45}"/>
-            </a:ext>
-          </a:extLst>
-        </p:cNvPr>
-        <p:cNvGrpSpPr/>
-        <p:nvPr/>
-      </p:nvGrpSpPr>
-      <p:grpSpPr>
-        <a:xfrm>
-          <a:off x="0" y="0"/>
-          <a:ext cx="0" cy="0"/>
-          <a:chOff x="0" y="0"/>
-          <a:chExt cx="0" cy="0"/>
-        </a:xfrm>
-      </p:grpSpPr>
-      <p:pic>
-        <p:nvPicPr>
-          <p:cNvPr id="12" name="그림 11">
-            <a:extLst>
-              <a:ext uri="{FF2B5EF4-FFF2-40B4-BE49-F238E27FC236}">
-                <a16:creationId xmlns:a16="http://schemas.microsoft.com/office/drawing/2014/main" id="{010545EB-433B-C380-4F9F-F5F57C7BE955}"/>
-              </a:ext>
-            </a:extLst>
-          </p:cNvPr>
-          <p:cNvPicPr>
-            <a:picLocks noChangeAspect="1"/>
-          </p:cNvPicPr>
-          <p:nvPr/>
-        </p:nvPicPr>
-        <p:blipFill>
-          <a:blip r:embed="rId3">
-            <a:alphaModFix amt="90000"/>
-          </a:blip>
-          <a:stretch>
-            <a:fillRect/>
-          </a:stretch>
-        </p:blipFill>
-        <p:spPr>
-          <a:xfrm>
-            <a:off x="6478" y="0"/>
-            <a:ext cx="12185522" cy="6858000"/>
-          </a:xfrm>
-          <a:prstGeom prst="rect">
-            <a:avLst/>
-          </a:prstGeom>
-        </p:spPr>
-      </p:pic>
-      <p:sp>
-        <p:nvSpPr>
-          <p:cNvPr id="11" name="cover-hero-field">
-            <a:extLst>
-              <a:ext uri="{FF2B5EF4-FFF2-40B4-BE49-F238E27FC236}">
-                <a16:creationId xmlns:a16="http://schemas.microsoft.com/office/drawing/2014/main" id="{04E3ED24-6D4E-7BC6-0723-CA7072706B48}"/>
-              </a:ext>
-            </a:extLst>
-          </p:cNvPr>
-          <p:cNvSpPr>
-            <a:spLocks noGrp="1"/>
-          </p:cNvSpPr>
-          <p:nvPr/>
-        </p:nvSpPr>
-        <p:spPr>
-          <a:xfrm>
-            <a:off x="6858000" y="0"/>
-            <a:ext cx="5334000" cy="6858000"/>
-          </a:xfrm>
-          <a:prstGeom prst="rect">
-            <a:avLst/>
-          </a:prstGeom>
-          <a:solidFill>
-            <a:srgbClr val="18202D"/>
-          </a:solidFill>
-          <a:ln w="0">
-            <a:noFill/>
-            <a:prstDash val="solid"/>
-          </a:ln>
-        </p:spPr>
-        <p:txBody>
-          <a:bodyPr/>
-          <a:lstStyle/>
-          <a:p>
-            <a:endParaRPr lang="ko-KR" altLang="en-US"/>
-          </a:p>
-        </p:txBody>
-      </p:sp>
-      <p:sp>
-        <p:nvSpPr>
-          <p:cNvPr id="2" name="cover-accent">
-            <a:extLst>
-              <a:ext uri="{FF2B5EF4-FFF2-40B4-BE49-F238E27FC236}">
-                <a16:creationId xmlns:a16="http://schemas.microsoft.com/office/drawing/2014/main" id="{BF980842-D005-C309-9004-8FE0625B0910}"/>
-              </a:ext>
-            </a:extLst>
-          </p:cNvPr>
-          <p:cNvSpPr>
-            <a:spLocks noGrp="1"/>
-          </p:cNvSpPr>
-          <p:nvPr/>
-        </p:nvSpPr>
-        <p:spPr>
-          <a:xfrm>
-            <a:off x="6858000" y="0"/>
-            <a:ext cx="171450" cy="6858000"/>
-          </a:xfrm>
-          <a:prstGeom prst="rect">
-            <a:avLst/>
-          </a:prstGeom>
-          <a:solidFill>
-            <a:srgbClr val="3D8DFF"/>
-          </a:solidFill>
-          <a:ln w="0">
-            <a:noFill/>
-            <a:prstDash val="solid"/>
-          </a:ln>
-        </p:spPr>
-        <p:txBody>
-          <a:bodyPr/>
-          <a:lstStyle/>
-          <a:p>
-            <a:endParaRPr lang="ko-KR" altLang="en-US"/>
-          </a:p>
-        </p:txBody>
-      </p:sp>
-      <p:sp>
-        <p:nvSpPr>
-          <p:cNvPr id="5" name="cover-korean-title">
-            <a:extLst>
-              <a:ext uri="{FF2B5EF4-FFF2-40B4-BE49-F238E27FC236}">
-                <a16:creationId xmlns:a16="http://schemas.microsoft.com/office/drawing/2014/main" id="{3029B268-B93B-9CBF-1D3D-315323638F12}"/>
-              </a:ext>
-            </a:extLst>
-          </p:cNvPr>
-          <p:cNvSpPr>
-            <a:spLocks noGrp="1"/>
-          </p:cNvSpPr>
-          <p:nvPr/>
-        </p:nvSpPr>
-        <p:spPr>
-          <a:xfrm>
-            <a:off x="552450" y="2781300"/>
-            <a:ext cx="5810250" cy="1181100"/>
-          </a:xfrm>
-          <a:prstGeom prst="rect">
-            <a:avLst/>
-          </a:prstGeom>
-          <a:noFill/>
-          <a:ln w="0">
-            <a:noFill/>
-            <a:prstDash val="solid"/>
-          </a:ln>
-        </p:spPr>
-        <p:txBody>
-          <a:bodyPr lIns="0" tIns="0" rIns="0" bIns="0" anchor="t">
-            <a:normAutofit/>
-          </a:bodyPr>
-          <a:lstStyle/>
-          <a:p>
-            <a:pPr algn="l">
-              <a:defRPr sz="3150" b="1" i="0">
-                <a:solidFill>
-                  <a:srgbClr val="111318"/>
-                </a:solidFill>
-                <a:latin typeface="Noto Sans KR"/>
-                <a:ea typeface="Noto Sans KR"/>
-                <a:cs typeface="Noto Sans KR"/>
-              </a:defRPr>
-            </a:pPr>
-            <a:r>
-              <a:rPr sz="3150" b="1" i="0" dirty="0" err="1">
-                <a:solidFill>
-                  <a:schemeClr val="accent6">
-                    <a:lumMod val="20000"/>
-                    <a:lumOff val="80000"/>
-                  </a:schemeClr>
-                </a:solidFill>
-                <a:latin typeface="Noto Sans KR"/>
-                <a:ea typeface="Noto Sans KR"/>
-                <a:cs typeface="Noto Sans KR"/>
-              </a:rPr>
-              <a:t>규칙을</a:t>
-            </a:r>
-            <a:r>
-              <a:rPr sz="3150" b="1" i="0" dirty="0">
-                <a:solidFill>
-                  <a:schemeClr val="accent6">
-                    <a:lumMod val="20000"/>
-                    <a:lumOff val="80000"/>
-                  </a:schemeClr>
-                </a:solidFill>
-                <a:latin typeface="Noto Sans KR"/>
-                <a:ea typeface="Noto Sans KR"/>
-                <a:cs typeface="Noto Sans KR"/>
-              </a:rPr>
-              <a:t> </a:t>
-            </a:r>
-            <a:r>
-              <a:rPr sz="3150" b="1" i="0" dirty="0" err="1">
-                <a:solidFill>
-                  <a:schemeClr val="accent6">
-                    <a:lumMod val="20000"/>
-                    <a:lumOff val="80000"/>
-                  </a:schemeClr>
-                </a:solidFill>
-                <a:latin typeface="Noto Sans KR"/>
-                <a:ea typeface="Noto Sans KR"/>
-                <a:cs typeface="Noto Sans KR"/>
-              </a:rPr>
-              <a:t>지키며</a:t>
-            </a:r>
-            <a:r>
-              <a:rPr sz="3150" b="1" i="0" dirty="0">
-                <a:solidFill>
-                  <a:schemeClr val="accent6">
-                    <a:lumMod val="20000"/>
-                    <a:lumOff val="80000"/>
-                  </a:schemeClr>
-                </a:solidFill>
-                <a:latin typeface="Noto Sans KR"/>
-                <a:ea typeface="Noto Sans KR"/>
-                <a:cs typeface="Noto Sans KR"/>
-              </a:rPr>
-              <a:t> </a:t>
-            </a:r>
-            <a:r>
-              <a:rPr sz="3150" b="1" i="0" dirty="0" err="1">
-                <a:solidFill>
-                  <a:schemeClr val="accent6">
-                    <a:lumMod val="20000"/>
-                    <a:lumOff val="80000"/>
-                  </a:schemeClr>
-                </a:solidFill>
-                <a:latin typeface="Noto Sans KR"/>
-                <a:ea typeface="Noto Sans KR"/>
-                <a:cs typeface="Noto Sans KR"/>
-              </a:rPr>
-              <a:t>살아남는</a:t>
-            </a:r>
-            <a:endParaRPr sz="3150" b="1" i="0" dirty="0">
-              <a:solidFill>
-                <a:schemeClr val="accent6">
-                  <a:lumMod val="20000"/>
-                  <a:lumOff val="80000"/>
-                </a:schemeClr>
-              </a:solidFill>
-              <a:latin typeface="Noto Sans KR"/>
-              <a:ea typeface="Noto Sans KR"/>
-              <a:cs typeface="Noto Sans KR"/>
-            </a:endParaRPr>
-          </a:p>
-          <a:p>
-            <a:pPr algn="l">
-              <a:defRPr sz="3150" b="1" i="0">
-                <a:solidFill>
-                  <a:srgbClr val="111318"/>
-                </a:solidFill>
-                <a:latin typeface="Noto Sans KR"/>
-                <a:ea typeface="Noto Sans KR"/>
-                <a:cs typeface="Noto Sans KR"/>
-              </a:defRPr>
-            </a:pPr>
-            <a:r>
-              <a:rPr sz="3150" b="1" i="0" dirty="0" err="1">
-                <a:solidFill>
-                  <a:schemeClr val="accent6">
-                    <a:lumMod val="20000"/>
-                    <a:lumOff val="80000"/>
-                  </a:schemeClr>
-                </a:solidFill>
-                <a:latin typeface="Noto Sans KR"/>
-                <a:ea typeface="Noto Sans KR"/>
-                <a:cs typeface="Noto Sans KR"/>
-              </a:rPr>
-              <a:t>박물관</a:t>
-            </a:r>
-            <a:r>
-              <a:rPr sz="3150" b="1" i="0" dirty="0">
-                <a:solidFill>
-                  <a:schemeClr val="accent6">
-                    <a:lumMod val="20000"/>
-                    <a:lumOff val="80000"/>
-                  </a:schemeClr>
-                </a:solidFill>
-                <a:latin typeface="Noto Sans KR"/>
-                <a:ea typeface="Noto Sans KR"/>
-                <a:cs typeface="Noto Sans KR"/>
-              </a:rPr>
-              <a:t> </a:t>
-            </a:r>
-            <a:r>
-              <a:rPr sz="3150" b="1" i="0" dirty="0" err="1">
-                <a:solidFill>
-                  <a:schemeClr val="accent6">
-                    <a:lumMod val="20000"/>
-                    <a:lumOff val="80000"/>
-                  </a:schemeClr>
-                </a:solidFill>
-                <a:latin typeface="Noto Sans KR"/>
-                <a:ea typeface="Noto Sans KR"/>
-                <a:cs typeface="Noto Sans KR"/>
-              </a:rPr>
-              <a:t>야간</a:t>
-            </a:r>
-            <a:r>
-              <a:rPr sz="3150" b="1" i="0" dirty="0">
-                <a:solidFill>
-                  <a:schemeClr val="accent6">
-                    <a:lumMod val="20000"/>
-                    <a:lumOff val="80000"/>
-                  </a:schemeClr>
-                </a:solidFill>
-                <a:latin typeface="Noto Sans KR"/>
-                <a:ea typeface="Noto Sans KR"/>
-                <a:cs typeface="Noto Sans KR"/>
-              </a:rPr>
-              <a:t> </a:t>
-            </a:r>
-            <a:r>
-              <a:rPr sz="3150" b="1" i="0" dirty="0" err="1">
-                <a:solidFill>
-                  <a:schemeClr val="accent6">
-                    <a:lumMod val="20000"/>
-                    <a:lumOff val="80000"/>
-                  </a:schemeClr>
-                </a:solidFill>
-                <a:latin typeface="Noto Sans KR"/>
-                <a:ea typeface="Noto Sans KR"/>
-                <a:cs typeface="Noto Sans KR"/>
-              </a:rPr>
-              <a:t>근무</a:t>
-            </a:r>
-            <a:endParaRPr sz="3150" b="1" i="0" dirty="0">
-              <a:solidFill>
-                <a:schemeClr val="accent6">
-                  <a:lumMod val="20000"/>
-                  <a:lumOff val="80000"/>
-                </a:schemeClr>
-              </a:solidFill>
-              <a:latin typeface="Noto Sans KR"/>
-              <a:ea typeface="Noto Sans KR"/>
-              <a:cs typeface="Noto Sans KR"/>
-            </a:endParaRPr>
-          </a:p>
-        </p:txBody>
-      </p:sp>
-      <p:sp>
-        <p:nvSpPr>
-          <p:cNvPr id="8" name="cover-hero-number">
-            <a:extLst>
-              <a:ext uri="{FF2B5EF4-FFF2-40B4-BE49-F238E27FC236}">
-                <a16:creationId xmlns:a16="http://schemas.microsoft.com/office/drawing/2014/main" id="{117EC768-659C-0648-BAAE-E571FC834DC0}"/>
-              </a:ext>
-            </a:extLst>
-          </p:cNvPr>
-          <p:cNvSpPr>
-            <a:spLocks noGrp="1"/>
-          </p:cNvSpPr>
-          <p:nvPr/>
-        </p:nvSpPr>
-        <p:spPr>
-          <a:xfrm>
-            <a:off x="7296150" y="723900"/>
-            <a:ext cx="4095750" cy="1428750"/>
-          </a:xfrm>
-          <a:prstGeom prst="rect">
-            <a:avLst/>
-          </a:prstGeom>
-          <a:noFill/>
-          <a:ln w="0">
-            <a:noFill/>
-            <a:prstDash val="solid"/>
-          </a:ln>
-        </p:spPr>
-        <p:txBody>
-          <a:bodyPr lIns="0" tIns="0" rIns="0" bIns="0" anchor="t">
-            <a:normAutofit/>
-          </a:bodyPr>
-          <a:lstStyle/>
-          <a:p>
-            <a:pPr algn="l">
-              <a:defRPr sz="8400" b="1" i="0">
-                <a:solidFill>
-                  <a:srgbClr val="3D8DFF"/>
-                </a:solidFill>
-                <a:latin typeface="Noto Sans KR"/>
-                <a:ea typeface="Noto Sans KR"/>
-                <a:cs typeface="Noto Sans KR"/>
-              </a:defRPr>
-            </a:pPr>
-            <a:r>
-              <a:rPr sz="8400" b="1" i="0">
-                <a:solidFill>
-                  <a:srgbClr val="3D8DFF"/>
-                </a:solidFill>
-                <a:latin typeface="Noto Sans KR"/>
-                <a:ea typeface="Noto Sans KR"/>
-                <a:cs typeface="Noto Sans KR"/>
-              </a:rPr>
-              <a:t>01</a:t>
-            </a:r>
-          </a:p>
-        </p:txBody>
-      </p:sp>
-      <p:sp>
-        <p:nvSpPr>
-          <p:cNvPr id="9" name="cover-hero-word">
-            <a:extLst>
-              <a:ext uri="{FF2B5EF4-FFF2-40B4-BE49-F238E27FC236}">
-                <a16:creationId xmlns:a16="http://schemas.microsoft.com/office/drawing/2014/main" id="{0A68DCA2-B857-F71B-C5B1-D28BF1F2E865}"/>
-              </a:ext>
-            </a:extLst>
-          </p:cNvPr>
-          <p:cNvSpPr>
-            <a:spLocks noGrp="1"/>
-          </p:cNvSpPr>
-          <p:nvPr/>
-        </p:nvSpPr>
-        <p:spPr>
-          <a:xfrm>
-            <a:off x="7296150" y="2286000"/>
-            <a:ext cx="4095750" cy="2000250"/>
-          </a:xfrm>
-          <a:prstGeom prst="rect">
-            <a:avLst/>
-          </a:prstGeom>
-          <a:noFill/>
-          <a:ln w="0">
-            <a:noFill/>
-            <a:prstDash val="solid"/>
-          </a:ln>
-        </p:spPr>
-        <p:txBody>
-          <a:bodyPr lIns="0" tIns="0" rIns="0" bIns="0" anchor="t">
-            <a:normAutofit/>
-          </a:bodyPr>
-          <a:lstStyle/>
-          <a:p>
-            <a:pPr algn="l">
-              <a:defRPr sz="4050" b="1" i="0">
-                <a:solidFill>
-                  <a:srgbClr val="FFFFFF"/>
-                </a:solidFill>
-                <a:latin typeface="Noto Sans KR"/>
-                <a:ea typeface="Noto Sans KR"/>
-                <a:cs typeface="Noto Sans KR"/>
-              </a:defRPr>
-            </a:pPr>
-            <a:r>
-              <a:rPr sz="4050" b="1" i="0" dirty="0">
-                <a:solidFill>
-                  <a:srgbClr val="FFFFFF"/>
-                </a:solidFill>
-                <a:latin typeface="Noto Sans KR"/>
-                <a:ea typeface="Noto Sans KR"/>
-                <a:cs typeface="Noto Sans KR"/>
-              </a:rPr>
-              <a:t>RULES</a:t>
-            </a:r>
-          </a:p>
-          <a:p>
-            <a:pPr algn="l">
-              <a:defRPr sz="4050" b="1" i="0">
-                <a:solidFill>
-                  <a:srgbClr val="FFFFFF"/>
-                </a:solidFill>
-                <a:latin typeface="Noto Sans KR"/>
-                <a:ea typeface="Noto Sans KR"/>
-                <a:cs typeface="Noto Sans KR"/>
-              </a:defRPr>
-            </a:pPr>
-            <a:r>
-              <a:rPr sz="4050" b="1" i="0" dirty="0">
-                <a:solidFill>
-                  <a:srgbClr val="FFFFFF"/>
-                </a:solidFill>
-                <a:latin typeface="Noto Sans KR"/>
-                <a:ea typeface="Noto Sans KR"/>
-                <a:cs typeface="Noto Sans KR"/>
-              </a:rPr>
-              <a:t>AT NIGHT</a:t>
-            </a:r>
-          </a:p>
-        </p:txBody>
-      </p:sp>
-      <p:sp>
-        <p:nvSpPr>
-          <p:cNvPr id="10" name="cover-hero-copy">
-            <a:extLst>
-              <a:ext uri="{FF2B5EF4-FFF2-40B4-BE49-F238E27FC236}">
-                <a16:creationId xmlns:a16="http://schemas.microsoft.com/office/drawing/2014/main" id="{DD6CCFBC-4E6E-1FDA-791E-D32A8464FEC8}"/>
-              </a:ext>
-            </a:extLst>
-          </p:cNvPr>
-          <p:cNvSpPr>
-            <a:spLocks noGrp="1"/>
-          </p:cNvSpPr>
-          <p:nvPr/>
-        </p:nvSpPr>
-        <p:spPr>
-          <a:xfrm>
-            <a:off x="7296150" y="4876800"/>
-            <a:ext cx="3943350" cy="1066800"/>
-          </a:xfrm>
-          <a:prstGeom prst="rect">
-            <a:avLst/>
-          </a:prstGeom>
-          <a:noFill/>
-          <a:ln w="0">
-            <a:noFill/>
-            <a:prstDash val="solid"/>
-          </a:ln>
-        </p:spPr>
-        <p:txBody>
-          <a:bodyPr lIns="0" tIns="0" rIns="0" bIns="0" anchor="t">
-            <a:normAutofit/>
-          </a:bodyPr>
-          <a:lstStyle/>
-          <a:p>
-            <a:pPr algn="l">
-              <a:defRPr sz="1650" b="0" i="0">
-                <a:solidFill>
-                  <a:srgbClr val="D8DEE9"/>
-                </a:solidFill>
-                <a:latin typeface="Noto Sans KR"/>
-                <a:ea typeface="Noto Sans KR"/>
-                <a:cs typeface="Noto Sans KR"/>
-              </a:defRPr>
-            </a:pPr>
-            <a:r>
-              <a:rPr sz="1650" b="0" i="0" dirty="0" err="1">
-                <a:solidFill>
-                  <a:srgbClr val="D8DEE9"/>
-                </a:solidFill>
-                <a:latin typeface="Noto Sans KR"/>
-                <a:ea typeface="Noto Sans KR"/>
-                <a:cs typeface="Noto Sans KR"/>
-              </a:rPr>
-              <a:t>수첩의</a:t>
-            </a:r>
-            <a:r>
-              <a:rPr sz="1650" b="0" i="0" dirty="0">
-                <a:solidFill>
-                  <a:srgbClr val="D8DEE9"/>
-                </a:solidFill>
-                <a:latin typeface="Noto Sans KR"/>
-                <a:ea typeface="Noto Sans KR"/>
-                <a:cs typeface="Noto Sans KR"/>
-              </a:rPr>
-              <a:t> </a:t>
-            </a:r>
-            <a:r>
-              <a:rPr sz="1650" b="0" i="0" dirty="0" err="1">
-                <a:solidFill>
-                  <a:srgbClr val="D8DEE9"/>
-                </a:solidFill>
-                <a:latin typeface="Noto Sans KR"/>
-                <a:ea typeface="Noto Sans KR"/>
-                <a:cs typeface="Noto Sans KR"/>
-              </a:rPr>
-              <a:t>규칙을</a:t>
-            </a:r>
-            <a:r>
-              <a:rPr sz="1650" b="0" i="0" dirty="0">
-                <a:solidFill>
-                  <a:srgbClr val="D8DEE9"/>
-                </a:solidFill>
-                <a:latin typeface="Noto Sans KR"/>
-                <a:ea typeface="Noto Sans KR"/>
-                <a:cs typeface="Noto Sans KR"/>
-              </a:rPr>
-              <a:t> </a:t>
-            </a:r>
-            <a:r>
-              <a:rPr lang="ko-KR" altLang="en-US" sz="1650" dirty="0">
-                <a:solidFill>
-                  <a:srgbClr val="D8DEE9"/>
-                </a:solidFill>
-                <a:latin typeface="Noto Sans KR"/>
-                <a:ea typeface="Noto Sans KR"/>
-                <a:cs typeface="Noto Sans KR"/>
-              </a:rPr>
-              <a:t>준수</a:t>
-            </a:r>
-            <a:r>
-              <a:rPr sz="1650" b="0" i="0" dirty="0" err="1">
-                <a:solidFill>
-                  <a:srgbClr val="D8DEE9"/>
-                </a:solidFill>
-                <a:latin typeface="Noto Sans KR"/>
-                <a:ea typeface="Noto Sans KR"/>
-                <a:cs typeface="Noto Sans KR"/>
-              </a:rPr>
-              <a:t>하고</a:t>
-            </a:r>
-            <a:endParaRPr sz="1650" b="0" i="0" dirty="0">
-              <a:solidFill>
-                <a:srgbClr val="D8DEE9"/>
-              </a:solidFill>
-              <a:latin typeface="Noto Sans KR"/>
-              <a:ea typeface="Noto Sans KR"/>
-              <a:cs typeface="Noto Sans KR"/>
-            </a:endParaRPr>
-          </a:p>
-          <a:p>
-            <a:pPr algn="l">
-              <a:defRPr sz="1650" b="0" i="0">
-                <a:solidFill>
-                  <a:srgbClr val="D8DEE9"/>
-                </a:solidFill>
-                <a:latin typeface="Noto Sans KR"/>
-                <a:ea typeface="Noto Sans KR"/>
-                <a:cs typeface="Noto Sans KR"/>
-              </a:defRPr>
-            </a:pPr>
-            <a:r>
-              <a:rPr sz="1650" b="0" i="0" dirty="0" err="1">
-                <a:solidFill>
-                  <a:srgbClr val="D8DEE9"/>
-                </a:solidFill>
-                <a:latin typeface="Noto Sans KR"/>
-                <a:ea typeface="Noto Sans KR"/>
-                <a:cs typeface="Noto Sans KR"/>
-              </a:rPr>
-              <a:t>시간과</a:t>
-            </a:r>
-            <a:r>
-              <a:rPr sz="1650" b="0" i="0" dirty="0">
-                <a:solidFill>
-                  <a:srgbClr val="D8DEE9"/>
-                </a:solidFill>
-                <a:latin typeface="Noto Sans KR"/>
-                <a:ea typeface="Noto Sans KR"/>
-                <a:cs typeface="Noto Sans KR"/>
-              </a:rPr>
-              <a:t> </a:t>
-            </a:r>
-            <a:r>
-              <a:rPr sz="1650" b="0" i="0" dirty="0" err="1">
-                <a:solidFill>
-                  <a:srgbClr val="D8DEE9"/>
-                </a:solidFill>
-                <a:latin typeface="Noto Sans KR"/>
-                <a:ea typeface="Noto Sans KR"/>
-                <a:cs typeface="Noto Sans KR"/>
-              </a:rPr>
-              <a:t>배터리를</a:t>
-            </a:r>
-            <a:r>
-              <a:rPr sz="1650" b="0" i="0" dirty="0">
-                <a:solidFill>
-                  <a:srgbClr val="D8DEE9"/>
-                </a:solidFill>
-                <a:latin typeface="Noto Sans KR"/>
-                <a:ea typeface="Noto Sans KR"/>
-                <a:cs typeface="Noto Sans KR"/>
-              </a:rPr>
-              <a:t> </a:t>
-            </a:r>
-            <a:r>
-              <a:rPr sz="1650" b="0" i="0" dirty="0" err="1">
-                <a:solidFill>
-                  <a:srgbClr val="D8DEE9"/>
-                </a:solidFill>
-                <a:latin typeface="Noto Sans KR"/>
-                <a:ea typeface="Noto Sans KR"/>
-                <a:cs typeface="Noto Sans KR"/>
-              </a:rPr>
-              <a:t>관리하며</a:t>
-            </a:r>
-            <a:endParaRPr sz="1650" b="0" i="0" dirty="0">
-              <a:solidFill>
-                <a:srgbClr val="D8DEE9"/>
-              </a:solidFill>
-              <a:latin typeface="Noto Sans KR"/>
-              <a:ea typeface="Noto Sans KR"/>
-              <a:cs typeface="Noto Sans KR"/>
-            </a:endParaRPr>
-          </a:p>
-          <a:p>
-            <a:pPr algn="l">
-              <a:defRPr sz="1650" b="0" i="0">
-                <a:solidFill>
-                  <a:srgbClr val="D8DEE9"/>
-                </a:solidFill>
-                <a:latin typeface="Noto Sans KR"/>
-                <a:ea typeface="Noto Sans KR"/>
-                <a:cs typeface="Noto Sans KR"/>
-              </a:defRPr>
-            </a:pPr>
-            <a:r>
-              <a:rPr lang="ko-KR" altLang="en-US" sz="1650" b="0" i="0" dirty="0">
-                <a:solidFill>
-                  <a:srgbClr val="D8DEE9"/>
-                </a:solidFill>
-                <a:latin typeface="Noto Sans KR"/>
-                <a:ea typeface="Noto Sans KR"/>
-                <a:cs typeface="Noto Sans KR"/>
-              </a:rPr>
-              <a:t>주어진 미션을 해결한다</a:t>
-            </a:r>
-            <a:r>
-              <a:rPr lang="en-US" altLang="ko-KR" sz="1650" b="0" i="0" dirty="0">
-                <a:solidFill>
-                  <a:srgbClr val="D8DEE9"/>
-                </a:solidFill>
-                <a:latin typeface="Noto Sans KR"/>
-                <a:ea typeface="Noto Sans KR"/>
-                <a:cs typeface="Noto Sans KR"/>
-              </a:rPr>
-              <a:t>.</a:t>
-            </a:r>
-            <a:endParaRPr sz="1650" b="0" i="0" dirty="0">
-              <a:solidFill>
-                <a:srgbClr val="D8DEE9"/>
-              </a:solidFill>
-              <a:latin typeface="Noto Sans KR"/>
-              <a:ea typeface="Noto Sans KR"/>
-              <a:cs typeface="Noto Sans KR"/>
-            </a:endParaRPr>
-          </a:p>
-        </p:txBody>
-      </p:sp>
-      <p:sp>
-        <p:nvSpPr>
-          <p:cNvPr id="15" name="cover-course">
-            <a:extLst>
-              <a:ext uri="{FF2B5EF4-FFF2-40B4-BE49-F238E27FC236}">
-                <a16:creationId xmlns:a16="http://schemas.microsoft.com/office/drawing/2014/main" id="{A3B60AD4-D474-22F1-53BB-0A0682C0CEB7}"/>
-              </a:ext>
-            </a:extLst>
-          </p:cNvPr>
-          <p:cNvSpPr>
-            <a:spLocks noGrp="1"/>
-          </p:cNvSpPr>
-          <p:nvPr/>
-        </p:nvSpPr>
-        <p:spPr>
-          <a:xfrm>
-            <a:off x="479489" y="323850"/>
-            <a:ext cx="5619750" cy="590550"/>
-          </a:xfrm>
-          <a:prstGeom prst="rect">
-            <a:avLst/>
-          </a:prstGeom>
-          <a:noFill/>
-          <a:ln w="0">
-            <a:noFill/>
-            <a:prstDash val="solid"/>
-          </a:ln>
-        </p:spPr>
-        <p:txBody>
-          <a:bodyPr lIns="0" tIns="0" rIns="0" bIns="0" anchor="t">
-            <a:normAutofit/>
-          </a:bodyPr>
-          <a:lstStyle/>
-          <a:p>
-            <a:pPr algn="l">
-              <a:defRPr sz="1350" b="1" i="0">
-                <a:solidFill>
-                  <a:srgbClr val="5E6470"/>
-                </a:solidFill>
-                <a:latin typeface="Noto Sans KR"/>
-                <a:ea typeface="Noto Sans KR"/>
-                <a:cs typeface="Noto Sans KR"/>
-              </a:defRPr>
-            </a:pPr>
-            <a:r>
-              <a:rPr sz="1350" b="1" i="0" dirty="0">
-                <a:solidFill>
-                  <a:schemeClr val="accent6">
-                    <a:lumMod val="20000"/>
-                    <a:lumOff val="80000"/>
-                  </a:schemeClr>
-                </a:solidFill>
-                <a:latin typeface="Noto Sans KR"/>
-                <a:ea typeface="Noto Sans KR"/>
-                <a:cs typeface="Noto Sans KR"/>
-              </a:rPr>
-              <a:t>2026 AI </a:t>
-            </a:r>
-            <a:r>
-              <a:rPr sz="1350" b="1" i="0" dirty="0" err="1">
-                <a:solidFill>
-                  <a:schemeClr val="accent6">
-                    <a:lumMod val="20000"/>
-                    <a:lumOff val="80000"/>
-                  </a:schemeClr>
-                </a:solidFill>
-                <a:latin typeface="Noto Sans KR"/>
-                <a:ea typeface="Noto Sans KR"/>
-                <a:cs typeface="Noto Sans KR"/>
-              </a:rPr>
-              <a:t>에이전트</a:t>
-            </a:r>
-            <a:r>
-              <a:rPr sz="1350" b="1" i="0" dirty="0">
-                <a:solidFill>
-                  <a:schemeClr val="accent6">
-                    <a:lumMod val="20000"/>
-                    <a:lumOff val="80000"/>
-                  </a:schemeClr>
-                </a:solidFill>
-                <a:latin typeface="Noto Sans KR"/>
-                <a:ea typeface="Noto Sans KR"/>
-                <a:cs typeface="Noto Sans KR"/>
-              </a:rPr>
-              <a:t> </a:t>
-            </a:r>
-            <a:r>
-              <a:rPr sz="1350" b="1" i="0" dirty="0" err="1">
-                <a:solidFill>
-                  <a:schemeClr val="accent6">
-                    <a:lumMod val="20000"/>
-                    <a:lumOff val="80000"/>
-                  </a:schemeClr>
-                </a:solidFill>
-                <a:latin typeface="Noto Sans KR"/>
-                <a:ea typeface="Noto Sans KR"/>
-                <a:cs typeface="Noto Sans KR"/>
-              </a:rPr>
-              <a:t>기반</a:t>
-            </a:r>
-            <a:r>
-              <a:rPr sz="1350" b="1" i="0" dirty="0">
-                <a:solidFill>
-                  <a:schemeClr val="accent6">
-                    <a:lumMod val="20000"/>
-                    <a:lumOff val="80000"/>
-                  </a:schemeClr>
-                </a:solidFill>
-                <a:latin typeface="Noto Sans KR"/>
-                <a:ea typeface="Noto Sans KR"/>
-                <a:cs typeface="Noto Sans KR"/>
-              </a:rPr>
-              <a:t> </a:t>
-            </a:r>
-            <a:r>
-              <a:rPr sz="1350" b="1" i="0" dirty="0" err="1">
-                <a:solidFill>
-                  <a:schemeClr val="accent6">
-                    <a:lumMod val="20000"/>
-                    <a:lumOff val="80000"/>
-                  </a:schemeClr>
-                </a:solidFill>
-                <a:latin typeface="Noto Sans KR"/>
-                <a:ea typeface="Noto Sans KR"/>
-                <a:cs typeface="Noto Sans KR"/>
-              </a:rPr>
-              <a:t>언리얼</a:t>
-            </a:r>
-            <a:r>
-              <a:rPr sz="1350" b="1" i="0" dirty="0">
-                <a:solidFill>
-                  <a:schemeClr val="accent6">
-                    <a:lumMod val="20000"/>
-                    <a:lumOff val="80000"/>
-                  </a:schemeClr>
-                </a:solidFill>
-                <a:latin typeface="Noto Sans KR"/>
-                <a:ea typeface="Noto Sans KR"/>
-                <a:cs typeface="Noto Sans KR"/>
-              </a:rPr>
-              <a:t> </a:t>
-            </a:r>
-            <a:r>
-              <a:rPr sz="1350" b="1" i="0" dirty="0" err="1">
-                <a:solidFill>
-                  <a:schemeClr val="accent6">
-                    <a:lumMod val="20000"/>
-                    <a:lumOff val="80000"/>
-                  </a:schemeClr>
-                </a:solidFill>
-                <a:latin typeface="Noto Sans KR"/>
-                <a:ea typeface="Noto Sans KR"/>
-                <a:cs typeface="Noto Sans KR"/>
-              </a:rPr>
-              <a:t>개발</a:t>
-            </a:r>
-            <a:endParaRPr sz="1350" b="1" i="0" dirty="0">
-              <a:solidFill>
-                <a:schemeClr val="accent6">
-                  <a:lumMod val="20000"/>
-                  <a:lumOff val="80000"/>
-                </a:schemeClr>
-              </a:solidFill>
-              <a:latin typeface="Noto Sans KR"/>
-              <a:ea typeface="Noto Sans KR"/>
-              <a:cs typeface="Noto Sans KR"/>
-            </a:endParaRPr>
-          </a:p>
-          <a:p>
-            <a:pPr algn="l">
-              <a:defRPr sz="1350" b="1" i="0">
-                <a:solidFill>
-                  <a:srgbClr val="5E6470"/>
-                </a:solidFill>
-                <a:latin typeface="Noto Sans KR"/>
-                <a:ea typeface="Noto Sans KR"/>
-                <a:cs typeface="Noto Sans KR"/>
-              </a:defRPr>
-            </a:pPr>
-            <a:r>
-              <a:rPr sz="1350" b="1" i="0" dirty="0" err="1">
-                <a:solidFill>
-                  <a:schemeClr val="accent6">
-                    <a:lumMod val="20000"/>
-                    <a:lumOff val="80000"/>
-                  </a:schemeClr>
-                </a:solidFill>
-                <a:latin typeface="Noto Sans KR"/>
-                <a:ea typeface="Noto Sans KR"/>
-                <a:cs typeface="Noto Sans KR"/>
-              </a:rPr>
-              <a:t>워크프로세스</a:t>
-            </a:r>
-            <a:r>
-              <a:rPr sz="1350" b="1" i="0" dirty="0">
-                <a:solidFill>
-                  <a:schemeClr val="accent6">
-                    <a:lumMod val="20000"/>
-                    <a:lumOff val="80000"/>
-                  </a:schemeClr>
-                </a:solidFill>
-                <a:latin typeface="Noto Sans KR"/>
-                <a:ea typeface="Noto Sans KR"/>
-                <a:cs typeface="Noto Sans KR"/>
-              </a:rPr>
-              <a:t> </a:t>
-            </a:r>
-            <a:r>
-              <a:rPr sz="1350" b="1" i="0" dirty="0" err="1">
-                <a:solidFill>
-                  <a:schemeClr val="accent6">
-                    <a:lumMod val="20000"/>
-                    <a:lumOff val="80000"/>
-                  </a:schemeClr>
-                </a:solidFill>
-                <a:latin typeface="Noto Sans KR"/>
-                <a:ea typeface="Noto Sans KR"/>
-                <a:cs typeface="Noto Sans KR"/>
-              </a:rPr>
-              <a:t>자동화</a:t>
-            </a:r>
-            <a:r>
-              <a:rPr sz="1350" b="1" i="0" dirty="0">
-                <a:solidFill>
-                  <a:schemeClr val="accent6">
-                    <a:lumMod val="20000"/>
-                    <a:lumOff val="80000"/>
-                  </a:schemeClr>
-                </a:solidFill>
-                <a:latin typeface="Noto Sans KR"/>
-                <a:ea typeface="Noto Sans KR"/>
-                <a:cs typeface="Noto Sans KR"/>
-              </a:rPr>
-              <a:t> </a:t>
-            </a:r>
-            <a:r>
-              <a:rPr sz="1350" b="1" i="0" dirty="0" err="1">
-                <a:solidFill>
-                  <a:schemeClr val="accent6">
-                    <a:lumMod val="20000"/>
-                    <a:lumOff val="80000"/>
-                  </a:schemeClr>
-                </a:solidFill>
-                <a:latin typeface="Noto Sans KR"/>
-                <a:ea typeface="Noto Sans KR"/>
-                <a:cs typeface="Noto Sans KR"/>
-              </a:rPr>
-              <a:t>완성</a:t>
-            </a:r>
-            <a:r>
-              <a:rPr sz="1350" b="1" i="0" dirty="0">
-                <a:solidFill>
-                  <a:schemeClr val="accent6">
-                    <a:lumMod val="20000"/>
-                    <a:lumOff val="80000"/>
-                  </a:schemeClr>
-                </a:solidFill>
-                <a:latin typeface="Noto Sans KR"/>
-                <a:ea typeface="Noto Sans KR"/>
-                <a:cs typeface="Noto Sans KR"/>
-              </a:rPr>
-              <a:t> </a:t>
-            </a:r>
-            <a:r>
-              <a:rPr sz="1350" b="1" i="0" dirty="0" err="1">
-                <a:solidFill>
-                  <a:schemeClr val="accent6">
-                    <a:lumMod val="20000"/>
-                    <a:lumOff val="80000"/>
-                  </a:schemeClr>
-                </a:solidFill>
-                <a:latin typeface="Noto Sans KR"/>
-                <a:ea typeface="Noto Sans KR"/>
-                <a:cs typeface="Noto Sans KR"/>
-              </a:rPr>
-              <a:t>과정</a:t>
-            </a:r>
-            <a:endParaRPr sz="1350" b="1" i="0" dirty="0">
-              <a:solidFill>
-                <a:schemeClr val="accent6">
-                  <a:lumMod val="20000"/>
-                  <a:lumOff val="80000"/>
-                </a:schemeClr>
-              </a:solidFill>
-              <a:latin typeface="Noto Sans KR"/>
-              <a:ea typeface="Noto Sans KR"/>
-              <a:cs typeface="Noto Sans KR"/>
-            </a:endParaRPr>
-          </a:p>
-        </p:txBody>
-      </p:sp>
-    </p:spTree>
-    <p:extLst>
-      <p:ext uri="{BB962C8B-B14F-4D97-AF65-F5344CB8AC3E}">
-        <p14:creationId xmlns:p14="http://schemas.microsoft.com/office/powerpoint/2010/main" val="701151430"/>
-      </p:ext>
-    </p:extLst>
-  </p:cSld>
-  <p:clrMapOvr>
-    <a:masterClrMapping/>
-  </p:clrMapOvr>
-</p:sld>
-</file>
-
-<file path=ppt/slides/slide3.xml><?xml version="1.0" encoding="utf-8"?>
-<p:sld xmlns:a="http://schemas.openxmlformats.org/drawingml/2006/main" xmlns:r="http://schemas.openxmlformats.org/officeDocument/2006/relationships" xmlns:p="http://schemas.openxmlformats.org/presentationml/2006/main">
-  <p:cSld>
     <p:bg>
       <p:bgPr>
         <a:solidFill>
@@ -3555,7 +2522,7 @@
               <a:t>0</a:t>
             </a:r>
             <a:r>
-              <a:rPr lang="en-US" sz="1050" b="0" i="0" dirty="0">
+              <a:rPr lang="en-US" sz="1050" dirty="0">
                 <a:solidFill>
                   <a:srgbClr val="5E6470"/>
                 </a:solidFill>
@@ -3563,7 +2530,7 @@
                 <a:ea typeface="Noto Sans KR"/>
                 <a:cs typeface="Noto Sans KR"/>
               </a:rPr>
-              <a:t>3</a:t>
+              <a:t>2</a:t>
             </a:r>
             <a:endParaRPr sz="1050" b="0" i="0" dirty="0">
               <a:solidFill>
@@ -5582,7 +4549,7 @@
 </p:sld>
 </file>
 
-<file path=ppt/slides/slide4.xml><?xml version="1.0" encoding="utf-8"?>
+<file path=ppt/slides/slide3.xml><?xml version="1.0" encoding="utf-8"?>
 <p:sld xmlns:a="http://schemas.openxmlformats.org/drawingml/2006/main" xmlns:r="http://schemas.openxmlformats.org/officeDocument/2006/relationships" xmlns:p="http://schemas.openxmlformats.org/presentationml/2006/main">
   <p:cSld>
     <p:bg>
@@ -5863,7 +4830,7 @@
               <a:t>0</a:t>
             </a:r>
             <a:r>
-              <a:rPr lang="en-US" sz="1050" b="0" i="0" dirty="0">
+              <a:rPr lang="en-US" sz="1050" dirty="0">
                 <a:solidFill>
                   <a:srgbClr val="5E6470"/>
                 </a:solidFill>
@@ -5871,7 +4838,7 @@
                 <a:ea typeface="Noto Sans KR"/>
                 <a:cs typeface="Noto Sans KR"/>
               </a:rPr>
-              <a:t>4</a:t>
+              <a:t>3</a:t>
             </a:r>
             <a:endParaRPr sz="1050" b="0" i="0" dirty="0">
               <a:solidFill>
@@ -6058,9 +5025,36 @@
           <a:prstGeom prst="rect">
             <a:avLst/>
           </a:prstGeom>
-          <a:solidFill>
-            <a:srgbClr val="EEF0F3"/>
-          </a:solidFill>
+          <a:gradFill>
+            <a:gsLst>
+              <a:gs pos="0">
+                <a:schemeClr val="accent6">
+                  <a:lumMod val="40000"/>
+                  <a:lumOff val="60000"/>
+                  <a:alpha val="60000"/>
+                </a:schemeClr>
+              </a:gs>
+              <a:gs pos="74000">
+                <a:schemeClr val="accent1">
+                  <a:lumMod val="45000"/>
+                  <a:lumOff val="55000"/>
+                </a:schemeClr>
+              </a:gs>
+              <a:gs pos="83000">
+                <a:schemeClr val="accent1">
+                  <a:lumMod val="45000"/>
+                  <a:lumOff val="55000"/>
+                </a:schemeClr>
+              </a:gs>
+              <a:gs pos="100000">
+                <a:schemeClr val="accent1">
+                  <a:lumMod val="30000"/>
+                  <a:lumOff val="70000"/>
+                </a:schemeClr>
+              </a:gs>
+            </a:gsLst>
+            <a:lin ang="5400000" scaled="1"/>
+          </a:gradFill>
           <a:ln w="0">
             <a:noFill/>
             <a:prstDash val="solid"/>
@@ -6070,7 +5064,13 @@
           <a:bodyPr/>
           <a:lstStyle/>
           <a:p>
-            <a:endParaRPr lang="ko-KR" altLang="en-US"/>
+            <a:endParaRPr lang="ko-KR" altLang="en-US">
+              <a:solidFill>
+                <a:schemeClr val="bg1">
+                  <a:lumMod val="95000"/>
+                </a:schemeClr>
+              </a:solidFill>
+            </a:endParaRPr>
           </a:p>
         </p:txBody>
       </p:sp>
@@ -6177,18 +5177,34 @@
               </a:defRPr>
             </a:pPr>
             <a:r>
-              <a:rPr dirty="0" err="1"/>
+              <a:rPr dirty="0" err="1">
+                <a:solidFill>
+                  <a:schemeClr val="bg1"/>
+                </a:solidFill>
+              </a:rPr>
               <a:t>기획·규칙</a:t>
             </a:r>
             <a:r>
-              <a:rPr dirty="0"/>
+              <a:rPr dirty="0">
+                <a:solidFill>
+                  <a:schemeClr val="bg1"/>
+                </a:solidFill>
+              </a:rPr>
               <a:t> </a:t>
             </a:r>
             <a:r>
-              <a:rPr dirty="0" err="1"/>
+              <a:rPr dirty="0" err="1">
+                <a:solidFill>
+                  <a:schemeClr val="bg1"/>
+                </a:solidFill>
+              </a:rPr>
               <a:t>정의</a:t>
             </a:r>
-            <a:endParaRPr dirty="0"/>
+            <a:endParaRPr dirty="0">
+              <a:solidFill>
+                <a:schemeClr val="bg1"/>
+              </a:solidFill>
+            </a:endParaRPr>
           </a:p>
         </p:txBody>
       </p:sp>
@@ -6239,7 +5255,9 @@
             <a:r>
               <a:rPr sz="1275" b="0" i="0" dirty="0" err="1">
                 <a:solidFill>
-                  <a:srgbClr val="5E6470"/>
+                  <a:schemeClr val="bg1">
+                    <a:lumMod val="95000"/>
+                  </a:schemeClr>
                 </a:solidFill>
                 <a:latin typeface="Noto Sans KR"/>
                 <a:ea typeface="Noto Sans KR"/>
@@ -6250,7 +5268,9 @@
             <a:r>
               <a:rPr sz="1275" b="0" i="0" dirty="0">
                 <a:solidFill>
-                  <a:srgbClr val="5E6470"/>
+                  <a:schemeClr val="bg1">
+                    <a:lumMod val="95000"/>
+                  </a:schemeClr>
                 </a:solidFill>
                 <a:latin typeface="Noto Sans KR"/>
                 <a:ea typeface="Noto Sans KR"/>
@@ -6261,7 +5281,9 @@
             <a:r>
               <a:rPr sz="1275" b="0" i="0" dirty="0" err="1">
                 <a:solidFill>
-                  <a:srgbClr val="5E6470"/>
+                  <a:schemeClr val="bg1">
+                    <a:lumMod val="95000"/>
+                  </a:schemeClr>
                 </a:solidFill>
                 <a:latin typeface="Noto Sans KR"/>
                 <a:ea typeface="Noto Sans KR"/>
@@ -6271,7 +5293,9 @@
             </a:r>
             <a:endParaRPr sz="1275" b="0" i="0" dirty="0">
               <a:solidFill>
-                <a:srgbClr val="5E6470"/>
+                <a:schemeClr val="bg1">
+                  <a:lumMod val="95000"/>
+                </a:schemeClr>
               </a:solidFill>
               <a:latin typeface="Noto Sans KR"/>
               <a:ea typeface="Noto Sans KR"/>
@@ -6292,7 +5316,9 @@
             <a:r>
               <a:rPr sz="1275" b="0" i="0" dirty="0" err="1">
                 <a:solidFill>
-                  <a:srgbClr val="5E6470"/>
+                  <a:schemeClr val="bg1">
+                    <a:lumMod val="95000"/>
+                  </a:schemeClr>
                 </a:solidFill>
                 <a:latin typeface="Noto Sans KR"/>
                 <a:ea typeface="Noto Sans KR"/>
@@ -6303,7 +5329,9 @@
             <a:r>
               <a:rPr sz="1275" b="0" i="0" dirty="0">
                 <a:solidFill>
-                  <a:srgbClr val="5E6470"/>
+                  <a:schemeClr val="bg1">
+                    <a:lumMod val="95000"/>
+                  </a:schemeClr>
                 </a:solidFill>
                 <a:latin typeface="Noto Sans KR"/>
                 <a:ea typeface="Noto Sans KR"/>
@@ -6314,7 +5342,9 @@
             <a:r>
               <a:rPr sz="1275" b="0" i="0" dirty="0" err="1">
                 <a:solidFill>
-                  <a:srgbClr val="5E6470"/>
+                  <a:schemeClr val="bg1">
+                    <a:lumMod val="95000"/>
+                  </a:schemeClr>
                 </a:solidFill>
                 <a:latin typeface="Noto Sans KR"/>
                 <a:ea typeface="Noto Sans KR"/>
@@ -6325,7 +5355,9 @@
             <a:r>
               <a:rPr sz="1275" b="0" i="0" dirty="0">
                 <a:solidFill>
-                  <a:srgbClr val="5E6470"/>
+                  <a:schemeClr val="bg1">
+                    <a:lumMod val="95000"/>
+                  </a:schemeClr>
                 </a:solidFill>
                 <a:latin typeface="Noto Sans KR"/>
                 <a:ea typeface="Noto Sans KR"/>
@@ -6336,7 +5368,9 @@
             <a:r>
               <a:rPr sz="1275" b="0" i="0" dirty="0" err="1">
                 <a:solidFill>
-                  <a:srgbClr val="5E6470"/>
+                  <a:schemeClr val="bg1">
+                    <a:lumMod val="95000"/>
+                  </a:schemeClr>
                 </a:solidFill>
                 <a:latin typeface="Noto Sans KR"/>
                 <a:ea typeface="Noto Sans KR"/>
@@ -6346,7 +5380,9 @@
             </a:r>
             <a:endParaRPr sz="1275" b="0" i="0" dirty="0">
               <a:solidFill>
-                <a:srgbClr val="5E6470"/>
+                <a:schemeClr val="bg1">
+                  <a:lumMod val="95000"/>
+                </a:schemeClr>
               </a:solidFill>
               <a:latin typeface="Noto Sans KR"/>
               <a:ea typeface="Noto Sans KR"/>
@@ -6377,9 +5413,36 @@
           <a:prstGeom prst="rect">
             <a:avLst/>
           </a:prstGeom>
-          <a:solidFill>
-            <a:srgbClr val="DDF3FC"/>
-          </a:solidFill>
+          <a:gradFill>
+            <a:gsLst>
+              <a:gs pos="0">
+                <a:schemeClr val="accent6">
+                  <a:lumMod val="40000"/>
+                  <a:lumOff val="60000"/>
+                  <a:alpha val="60000"/>
+                </a:schemeClr>
+              </a:gs>
+              <a:gs pos="74000">
+                <a:schemeClr val="accent1">
+                  <a:lumMod val="45000"/>
+                  <a:lumOff val="55000"/>
+                </a:schemeClr>
+              </a:gs>
+              <a:gs pos="83000">
+                <a:schemeClr val="accent1">
+                  <a:lumMod val="45000"/>
+                  <a:lumOff val="55000"/>
+                </a:schemeClr>
+              </a:gs>
+              <a:gs pos="100000">
+                <a:schemeClr val="accent1">
+                  <a:lumMod val="30000"/>
+                  <a:lumOff val="70000"/>
+                </a:schemeClr>
+              </a:gs>
+            </a:gsLst>
+            <a:lin ang="5400000" scaled="1"/>
+          </a:gradFill>
           <a:ln w="0">
             <a:noFill/>
             <a:prstDash val="solid"/>
@@ -6498,7 +5561,7 @@
             <a:r>
               <a:rPr sz="1650" b="1" i="0" dirty="0">
                 <a:solidFill>
-                  <a:srgbClr val="111318"/>
+                  <a:schemeClr val="bg1"/>
                 </a:solidFill>
                 <a:latin typeface="Noto Sans KR"/>
                 <a:ea typeface="Noto Sans KR"/>
@@ -6509,7 +5572,7 @@
             <a:r>
               <a:rPr sz="1650" b="1" i="0" dirty="0" err="1">
                 <a:solidFill>
-                  <a:srgbClr val="111318"/>
+                  <a:schemeClr val="bg1"/>
                 </a:solidFill>
                 <a:latin typeface="Noto Sans KR"/>
                 <a:ea typeface="Noto Sans KR"/>
@@ -6520,7 +5583,7 @@
             <a:r>
               <a:rPr lang="en-US" sz="1650" b="1" i="0" dirty="0">
                 <a:solidFill>
-                  <a:srgbClr val="111318"/>
+                  <a:schemeClr val="bg1"/>
                 </a:solidFill>
                 <a:latin typeface="Noto Sans KR"/>
                 <a:ea typeface="Noto Sans KR"/>
@@ -6531,7 +5594,7 @@
             <a:r>
               <a:rPr lang="ko-KR" altLang="en-US" sz="1650" b="1" i="0" dirty="0">
                 <a:solidFill>
-                  <a:srgbClr val="111318"/>
+                  <a:schemeClr val="bg1"/>
                 </a:solidFill>
                 <a:latin typeface="Noto Sans KR"/>
                 <a:ea typeface="Noto Sans KR"/>
@@ -6541,7 +5604,7 @@
             </a:r>
             <a:endParaRPr sz="1650" b="1" i="0" dirty="0">
               <a:solidFill>
-                <a:srgbClr val="111318"/>
+                <a:schemeClr val="bg1"/>
               </a:solidFill>
               <a:latin typeface="Noto Sans KR"/>
               <a:ea typeface="Noto Sans KR"/>
@@ -6597,7 +5660,9 @@
             <a:r>
               <a:rPr lang="ko-KR" altLang="en-US" sz="1275" b="0" i="0" dirty="0">
                 <a:solidFill>
-                  <a:srgbClr val="5E6470"/>
+                  <a:schemeClr val="bg1">
+                    <a:lumMod val="95000"/>
+                  </a:schemeClr>
                 </a:solidFill>
                 <a:latin typeface="Noto Sans KR"/>
                 <a:ea typeface="Noto Sans KR"/>
@@ -6607,7 +5672,9 @@
             </a:r>
             <a:endParaRPr lang="en-US" altLang="ko-KR" sz="1275" b="0" i="0" dirty="0">
               <a:solidFill>
-                <a:srgbClr val="5E6470"/>
+                <a:schemeClr val="bg1">
+                  <a:lumMod val="95000"/>
+                </a:schemeClr>
               </a:solidFill>
               <a:latin typeface="Noto Sans KR"/>
               <a:ea typeface="Noto Sans KR"/>
@@ -6627,7 +5694,9 @@
             </a:pPr>
             <a:endParaRPr lang="ko-KR" altLang="en-US" sz="1275" b="0" i="0" dirty="0">
               <a:solidFill>
-                <a:srgbClr val="5E6470"/>
+                <a:schemeClr val="bg1">
+                  <a:lumMod val="95000"/>
+                </a:schemeClr>
               </a:solidFill>
               <a:latin typeface="Noto Sans KR"/>
               <a:ea typeface="Noto Sans KR"/>
@@ -6658,9 +5727,36 @@
           <a:prstGeom prst="rect">
             <a:avLst/>
           </a:prstGeom>
-          <a:solidFill>
-            <a:srgbClr val="EEF0F3"/>
-          </a:solidFill>
+          <a:gradFill>
+            <a:gsLst>
+              <a:gs pos="0">
+                <a:schemeClr val="accent6">
+                  <a:lumMod val="40000"/>
+                  <a:lumOff val="60000"/>
+                  <a:alpha val="60000"/>
+                </a:schemeClr>
+              </a:gs>
+              <a:gs pos="74000">
+                <a:schemeClr val="accent1">
+                  <a:lumMod val="45000"/>
+                  <a:lumOff val="55000"/>
+                </a:schemeClr>
+              </a:gs>
+              <a:gs pos="83000">
+                <a:schemeClr val="accent1">
+                  <a:lumMod val="45000"/>
+                  <a:lumOff val="55000"/>
+                </a:schemeClr>
+              </a:gs>
+              <a:gs pos="100000">
+                <a:schemeClr val="accent1">
+                  <a:lumMod val="30000"/>
+                  <a:lumOff val="70000"/>
+                </a:schemeClr>
+              </a:gs>
+            </a:gsLst>
+            <a:lin ang="5400000" scaled="1"/>
+          </a:gradFill>
           <a:ln w="0">
             <a:noFill/>
             <a:prstDash val="solid"/>
@@ -6779,7 +5875,7 @@
             <a:r>
               <a:rPr lang="ko-KR" altLang="en-US" sz="1650" b="1" dirty="0">
                 <a:solidFill>
-                  <a:srgbClr val="111318"/>
+                  <a:schemeClr val="bg1"/>
                 </a:solidFill>
                 <a:latin typeface="Noto Sans KR"/>
                 <a:ea typeface="Noto Sans KR"/>
@@ -6789,7 +5885,7 @@
             </a:r>
             <a:endParaRPr lang="ko-KR" altLang="en-US" sz="1650" b="1" i="0" dirty="0">
               <a:solidFill>
-                <a:srgbClr val="111318"/>
+                <a:schemeClr val="bg1"/>
               </a:solidFill>
               <a:latin typeface="Noto Sans KR"/>
               <a:ea typeface="Noto Sans KR"/>
@@ -6845,7 +5941,9 @@
             <a:r>
               <a:rPr sz="1275" b="0" i="0" dirty="0" err="1">
                 <a:solidFill>
-                  <a:srgbClr val="5E6470"/>
+                  <a:schemeClr val="bg1">
+                    <a:lumMod val="95000"/>
+                  </a:schemeClr>
                 </a:solidFill>
                 <a:latin typeface="Noto Sans KR"/>
                 <a:ea typeface="Noto Sans KR"/>
@@ -6855,7 +5953,9 @@
             </a:r>
             <a:endParaRPr sz="1275" b="0" i="0" dirty="0">
               <a:solidFill>
-                <a:srgbClr val="5E6470"/>
+                <a:schemeClr val="bg1">
+                  <a:lumMod val="95000"/>
+                </a:schemeClr>
               </a:solidFill>
               <a:latin typeface="Noto Sans KR"/>
               <a:ea typeface="Noto Sans KR"/>
@@ -6876,7 +5976,9 @@
             <a:r>
               <a:rPr sz="1275" b="0" i="0" dirty="0" err="1">
                 <a:solidFill>
-                  <a:srgbClr val="5E6470"/>
+                  <a:schemeClr val="bg1">
+                    <a:lumMod val="95000"/>
+                  </a:schemeClr>
                 </a:solidFill>
                 <a:latin typeface="Noto Sans KR"/>
                 <a:ea typeface="Noto Sans KR"/>
@@ -6887,7 +5989,9 @@
             <a:r>
               <a:rPr sz="1275" b="0" i="0" dirty="0">
                 <a:solidFill>
-                  <a:srgbClr val="5E6470"/>
+                  <a:schemeClr val="bg1">
+                    <a:lumMod val="95000"/>
+                  </a:schemeClr>
                 </a:solidFill>
                 <a:latin typeface="Noto Sans KR"/>
                 <a:ea typeface="Noto Sans KR"/>
@@ -6898,7 +6002,9 @@
             <a:r>
               <a:rPr sz="1275" b="0" i="0" dirty="0" err="1">
                 <a:solidFill>
-                  <a:srgbClr val="5E6470"/>
+                  <a:schemeClr val="bg1">
+                    <a:lumMod val="95000"/>
+                  </a:schemeClr>
                 </a:solidFill>
                 <a:latin typeface="Noto Sans KR"/>
                 <a:ea typeface="Noto Sans KR"/>
@@ -6908,7 +6014,9 @@
             </a:r>
             <a:endParaRPr sz="1275" b="0" i="0" dirty="0">
               <a:solidFill>
-                <a:srgbClr val="5E6470"/>
+                <a:schemeClr val="bg1">
+                  <a:lumMod val="95000"/>
+                </a:schemeClr>
               </a:solidFill>
               <a:latin typeface="Noto Sans KR"/>
               <a:ea typeface="Noto Sans KR"/>
@@ -6939,9 +6047,36 @@
           <a:prstGeom prst="rect">
             <a:avLst/>
           </a:prstGeom>
-          <a:solidFill>
-            <a:srgbClr val="EEF0F3"/>
-          </a:solidFill>
+          <a:gradFill>
+            <a:gsLst>
+              <a:gs pos="0">
+                <a:schemeClr val="accent6">
+                  <a:lumMod val="40000"/>
+                  <a:lumOff val="60000"/>
+                  <a:alpha val="60000"/>
+                </a:schemeClr>
+              </a:gs>
+              <a:gs pos="74000">
+                <a:schemeClr val="accent1">
+                  <a:lumMod val="45000"/>
+                  <a:lumOff val="55000"/>
+                </a:schemeClr>
+              </a:gs>
+              <a:gs pos="83000">
+                <a:schemeClr val="accent1">
+                  <a:lumMod val="45000"/>
+                  <a:lumOff val="55000"/>
+                </a:schemeClr>
+              </a:gs>
+              <a:gs pos="100000">
+                <a:schemeClr val="accent1">
+                  <a:lumMod val="30000"/>
+                  <a:lumOff val="70000"/>
+                </a:schemeClr>
+              </a:gs>
+            </a:gsLst>
+            <a:lin ang="5400000" scaled="1"/>
+          </a:gradFill>
           <a:ln w="0">
             <a:noFill/>
             <a:prstDash val="solid"/>
@@ -7115,7 +6250,9 @@
             <a:r>
               <a:rPr lang="ko-KR" altLang="en-US" sz="1275" b="0" i="0" dirty="0">
                 <a:solidFill>
-                  <a:srgbClr val="5E6470"/>
+                  <a:schemeClr val="bg1">
+                    <a:lumMod val="95000"/>
+                  </a:schemeClr>
                 </a:solidFill>
                 <a:latin typeface="Noto Sans KR"/>
                 <a:ea typeface="Noto Sans KR"/>
@@ -7125,7 +6262,9 @@
             </a:r>
             <a:endParaRPr lang="en-US" altLang="ko-KR" sz="1275" b="0" i="0" dirty="0">
               <a:solidFill>
-                <a:srgbClr val="5E6470"/>
+                <a:schemeClr val="bg1">
+                  <a:lumMod val="95000"/>
+                </a:schemeClr>
               </a:solidFill>
               <a:latin typeface="Noto Sans KR"/>
               <a:ea typeface="Noto Sans KR"/>
@@ -7146,7 +6285,9 @@
             <a:r>
               <a:rPr lang="ko-KR" altLang="en-US" sz="1275" b="0" i="0" dirty="0">
                 <a:solidFill>
-                  <a:srgbClr val="5E6470"/>
+                  <a:schemeClr val="bg1">
+                    <a:lumMod val="95000"/>
+                  </a:schemeClr>
                 </a:solidFill>
                 <a:latin typeface="Noto Sans KR"/>
                 <a:ea typeface="Noto Sans KR"/>
@@ -7157,7 +6298,9 @@
             <a:r>
               <a:rPr lang="ko-KR" altLang="en-US" sz="1275" dirty="0">
                 <a:solidFill>
-                  <a:srgbClr val="5E6470"/>
+                  <a:schemeClr val="bg1">
+                    <a:lumMod val="95000"/>
+                  </a:schemeClr>
                 </a:solidFill>
                 <a:latin typeface="Noto Sans KR"/>
                 <a:ea typeface="Noto Sans KR"/>
@@ -7167,7 +6310,9 @@
             </a:r>
             <a:endParaRPr sz="1275" b="0" i="0" dirty="0">
               <a:solidFill>
-                <a:srgbClr val="5E6470"/>
+                <a:schemeClr val="bg1">
+                  <a:lumMod val="95000"/>
+                </a:schemeClr>
               </a:solidFill>
               <a:latin typeface="Noto Sans KR"/>
               <a:ea typeface="Noto Sans KR"/>
@@ -7198,9 +6343,36 @@
           <a:prstGeom prst="rect">
             <a:avLst/>
           </a:prstGeom>
-          <a:solidFill>
-            <a:srgbClr val="EEF0F3"/>
-          </a:solidFill>
+          <a:gradFill>
+            <a:gsLst>
+              <a:gs pos="0">
+                <a:schemeClr val="accent6">
+                  <a:lumMod val="40000"/>
+                  <a:lumOff val="60000"/>
+                  <a:alpha val="60000"/>
+                </a:schemeClr>
+              </a:gs>
+              <a:gs pos="74000">
+                <a:schemeClr val="accent1">
+                  <a:lumMod val="45000"/>
+                  <a:lumOff val="55000"/>
+                </a:schemeClr>
+              </a:gs>
+              <a:gs pos="83000">
+                <a:schemeClr val="accent1">
+                  <a:lumMod val="45000"/>
+                  <a:lumOff val="55000"/>
+                </a:schemeClr>
+              </a:gs>
+              <a:gs pos="100000">
+                <a:schemeClr val="accent1">
+                  <a:lumMod val="30000"/>
+                  <a:lumOff val="70000"/>
+                </a:schemeClr>
+              </a:gs>
+            </a:gsLst>
+            <a:lin ang="5400000" scaled="1"/>
+          </a:gradFill>
           <a:ln w="0">
             <a:noFill/>
             <a:prstDash val="solid"/>
@@ -7317,16 +6489,46 @@
               </a:defRPr>
             </a:pPr>
             <a:r>
-              <a:rPr sz="1650" b="1" i="0">
-                <a:solidFill>
-                  <a:srgbClr val="111318"/>
-                </a:solidFill>
-                <a:latin typeface="Noto Sans KR"/>
-                <a:ea typeface="Noto Sans KR"/>
-                <a:cs typeface="Noto Sans KR"/>
-              </a:rPr>
-              <a:t>빌드 검증</a:t>
-            </a:r>
+              <a:rPr sz="1650" b="1" i="0" dirty="0" err="1">
+                <a:solidFill>
+                  <a:schemeClr val="bg1"/>
+                </a:solidFill>
+                <a:latin typeface="Noto Sans KR"/>
+                <a:ea typeface="Noto Sans KR"/>
+                <a:cs typeface="Noto Sans KR"/>
+              </a:rPr>
+              <a:t>빌드</a:t>
+            </a:r>
+            <a:r>
+              <a:rPr sz="1650" b="1" i="0" dirty="0">
+                <a:solidFill>
+                  <a:schemeClr val="bg1"/>
+                </a:solidFill>
+                <a:latin typeface="Noto Sans KR"/>
+                <a:ea typeface="Noto Sans KR"/>
+                <a:cs typeface="Noto Sans KR"/>
+              </a:rPr>
+              <a:t> </a:t>
+            </a:r>
+            <a:r>
+              <a:rPr sz="1650" b="1" i="0" dirty="0" err="1">
+                <a:solidFill>
+                  <a:schemeClr val="bg1"/>
+                </a:solidFill>
+                <a:latin typeface="Noto Sans KR"/>
+                <a:ea typeface="Noto Sans KR"/>
+                <a:cs typeface="Noto Sans KR"/>
+              </a:rPr>
+              <a:t>검증</a:t>
+            </a:r>
+            <a:endParaRPr sz="1650" b="1" i="0" dirty="0">
+              <a:solidFill>
+                <a:schemeClr val="bg1"/>
+              </a:solidFill>
+              <a:latin typeface="Noto Sans KR"/>
+              <a:ea typeface="Noto Sans KR"/>
+              <a:cs typeface="Noto Sans KR"/>
+            </a:endParaRPr>
           </a:p>
         </p:txBody>
       </p:sp>
@@ -7377,7 +6579,9 @@
             <a:r>
               <a:rPr sz="1275" b="0" i="0" dirty="0" err="1">
                 <a:solidFill>
-                  <a:srgbClr val="5E6470"/>
+                  <a:schemeClr val="bg1">
+                    <a:lumMod val="95000"/>
+                  </a:schemeClr>
                 </a:solidFill>
                 <a:latin typeface="Noto Sans KR"/>
                 <a:ea typeface="Noto Sans KR"/>
@@ -7388,7 +6592,9 @@
             <a:r>
               <a:rPr sz="1275" b="0" i="0" dirty="0">
                 <a:solidFill>
-                  <a:srgbClr val="5E6470"/>
+                  <a:schemeClr val="bg1">
+                    <a:lumMod val="95000"/>
+                  </a:schemeClr>
                 </a:solidFill>
                 <a:latin typeface="Noto Sans KR"/>
                 <a:ea typeface="Noto Sans KR"/>
@@ -7399,7 +6605,9 @@
             <a:r>
               <a:rPr sz="1275" b="0" i="0" dirty="0" err="1">
                 <a:solidFill>
-                  <a:srgbClr val="5E6470"/>
+                  <a:schemeClr val="bg1">
+                    <a:lumMod val="95000"/>
+                  </a:schemeClr>
                 </a:solidFill>
                 <a:latin typeface="Noto Sans KR"/>
                 <a:ea typeface="Noto Sans KR"/>
@@ -7409,7 +6617,9 @@
             </a:r>
             <a:endParaRPr sz="1275" b="0" i="0" dirty="0">
               <a:solidFill>
-                <a:srgbClr val="5E6470"/>
+                <a:schemeClr val="bg1">
+                  <a:lumMod val="95000"/>
+                </a:schemeClr>
               </a:solidFill>
               <a:latin typeface="Noto Sans KR"/>
               <a:ea typeface="Noto Sans KR"/>
@@ -7430,7 +6640,9 @@
             <a:r>
               <a:rPr sz="1275" b="0" i="0" dirty="0" err="1">
                 <a:solidFill>
-                  <a:srgbClr val="5E6470"/>
+                  <a:schemeClr val="bg1">
+                    <a:lumMod val="95000"/>
+                  </a:schemeClr>
                 </a:solidFill>
                 <a:latin typeface="Noto Sans KR"/>
                 <a:ea typeface="Noto Sans KR"/>
@@ -7441,7 +6653,9 @@
             <a:r>
               <a:rPr sz="1275" b="0" i="0" dirty="0">
                 <a:solidFill>
-                  <a:srgbClr val="5E6470"/>
+                  <a:schemeClr val="bg1">
+                    <a:lumMod val="95000"/>
+                  </a:schemeClr>
                 </a:solidFill>
                 <a:latin typeface="Noto Sans KR"/>
                 <a:ea typeface="Noto Sans KR"/>
@@ -7452,7 +6666,9 @@
             <a:r>
               <a:rPr sz="1275" b="0" i="0" dirty="0" err="1">
                 <a:solidFill>
-                  <a:srgbClr val="5E6470"/>
+                  <a:schemeClr val="bg1">
+                    <a:lumMod val="95000"/>
+                  </a:schemeClr>
                 </a:solidFill>
                 <a:latin typeface="Noto Sans KR"/>
                 <a:ea typeface="Noto Sans KR"/>
@@ -7462,7 +6678,9 @@
             </a:r>
             <a:endParaRPr sz="1275" b="0" i="0" dirty="0">
               <a:solidFill>
-                <a:srgbClr val="5E6470"/>
+                <a:schemeClr val="bg1">
+                  <a:lumMod val="95000"/>
+                </a:schemeClr>
               </a:solidFill>
               <a:latin typeface="Noto Sans KR"/>
               <a:ea typeface="Noto Sans KR"/>
@@ -7537,6 +6755,7 @@
                 <a:schemeClr val="accent6">
                   <a:lumMod val="40000"/>
                   <a:lumOff val="60000"/>
+                  <a:alpha val="60000"/>
                 </a:schemeClr>
               </a:gs>
               <a:gs pos="74000">
@@ -7624,7 +6843,6 @@
                 </a:solidFill>
                 <a:latin typeface="Noto Sans KR"/>
                 <a:ea typeface="Noto Sans KR"/>
-                <a:cs typeface="Noto Sans KR"/>
               </a:rPr>
               <a:t>사용 </a:t>
             </a:r>
@@ -7635,7 +6853,6 @@
                 </a:solidFill>
                 <a:latin typeface="Noto Sans KR"/>
                 <a:ea typeface="Noto Sans KR"/>
-                <a:cs typeface="Noto Sans KR"/>
               </a:rPr>
               <a:t>AI</a:t>
             </a:r>
@@ -7651,13 +6868,12 @@
                 <a:cs typeface="Noto Sans KR"/>
               </a:defRPr>
             </a:pPr>
-            <a:endParaRPr lang="en-US" sz="1500" b="0" i="0" dirty="0">
+            <a:endParaRPr lang="en-US" sz="1600" b="1" dirty="0">
               <a:solidFill>
                 <a:schemeClr val="bg1"/>
               </a:solidFill>
               <a:latin typeface="Noto Sans KR"/>
               <a:ea typeface="Noto Sans KR"/>
-              <a:cs typeface="Noto Sans KR"/>
             </a:endParaRPr>
           </a:p>
           <a:p>
@@ -7672,45 +6888,31 @@
               </a:defRPr>
             </a:pPr>
             <a:r>
-              <a:rPr lang="ko-KR" altLang="en-US" sz="1500" b="1" i="0" dirty="0">
+              <a:rPr lang="ko-KR" altLang="en-US" sz="1600" b="1" dirty="0">
                 <a:solidFill>
                   <a:schemeClr val="bg1"/>
                 </a:solidFill>
                 <a:latin typeface="Noto Sans KR"/>
                 <a:ea typeface="Noto Sans KR"/>
-                <a:cs typeface="Noto Sans KR"/>
-              </a:rPr>
-              <a:t>기획</a:t>
-            </a:r>
-            <a:r>
-              <a:rPr lang="ko-KR" altLang="en-US" sz="1500" b="0" i="0" dirty="0">
+              </a:rPr>
+              <a:t>기획 </a:t>
+            </a:r>
+            <a:r>
+              <a:rPr lang="en-US" altLang="ko-KR" sz="1600" b="1" dirty="0">
                 <a:solidFill>
                   <a:schemeClr val="bg1"/>
                 </a:solidFill>
                 <a:latin typeface="Noto Sans KR"/>
                 <a:ea typeface="Noto Sans KR"/>
-                <a:cs typeface="Noto Sans KR"/>
-              </a:rPr>
-              <a:t> </a:t>
-            </a:r>
-            <a:r>
-              <a:rPr lang="en-US" altLang="ko-KR" sz="1500" dirty="0">
-                <a:solidFill>
-                  <a:schemeClr val="bg1"/>
-                </a:solidFill>
-                <a:latin typeface="Noto Sans KR"/>
-                <a:ea typeface="Noto Sans KR"/>
-                <a:cs typeface="Noto Sans KR"/>
               </a:rPr>
               <a:t>: Codex 5.6 Sol, Claude Code Fable5</a:t>
             </a:r>
-            <a:endParaRPr lang="en-US" sz="1500" b="0" i="0" dirty="0">
+            <a:endParaRPr lang="en-US" sz="1600" b="1" dirty="0">
               <a:solidFill>
                 <a:schemeClr val="bg1"/>
               </a:solidFill>
               <a:latin typeface="Noto Sans KR"/>
               <a:ea typeface="Noto Sans KR"/>
-              <a:cs typeface="Noto Sans KR"/>
             </a:endParaRPr>
           </a:p>
           <a:p>
@@ -7725,59 +6927,34 @@
               </a:defRPr>
             </a:pPr>
             <a:r>
-              <a:rPr lang="ko-KR" altLang="en-US" sz="1500" b="1" dirty="0">
+              <a:rPr lang="ko-KR" altLang="en-US" sz="1600" b="1" dirty="0">
                 <a:solidFill>
                   <a:schemeClr val="bg1"/>
                 </a:solidFill>
                 <a:latin typeface="Noto Sans KR"/>
                 <a:ea typeface="Noto Sans KR"/>
-                <a:cs typeface="Noto Sans KR"/>
-              </a:rPr>
-              <a:t>개발</a:t>
-            </a:r>
-            <a:r>
-              <a:rPr lang="ko-KR" altLang="en-US" sz="1500" dirty="0">
+              </a:rPr>
+              <a:t>개발 </a:t>
+            </a:r>
+            <a:r>
+              <a:rPr lang="en-US" altLang="ko-KR" sz="1600" b="1" dirty="0">
                 <a:solidFill>
                   <a:schemeClr val="bg1"/>
                 </a:solidFill>
                 <a:latin typeface="Noto Sans KR"/>
                 <a:ea typeface="Noto Sans KR"/>
-                <a:cs typeface="Noto Sans KR"/>
-              </a:rPr>
-              <a:t> </a:t>
-            </a:r>
-            <a:r>
-              <a:rPr lang="en-US" altLang="ko-KR" sz="1500" dirty="0">
+              </a:rPr>
+              <a:t>: </a:t>
+            </a:r>
+            <a:r>
+              <a:rPr lang="en-US" sz="1600" b="1" dirty="0">
                 <a:solidFill>
                   <a:schemeClr val="bg1"/>
                 </a:solidFill>
                 <a:latin typeface="Noto Sans KR"/>
                 <a:ea typeface="Noto Sans KR"/>
-                <a:cs typeface="Noto Sans KR"/>
-              </a:rPr>
-              <a:t>: </a:t>
-            </a:r>
-            <a:r>
-              <a:rPr lang="en-US" sz="1500" b="0" i="0" dirty="0">
-                <a:solidFill>
-                  <a:schemeClr val="bg1"/>
-                </a:solidFill>
-                <a:latin typeface="Noto Sans KR"/>
-                <a:ea typeface="Noto Sans KR"/>
-                <a:cs typeface="Noto Sans KR"/>
-              </a:rPr>
-              <a:t>Codex 5.6 Sol, </a:t>
-            </a:r>
-            <a:r>
-              <a:rPr lang="en-US" sz="1500" dirty="0">
-                <a:solidFill>
-                  <a:schemeClr val="bg1"/>
-                </a:solidFill>
-                <a:latin typeface="Noto Sans KR"/>
-                <a:ea typeface="Noto Sans KR"/>
-                <a:cs typeface="Noto Sans KR"/>
-              </a:rPr>
-              <a:t>Claude Code Fable5</a:t>
+              </a:rPr>
+              <a:t>Codex 5.6 Sol, Claude Code Fable5</a:t>
             </a:r>
           </a:p>
           <a:p>
@@ -7792,78 +6969,51 @@
               </a:defRPr>
             </a:pPr>
             <a:r>
-              <a:rPr lang="ko-KR" altLang="en-US" sz="1500" b="1" i="0" dirty="0">
+              <a:rPr lang="ko-KR" altLang="en-US" sz="1600" b="1" dirty="0">
                 <a:solidFill>
                   <a:schemeClr val="bg1"/>
                 </a:solidFill>
                 <a:latin typeface="Noto Sans KR"/>
                 <a:ea typeface="Noto Sans KR"/>
-                <a:cs typeface="Noto Sans KR"/>
-              </a:rPr>
-              <a:t>아트</a:t>
-            </a:r>
-            <a:r>
-              <a:rPr lang="ko-KR" altLang="en-US" sz="1500" b="0" i="0" dirty="0">
+              </a:rPr>
+              <a:t>아트 </a:t>
+            </a:r>
+            <a:r>
+              <a:rPr lang="en-US" altLang="ko-KR" sz="1600" b="1" dirty="0">
                 <a:solidFill>
                   <a:schemeClr val="bg1"/>
                 </a:solidFill>
                 <a:latin typeface="Noto Sans KR"/>
                 <a:ea typeface="Noto Sans KR"/>
-                <a:cs typeface="Noto Sans KR"/>
-              </a:rPr>
-              <a:t> </a:t>
-            </a:r>
-            <a:r>
-              <a:rPr lang="en-US" altLang="ko-KR" sz="1500" b="0" i="0" dirty="0">
+              </a:rPr>
+              <a:t>: </a:t>
+            </a:r>
+            <a:r>
+              <a:rPr lang="en-US" sz="1600" b="1" dirty="0" err="1">
                 <a:solidFill>
                   <a:schemeClr val="bg1"/>
                 </a:solidFill>
                 <a:latin typeface="Noto Sans KR"/>
                 <a:ea typeface="Noto Sans KR"/>
-                <a:cs typeface="Noto Sans KR"/>
-              </a:rPr>
-              <a:t>: </a:t>
-            </a:r>
-            <a:r>
-              <a:rPr lang="en-US" sz="1500" b="0" i="0" dirty="0" err="1">
+              </a:rPr>
+              <a:t>ComfyUI</a:t>
+            </a:r>
+            <a:r>
+              <a:rPr lang="en-US" sz="1600" b="1" dirty="0">
                 <a:solidFill>
                   <a:schemeClr val="bg1"/>
                 </a:solidFill>
                 <a:latin typeface="Noto Sans KR"/>
                 <a:ea typeface="Noto Sans KR"/>
-                <a:cs typeface="Noto Sans KR"/>
-              </a:rPr>
-              <a:t>ComfyUI</a:t>
-            </a:r>
-            <a:r>
-              <a:rPr lang="en-US" sz="1500" b="0" i="0" dirty="0">
-                <a:solidFill>
-                  <a:schemeClr val="bg1"/>
-                </a:solidFill>
-                <a:latin typeface="Noto Sans KR"/>
-                <a:ea typeface="Noto Sans KR"/>
-                <a:cs typeface="Noto Sans KR"/>
-              </a:rPr>
-              <a:t> AI</a:t>
-            </a:r>
-            <a:r>
-              <a:rPr lang="en-US" sz="1500" dirty="0">
-                <a:solidFill>
-                  <a:schemeClr val="bg1"/>
-                </a:solidFill>
-                <a:latin typeface="Noto Sans KR"/>
-                <a:ea typeface="Noto Sans KR"/>
-                <a:cs typeface="Noto Sans KR"/>
-              </a:rPr>
-              <a:t>, Flow AI, Gemini Pro 3.7  </a:t>
-            </a:r>
-            <a:endParaRPr sz="1500" b="0" i="0" dirty="0">
+              </a:rPr>
+              <a:t> AI, Flow AI, Gemini Pro 3.7  </a:t>
+            </a:r>
+            <a:endParaRPr sz="1600" b="1" dirty="0">
               <a:solidFill>
                 <a:schemeClr val="bg1"/>
               </a:solidFill>
               <a:latin typeface="Noto Sans KR"/>
               <a:ea typeface="Noto Sans KR"/>
-              <a:cs typeface="Noto Sans KR"/>
             </a:endParaRPr>
           </a:p>
         </p:txBody>
@@ -7915,7 +7065,7 @@
             <a:r>
               <a:rPr lang="ko-KR" altLang="en-US" sz="1650" b="1" dirty="0">
                 <a:solidFill>
-                  <a:srgbClr val="111318"/>
+                  <a:schemeClr val="bg1"/>
                 </a:solidFill>
                 <a:latin typeface="Noto Sans KR"/>
                 <a:ea typeface="Noto Sans KR"/>
@@ -7925,7 +7075,7 @@
             </a:r>
             <a:endParaRPr lang="ko-KR" altLang="en-US" sz="1650" b="1" i="0" dirty="0">
               <a:solidFill>
-                <a:srgbClr val="111318"/>
+                <a:schemeClr val="bg1"/>
               </a:solidFill>
               <a:latin typeface="Noto Sans KR"/>
               <a:ea typeface="Noto Sans KR"/>
@@ -7962,6 +7112,7 @@
                 <a:schemeClr val="accent6">
                   <a:lumMod val="40000"/>
                   <a:lumOff val="60000"/>
+                  <a:alpha val="60000"/>
                 </a:schemeClr>
               </a:gs>
               <a:gs pos="74000">
@@ -8028,7 +7179,7 @@
         </p:spPr>
         <p:txBody>
           <a:bodyPr lIns="0" tIns="0" rIns="0" bIns="0" anchor="t">
-            <a:normAutofit/>
+            <a:normAutofit fontScale="92500" lnSpcReduction="10000"/>
           </a:bodyPr>
           <a:lstStyle/>
           <a:p>
@@ -8043,24 +7194,22 @@
               </a:defRPr>
             </a:pPr>
             <a:r>
-              <a:rPr lang="ko-KR" altLang="en-US" sz="2400" b="1" dirty="0">
+              <a:rPr lang="ko-KR" altLang="en-US" sz="2600" b="1" dirty="0">
                 <a:solidFill>
                   <a:schemeClr val="bg1"/>
                 </a:solidFill>
                 <a:latin typeface="Noto Sans KR"/>
                 <a:ea typeface="Noto Sans KR"/>
-                <a:cs typeface="Noto Sans KR"/>
               </a:rPr>
               <a:t>주요 </a:t>
             </a:r>
             <a:r>
-              <a:rPr lang="en-US" altLang="ko-KR" sz="2400" b="1" dirty="0">
+              <a:rPr lang="en-US" altLang="ko-KR" sz="2600" b="1" dirty="0">
                 <a:solidFill>
                   <a:schemeClr val="bg1"/>
                 </a:solidFill>
                 <a:latin typeface="Noto Sans KR"/>
                 <a:ea typeface="Noto Sans KR"/>
-                <a:cs typeface="Noto Sans KR"/>
               </a:rPr>
               <a:t>MD</a:t>
             </a:r>
@@ -8076,17 +7225,18 @@
                 <a:cs typeface="Noto Sans KR"/>
               </a:defRPr>
             </a:pPr>
-            <a:endParaRPr lang="en-US" sz="1500" b="0" i="0" dirty="0">
+            <a:endParaRPr lang="en-US" sz="1600" b="1" dirty="0">
               <a:solidFill>
                 <a:schemeClr val="bg1"/>
               </a:solidFill>
               <a:latin typeface="Noto Sans KR"/>
               <a:ea typeface="Noto Sans KR"/>
-              <a:cs typeface="Noto Sans KR"/>
             </a:endParaRPr>
           </a:p>
           <a:p>
-            <a:pPr>
+            <a:pPr marL="285750" indent="-285750">
+              <a:buFontTx/>
+              <a:buChar char="-"/>
               <a:defRPr sz="1500" b="0" i="0">
                 <a:solidFill>
                   <a:srgbClr val="FFFFFF"/>
@@ -8097,49 +7247,37 @@
               </a:defRPr>
             </a:pPr>
             <a:r>
-              <a:rPr lang="en-US" altLang="ko-KR" sz="1500" dirty="0">
+              <a:rPr lang="en-US" altLang="ko-KR" sz="1600" b="1" dirty="0">
                 <a:solidFill>
                   <a:schemeClr val="bg1"/>
                 </a:solidFill>
                 <a:latin typeface="Noto Sans KR"/>
                 <a:ea typeface="Noto Sans KR"/>
-                <a:cs typeface="Noto Sans KR"/>
-              </a:rPr>
-              <a:t>- GDD</a:t>
-            </a:r>
-            <a:r>
-              <a:rPr lang="ko-KR" altLang="en-US" sz="1500" dirty="0">
+              </a:rPr>
+              <a:t>GDD</a:t>
+            </a:r>
+            <a:r>
+              <a:rPr lang="ko-KR" altLang="en-US" sz="1600" b="1" dirty="0">
                 <a:solidFill>
                   <a:schemeClr val="bg1"/>
                 </a:solidFill>
                 <a:latin typeface="Noto Sans KR"/>
                 <a:ea typeface="Noto Sans KR"/>
-                <a:cs typeface="Noto Sans KR"/>
-              </a:rPr>
-              <a:t>를 기준으로 게임 규칙 </a:t>
-            </a:r>
-            <a:r>
-              <a:rPr lang="ko-KR" altLang="en-US" sz="1500" dirty="0" err="1">
-                <a:solidFill>
-                  <a:schemeClr val="bg1"/>
-                </a:solidFill>
-                <a:latin typeface="Noto Sans KR"/>
-                <a:ea typeface="Noto Sans KR"/>
-                <a:cs typeface="Noto Sans KR"/>
-              </a:rPr>
-              <a:t>등을정리</a:t>
-            </a:r>
-            <a:endParaRPr lang="en-US" altLang="ko-KR" sz="1500" dirty="0">
+              </a:rPr>
+              <a:t>를 기준으로 게임 규칙 등을 정리</a:t>
+            </a:r>
+            <a:endParaRPr lang="en-US" altLang="ko-KR" sz="1600" b="1" dirty="0">
               <a:solidFill>
                 <a:schemeClr val="bg1"/>
               </a:solidFill>
               <a:latin typeface="Noto Sans KR"/>
               <a:ea typeface="Noto Sans KR"/>
-              <a:cs typeface="Noto Sans KR"/>
             </a:endParaRPr>
           </a:p>
           <a:p>
-            <a:pPr>
+            <a:pPr marL="285750" indent="-285750">
+              <a:buFontTx/>
+              <a:buChar char="-"/>
               <a:defRPr sz="1500" b="0" i="0">
                 <a:solidFill>
                   <a:srgbClr val="FFFFFF"/>
@@ -8150,104 +7288,87 @@
               </a:defRPr>
             </a:pPr>
             <a:r>
-              <a:rPr lang="en-US" altLang="ko-KR" sz="1500" dirty="0">
+              <a:rPr lang="ko-KR" altLang="en-US" sz="1600" b="1" dirty="0">
                 <a:solidFill>
                   <a:schemeClr val="bg1"/>
                 </a:solidFill>
                 <a:latin typeface="Noto Sans KR"/>
                 <a:ea typeface="Noto Sans KR"/>
-                <a:cs typeface="Noto Sans KR"/>
-              </a:rPr>
-              <a:t>- </a:t>
-            </a:r>
-            <a:r>
-              <a:rPr lang="ko-KR" altLang="en-US" sz="1500" dirty="0">
+              </a:rPr>
+              <a:t>각 </a:t>
+            </a:r>
+            <a:r>
+              <a:rPr lang="en-US" altLang="ko-KR" sz="1600" b="1" dirty="0">
                 <a:solidFill>
                   <a:schemeClr val="bg1"/>
                 </a:solidFill>
                 <a:latin typeface="Noto Sans KR"/>
                 <a:ea typeface="Noto Sans KR"/>
-                <a:cs typeface="Noto Sans KR"/>
-              </a:rPr>
-              <a:t>각 </a:t>
-            </a:r>
-            <a:r>
-              <a:rPr lang="en-US" altLang="ko-KR" sz="1500" dirty="0">
+              </a:rPr>
+              <a:t>Day</a:t>
+            </a:r>
+            <a:r>
+              <a:rPr lang="ko-KR" altLang="en-US" sz="1600" b="1" dirty="0">
                 <a:solidFill>
                   <a:schemeClr val="bg1"/>
                 </a:solidFill>
                 <a:latin typeface="Noto Sans KR"/>
                 <a:ea typeface="Noto Sans KR"/>
-                <a:cs typeface="Noto Sans KR"/>
-              </a:rPr>
-              <a:t>Day</a:t>
-            </a:r>
-            <a:r>
-              <a:rPr lang="ko-KR" altLang="en-US" sz="1500" dirty="0">
+              </a:rPr>
+              <a:t>의 목표</a:t>
+            </a:r>
+            <a:r>
+              <a:rPr lang="en-US" altLang="ko-KR" sz="1600" b="1" dirty="0">
                 <a:solidFill>
                   <a:schemeClr val="bg1"/>
                 </a:solidFill>
                 <a:latin typeface="Noto Sans KR"/>
                 <a:ea typeface="Noto Sans KR"/>
-                <a:cs typeface="Noto Sans KR"/>
-              </a:rPr>
-              <a:t>의 목표</a:t>
-            </a:r>
-            <a:r>
-              <a:rPr lang="en-US" altLang="ko-KR" sz="1500" dirty="0">
+              </a:rPr>
+              <a:t>, </a:t>
+            </a:r>
+            <a:r>
+              <a:rPr lang="ko-KR" altLang="en-US" sz="1600" b="1" dirty="0">
                 <a:solidFill>
                   <a:schemeClr val="bg1"/>
                 </a:solidFill>
                 <a:latin typeface="Noto Sans KR"/>
                 <a:ea typeface="Noto Sans KR"/>
-                <a:cs typeface="Noto Sans KR"/>
+              </a:rPr>
+              <a:t>주의사항</a:t>
+            </a:r>
+            <a:r>
+              <a:rPr lang="en-US" altLang="ko-KR" sz="1600" b="1" dirty="0">
+                <a:solidFill>
+                  <a:schemeClr val="bg1"/>
+                </a:solidFill>
+                <a:latin typeface="Noto Sans KR"/>
+                <a:ea typeface="Noto Sans KR"/>
               </a:rPr>
               <a:t>, </a:t>
             </a:r>
             <a:r>
-              <a:rPr lang="ko-KR" altLang="en-US" sz="1500" dirty="0">
+              <a:rPr lang="ko-KR" altLang="en-US" sz="1600" b="1" dirty="0">
                 <a:solidFill>
                   <a:schemeClr val="bg1"/>
                 </a:solidFill>
                 <a:latin typeface="Noto Sans KR"/>
                 <a:ea typeface="Noto Sans KR"/>
-                <a:cs typeface="Noto Sans KR"/>
-              </a:rPr>
-              <a:t>이상 현상</a:t>
-            </a:r>
-            <a:r>
-              <a:rPr lang="en-US" altLang="ko-KR" sz="1500" dirty="0">
-                <a:solidFill>
-                  <a:schemeClr val="bg1"/>
-                </a:solidFill>
-                <a:latin typeface="Noto Sans KR"/>
-                <a:ea typeface="Noto Sans KR"/>
-                <a:cs typeface="Noto Sans KR"/>
-              </a:rPr>
-              <a:t>, </a:t>
-            </a:r>
-            <a:r>
-              <a:rPr lang="ko-KR" altLang="en-US" sz="1500" dirty="0">
-                <a:solidFill>
-                  <a:schemeClr val="bg1"/>
-                </a:solidFill>
-                <a:latin typeface="Noto Sans KR"/>
-                <a:ea typeface="Noto Sans KR"/>
-                <a:cs typeface="Noto Sans KR"/>
               </a:rPr>
               <a:t>클리어 조건을 분리</a:t>
             </a:r>
-            <a:endParaRPr lang="en-US" altLang="ko-KR" sz="1500" dirty="0">
+            <a:endParaRPr lang="en-US" altLang="ko-KR" sz="1600" b="1" dirty="0">
               <a:solidFill>
                 <a:schemeClr val="bg1"/>
               </a:solidFill>
               <a:latin typeface="Noto Sans KR"/>
               <a:ea typeface="Noto Sans KR"/>
-              <a:cs typeface="Noto Sans KR"/>
             </a:endParaRPr>
           </a:p>
           <a:p>
-            <a:pPr>
+            <a:pPr marL="285750" indent="-285750">
+              <a:buFontTx/>
+              <a:buChar char="-"/>
               <a:defRPr sz="1500" b="0" i="0">
                 <a:solidFill>
                   <a:srgbClr val="FFFFFF"/>
@@ -8258,56 +7379,80 @@
               </a:defRPr>
             </a:pPr>
             <a:r>
-              <a:rPr lang="en-US" altLang="ko-KR" sz="1500" dirty="0">
+              <a:rPr lang="ko-KR" altLang="en-US" sz="1600" b="1" dirty="0">
                 <a:solidFill>
                   <a:schemeClr val="bg1"/>
                 </a:solidFill>
                 <a:latin typeface="Noto Sans KR"/>
                 <a:ea typeface="Noto Sans KR"/>
-                <a:cs typeface="Noto Sans KR"/>
-              </a:rPr>
-              <a:t>- WORKFLOW.md </a:t>
-            </a:r>
-            <a:r>
-              <a:rPr lang="ko-KR" altLang="en-US" sz="1500" dirty="0">
-                <a:solidFill>
-                  <a:schemeClr val="bg1"/>
-                </a:solidFill>
-                <a:latin typeface="Noto Sans KR"/>
-                <a:ea typeface="Noto Sans KR"/>
-                <a:cs typeface="Noto Sans KR"/>
-              </a:rPr>
-              <a:t>등으로 </a:t>
-            </a:r>
-            <a:r>
-              <a:rPr lang="en-US" altLang="ko-KR" sz="1500" dirty="0">
-                <a:solidFill>
-                  <a:schemeClr val="bg1"/>
-                </a:solidFill>
-                <a:latin typeface="Noto Sans KR"/>
-                <a:ea typeface="Noto Sans KR"/>
-                <a:cs typeface="Noto Sans KR"/>
-              </a:rPr>
-              <a:t>AI </a:t>
-            </a:r>
-            <a:r>
-              <a:rPr lang="ko-KR" altLang="en-US" sz="1500" dirty="0">
-                <a:solidFill>
-                  <a:schemeClr val="bg1"/>
-                </a:solidFill>
-                <a:latin typeface="Noto Sans KR"/>
-                <a:ea typeface="Noto Sans KR"/>
-                <a:cs typeface="Noto Sans KR"/>
-              </a:rPr>
-              <a:t>협업 개발 기준을 유지</a:t>
-            </a:r>
-            <a:endParaRPr lang="en-US" sz="1500" i="0" dirty="0">
+              </a:rPr>
+              <a:t>코드 컨벤션 등 개발에 필요한 내용을 </a:t>
+            </a:r>
+            <a:endParaRPr lang="en-US" altLang="ko-KR" sz="1600" b="1" dirty="0">
               <a:solidFill>
                 <a:schemeClr val="bg1"/>
               </a:solidFill>
               <a:latin typeface="Noto Sans KR"/>
               <a:ea typeface="Noto Sans KR"/>
-              <a:cs typeface="Noto Sans KR"/>
+            </a:endParaRPr>
+          </a:p>
+          <a:p>
+            <a:pPr>
+              <a:defRPr sz="1500" b="0" i="0">
+                <a:solidFill>
+                  <a:srgbClr val="FFFFFF"/>
+                </a:solidFill>
+                <a:latin typeface="Noto Sans KR"/>
+                <a:ea typeface="Noto Sans KR"/>
+                <a:cs typeface="Noto Sans KR"/>
+              </a:defRPr>
+            </a:pPr>
+            <a:r>
+              <a:rPr lang="en-US" altLang="ko-KR" sz="1600" b="1" dirty="0">
+                <a:solidFill>
+                  <a:schemeClr val="bg1"/>
+                </a:solidFill>
+                <a:latin typeface="Noto Sans KR"/>
+                <a:ea typeface="Noto Sans KR"/>
+              </a:rPr>
+              <a:t>       MD </a:t>
+            </a:r>
+            <a:r>
+              <a:rPr lang="ko-KR" altLang="en-US" sz="1600" b="1" dirty="0">
+                <a:solidFill>
+                  <a:schemeClr val="bg1"/>
+                </a:solidFill>
+                <a:latin typeface="Noto Sans KR"/>
+                <a:ea typeface="Noto Sans KR"/>
+              </a:rPr>
+              <a:t>파일로 정리하여  </a:t>
+            </a:r>
+            <a:r>
+              <a:rPr lang="en-US" altLang="ko-KR" sz="1600" b="1" dirty="0">
+                <a:solidFill>
+                  <a:schemeClr val="bg1"/>
+                </a:solidFill>
+                <a:latin typeface="Noto Sans KR"/>
+                <a:ea typeface="Noto Sans KR"/>
+              </a:rPr>
+              <a:t>AI </a:t>
+            </a:r>
+            <a:r>
+              <a:rPr lang="ko-KR" altLang="en-US" sz="1600" b="1" dirty="0">
+                <a:solidFill>
+                  <a:schemeClr val="bg1"/>
+                </a:solidFill>
+                <a:latin typeface="Noto Sans KR"/>
+                <a:ea typeface="Noto Sans KR"/>
+              </a:rPr>
+              <a:t>협업 개발 기준을 유지</a:t>
+            </a:r>
+            <a:endParaRPr lang="en-US" sz="1600" b="1" dirty="0">
+              <a:solidFill>
+                <a:schemeClr val="bg1"/>
+              </a:solidFill>
+              <a:latin typeface="Noto Sans KR"/>
+              <a:ea typeface="Noto Sans KR"/>
             </a:endParaRPr>
           </a:p>
         </p:txBody>
@@ -8325,7 +7470,7 @@
 </p:sld>
 </file>
 
-<file path=ppt/slides/slide5.xml><?xml version="1.0" encoding="utf-8"?>
+<file path=ppt/slides/slide4.xml><?xml version="1.0" encoding="utf-8"?>
 <p:sld xmlns:a="http://schemas.openxmlformats.org/drawingml/2006/main" xmlns:r="http://schemas.openxmlformats.org/officeDocument/2006/relationships" xmlns:p="http://schemas.openxmlformats.org/presentationml/2006/main">
   <p:cSld>
     <p:bg>
@@ -8606,7 +7751,7 @@
               <a:t>0</a:t>
             </a:r>
             <a:r>
-              <a:rPr lang="en-US" sz="1050" b="0" i="0" dirty="0">
+              <a:rPr lang="en-US" sz="1050" dirty="0">
                 <a:solidFill>
                   <a:srgbClr val="5E6470"/>
                 </a:solidFill>
@@ -8614,7 +7759,7 @@
                 <a:ea typeface="Noto Sans KR"/>
                 <a:cs typeface="Noto Sans KR"/>
               </a:rPr>
-              <a:t>5</a:t>
+              <a:t>4</a:t>
             </a:r>
             <a:endParaRPr sz="1050" b="0" i="0" dirty="0">
               <a:solidFill>
@@ -8689,6 +7834,7 @@
                 <a:schemeClr val="accent6">
                   <a:lumMod val="40000"/>
                   <a:lumOff val="60000"/>
+                  <a:alpha val="60000"/>
                 </a:schemeClr>
               </a:gs>
               <a:gs pos="74000">
@@ -8699,8 +7845,8 @@
               </a:gs>
               <a:gs pos="83000">
                 <a:schemeClr val="accent1">
-                  <a:lumMod val="45000"/>
-                  <a:lumOff val="55000"/>
+                  <a:lumMod val="40000"/>
+                  <a:lumOff val="60000"/>
                 </a:schemeClr>
               </a:gs>
               <a:gs pos="100000">
@@ -9112,13 +8258,15 @@
           <a:gradFill flip="none" rotWithShape="1">
             <a:gsLst>
               <a:gs pos="0">
-                <a:srgbClr val="ECC78D"/>
+                <a:srgbClr val="ECC78D">
+                  <a:alpha val="60000"/>
+                </a:srgbClr>
               </a:gs>
               <a:gs pos="72000">
-                <a:srgbClr val="FF0000"/>
+                <a:srgbClr val="FF7C80"/>
               </a:gs>
               <a:gs pos="83000">
-                <a:srgbClr val="FF0000"/>
+                <a:srgbClr val="FF7C80"/>
               </a:gs>
               <a:gs pos="100000">
                 <a:schemeClr val="accent2">
@@ -9239,6 +8387,1198 @@
     <p:extLst>
       <p:ext uri="{BB962C8B-B14F-4D97-AF65-F5344CB8AC3E}">
         <p14:creationId xmlns:p14="http://schemas.microsoft.com/office/powerpoint/2010/main" val="383955553"/>
+      </p:ext>
+    </p:extLst>
+  </p:cSld>
+  <p:clrMapOvr>
+    <a:masterClrMapping/>
+  </p:clrMapOvr>
+</p:sld>
+</file>
+
+<file path=ppt/slides/slide5.xml><?xml version="1.0" encoding="utf-8"?>
+<p:sld xmlns:a="http://schemas.openxmlformats.org/drawingml/2006/main" xmlns:r="http://schemas.openxmlformats.org/officeDocument/2006/relationships" xmlns:p="http://schemas.openxmlformats.org/presentationml/2006/main">
+  <p:cSld>
+    <p:spTree>
+      <p:nvGrpSpPr>
+        <p:cNvPr id="1" name="">
+          <a:extLst>
+            <a:ext uri="{FF2B5EF4-FFF2-40B4-BE49-F238E27FC236}">
+              <a16:creationId xmlns:a16="http://schemas.microsoft.com/office/drawing/2014/main" id="{B836364F-2B91-865E-2608-2877B6A47725}"/>
+            </a:ext>
+          </a:extLst>
+        </p:cNvPr>
+        <p:cNvGrpSpPr/>
+        <p:nvPr/>
+      </p:nvGrpSpPr>
+      <p:grpSpPr>
+        <a:xfrm>
+          <a:off x="0" y="0"/>
+          <a:ext cx="0" cy="0"/>
+          <a:chOff x="0" y="0"/>
+          <a:chExt cx="0" cy="0"/>
+        </a:xfrm>
+      </p:grpSpPr>
+      <p:pic>
+        <p:nvPicPr>
+          <p:cNvPr id="33" name="그림 32">
+            <a:extLst>
+              <a:ext uri="{FF2B5EF4-FFF2-40B4-BE49-F238E27FC236}">
+                <a16:creationId xmlns:a16="http://schemas.microsoft.com/office/drawing/2014/main" id="{D4815B62-69DA-2A5C-0779-D9C7C21ADED7}"/>
+              </a:ext>
+            </a:extLst>
+          </p:cNvPr>
+          <p:cNvPicPr>
+            <a:picLocks noChangeAspect="1"/>
+          </p:cNvPicPr>
+          <p:nvPr/>
+        </p:nvPicPr>
+        <p:blipFill>
+          <a:blip r:embed="rId3">
+            <a:alphaModFix amt="90000"/>
+          </a:blip>
+          <a:stretch>
+            <a:fillRect/>
+          </a:stretch>
+        </p:blipFill>
+        <p:spPr>
+          <a:xfrm>
+            <a:off x="6478" y="-80363"/>
+            <a:ext cx="12185522" cy="6858000"/>
+          </a:xfrm>
+          <a:prstGeom prst="rect">
+            <a:avLst/>
+          </a:prstGeom>
+        </p:spPr>
+      </p:pic>
+      <p:sp>
+        <p:nvSpPr>
+          <p:cNvPr id="31" name="section-4">
+            <a:extLst>
+              <a:ext uri="{FF2B5EF4-FFF2-40B4-BE49-F238E27FC236}">
+                <a16:creationId xmlns:a16="http://schemas.microsoft.com/office/drawing/2014/main" id="{504ADDE1-5BAD-BF5F-0199-004F426373B4}"/>
+              </a:ext>
+            </a:extLst>
+          </p:cNvPr>
+          <p:cNvSpPr>
+            <a:spLocks noGrp="1"/>
+          </p:cNvSpPr>
+          <p:nvPr/>
+        </p:nvSpPr>
+        <p:spPr>
+          <a:xfrm>
+            <a:off x="514350" y="304114"/>
+            <a:ext cx="4095750" cy="228600"/>
+          </a:xfrm>
+          <a:prstGeom prst="rect">
+            <a:avLst/>
+          </a:prstGeom>
+          <a:noFill/>
+          <a:ln w="0">
+            <a:noFill/>
+            <a:prstDash val="solid"/>
+          </a:ln>
+        </p:spPr>
+        <p:txBody>
+          <a:bodyPr lIns="0" tIns="0" rIns="0" bIns="0" anchor="t">
+            <a:normAutofit/>
+          </a:bodyPr>
+          <a:lstStyle/>
+          <a:p>
+            <a:pPr algn="l">
+              <a:defRPr sz="1125" b="1" i="0">
+                <a:solidFill>
+                  <a:srgbClr val="3D8DFF"/>
+                </a:solidFill>
+                <a:latin typeface="Noto Sans KR"/>
+                <a:ea typeface="Noto Sans KR"/>
+                <a:cs typeface="Noto Sans KR"/>
+              </a:defRPr>
+            </a:pPr>
+            <a:r>
+              <a:rPr sz="1125" b="1" i="0">
+                <a:solidFill>
+                  <a:srgbClr val="3D8DFF"/>
+                </a:solidFill>
+                <a:latin typeface="Noto Sans KR"/>
+                <a:ea typeface="Noto Sans KR"/>
+                <a:cs typeface="Noto Sans KR"/>
+              </a:rPr>
+              <a:t>03 · CORE GAME SYSTEM</a:t>
+            </a:r>
+          </a:p>
+        </p:txBody>
+      </p:sp>
+      <p:sp>
+        <p:nvSpPr>
+          <p:cNvPr id="2" name="title-4">
+            <a:extLst>
+              <a:ext uri="{FF2B5EF4-FFF2-40B4-BE49-F238E27FC236}">
+                <a16:creationId xmlns:a16="http://schemas.microsoft.com/office/drawing/2014/main" id="{FD6586F4-DD66-FC29-EC2A-1755AD5BD23D}"/>
+              </a:ext>
+            </a:extLst>
+          </p:cNvPr>
+          <p:cNvSpPr>
+            <a:spLocks noGrp="1"/>
+          </p:cNvSpPr>
+          <p:nvPr/>
+        </p:nvSpPr>
+        <p:spPr>
+          <a:xfrm>
+            <a:off x="514350" y="589864"/>
+            <a:ext cx="11049000" cy="590550"/>
+          </a:xfrm>
+          <a:prstGeom prst="rect">
+            <a:avLst/>
+          </a:prstGeom>
+          <a:noFill/>
+          <a:ln w="0">
+            <a:noFill/>
+            <a:prstDash val="solid"/>
+          </a:ln>
+        </p:spPr>
+        <p:txBody>
+          <a:bodyPr lIns="0" tIns="0" rIns="0" bIns="0" anchor="t">
+            <a:normAutofit/>
+          </a:bodyPr>
+          <a:lstStyle/>
+          <a:p>
+            <a:pPr algn="l">
+              <a:defRPr sz="3225" b="1" i="0">
+                <a:solidFill>
+                  <a:srgbClr val="111318"/>
+                </a:solidFill>
+                <a:latin typeface="Noto Sans KR"/>
+                <a:ea typeface="Noto Sans KR"/>
+                <a:cs typeface="Noto Sans KR"/>
+              </a:defRPr>
+            </a:pPr>
+            <a:r>
+              <a:rPr lang="en-US" sz="3225" b="1" dirty="0">
+                <a:solidFill>
+                  <a:schemeClr val="accent6">
+                    <a:lumMod val="40000"/>
+                    <a:lumOff val="60000"/>
+                  </a:schemeClr>
+                </a:solidFill>
+                <a:latin typeface="Noto Sans KR"/>
+                <a:ea typeface="Noto Sans KR"/>
+                <a:cs typeface="Noto Sans KR"/>
+              </a:rPr>
+              <a:t>Core System</a:t>
+            </a:r>
+            <a:endParaRPr sz="3225" b="1" i="0" dirty="0">
+              <a:solidFill>
+                <a:schemeClr val="accent6">
+                  <a:lumMod val="40000"/>
+                  <a:lumOff val="60000"/>
+                </a:schemeClr>
+              </a:solidFill>
+              <a:latin typeface="Noto Sans KR"/>
+              <a:ea typeface="Noto Sans KR"/>
+              <a:cs typeface="Noto Sans KR"/>
+            </a:endParaRPr>
+          </a:p>
+        </p:txBody>
+      </p:sp>
+      <p:sp>
+        <p:nvSpPr>
+          <p:cNvPr id="3" name="title-rule-4">
+            <a:extLst>
+              <a:ext uri="{FF2B5EF4-FFF2-40B4-BE49-F238E27FC236}">
+                <a16:creationId xmlns:a16="http://schemas.microsoft.com/office/drawing/2014/main" id="{BF8FA074-E6B1-A465-3197-4524093F61D7}"/>
+              </a:ext>
+            </a:extLst>
+          </p:cNvPr>
+          <p:cNvSpPr>
+            <a:spLocks noGrp="1"/>
+          </p:cNvSpPr>
+          <p:nvPr/>
+        </p:nvSpPr>
+        <p:spPr>
+          <a:xfrm>
+            <a:off x="514350" y="1237564"/>
+            <a:ext cx="11163300" cy="0"/>
+          </a:xfrm>
+          <a:prstGeom prst="line">
+            <a:avLst/>
+          </a:prstGeom>
+          <a:noFill/>
+          <a:ln w="9525">
+            <a:solidFill>
+              <a:srgbClr val="B8BCC4"/>
+            </a:solidFill>
+            <a:prstDash val="solid"/>
+          </a:ln>
+        </p:spPr>
+        <p:txBody>
+          <a:bodyPr/>
+          <a:lstStyle/>
+          <a:p>
+            <a:endParaRPr lang="ko-KR" altLang="en-US"/>
+          </a:p>
+        </p:txBody>
+      </p:sp>
+      <p:sp>
+        <p:nvSpPr>
+          <p:cNvPr id="4" name="page-4">
+            <a:extLst>
+              <a:ext uri="{FF2B5EF4-FFF2-40B4-BE49-F238E27FC236}">
+                <a16:creationId xmlns:a16="http://schemas.microsoft.com/office/drawing/2014/main" id="{CC3B2ECE-AA9C-2CBF-F8A9-27B9C28228B6}"/>
+              </a:ext>
+            </a:extLst>
+          </p:cNvPr>
+          <p:cNvSpPr>
+            <a:spLocks noGrp="1"/>
+          </p:cNvSpPr>
+          <p:nvPr/>
+        </p:nvSpPr>
+        <p:spPr>
+          <a:xfrm>
+            <a:off x="11144250" y="6381064"/>
+            <a:ext cx="533400" cy="209550"/>
+          </a:xfrm>
+          <a:prstGeom prst="rect">
+            <a:avLst/>
+          </a:prstGeom>
+          <a:noFill/>
+          <a:ln w="0">
+            <a:noFill/>
+            <a:prstDash val="solid"/>
+          </a:ln>
+        </p:spPr>
+        <p:txBody>
+          <a:bodyPr lIns="0" tIns="0" rIns="0" bIns="0" anchor="t">
+            <a:normAutofit/>
+          </a:bodyPr>
+          <a:lstStyle/>
+          <a:p>
+            <a:pPr algn="r">
+              <a:defRPr sz="1050" b="0" i="0">
+                <a:solidFill>
+                  <a:srgbClr val="5E6470"/>
+                </a:solidFill>
+                <a:latin typeface="Noto Sans KR"/>
+                <a:ea typeface="Noto Sans KR"/>
+                <a:cs typeface="Noto Sans KR"/>
+              </a:defRPr>
+            </a:pPr>
+            <a:r>
+              <a:rPr sz="1050" b="0" i="0" dirty="0">
+                <a:solidFill>
+                  <a:srgbClr val="5E6470"/>
+                </a:solidFill>
+                <a:latin typeface="Noto Sans KR"/>
+                <a:ea typeface="Noto Sans KR"/>
+                <a:cs typeface="Noto Sans KR"/>
+              </a:rPr>
+              <a:t>0</a:t>
+            </a:r>
+            <a:r>
+              <a:rPr lang="en-US" sz="1050" dirty="0">
+                <a:solidFill>
+                  <a:srgbClr val="5E6470"/>
+                </a:solidFill>
+                <a:latin typeface="Noto Sans KR"/>
+                <a:ea typeface="Noto Sans KR"/>
+                <a:cs typeface="Noto Sans KR"/>
+              </a:rPr>
+              <a:t>4</a:t>
+            </a:r>
+            <a:endParaRPr sz="1050" b="0" i="0" dirty="0">
+              <a:solidFill>
+                <a:srgbClr val="5E6470"/>
+              </a:solidFill>
+              <a:latin typeface="Noto Sans KR"/>
+              <a:ea typeface="Noto Sans KR"/>
+              <a:cs typeface="Noto Sans KR"/>
+            </a:endParaRPr>
+          </a:p>
+        </p:txBody>
+      </p:sp>
+      <p:sp>
+        <p:nvSpPr>
+          <p:cNvPr id="37" name="사각형: 둥근 모서리 36">
+            <a:extLst>
+              <a:ext uri="{FF2B5EF4-FFF2-40B4-BE49-F238E27FC236}">
+                <a16:creationId xmlns:a16="http://schemas.microsoft.com/office/drawing/2014/main" id="{B65119EF-281E-6202-BEB5-ADFF4C1E3550}"/>
+              </a:ext>
+            </a:extLst>
+          </p:cNvPr>
+          <p:cNvSpPr/>
+          <p:nvPr/>
+        </p:nvSpPr>
+        <p:spPr>
+          <a:xfrm>
+            <a:off x="6096000" y="1675714"/>
+            <a:ext cx="5670884" cy="4648197"/>
+          </a:xfrm>
+          <a:prstGeom prst="roundRect">
+            <a:avLst/>
+          </a:prstGeom>
+          <a:gradFill>
+            <a:gsLst>
+              <a:gs pos="0">
+                <a:schemeClr val="accent6">
+                  <a:lumMod val="40000"/>
+                  <a:lumOff val="60000"/>
+                  <a:alpha val="60000"/>
+                </a:schemeClr>
+              </a:gs>
+              <a:gs pos="74000">
+                <a:schemeClr val="accent1">
+                  <a:lumMod val="45000"/>
+                  <a:lumOff val="55000"/>
+                </a:schemeClr>
+              </a:gs>
+              <a:gs pos="83000">
+                <a:schemeClr val="tx2">
+                  <a:lumMod val="25000"/>
+                  <a:lumOff val="75000"/>
+                </a:schemeClr>
+              </a:gs>
+              <a:gs pos="100000">
+                <a:schemeClr val="accent1">
+                  <a:lumMod val="30000"/>
+                  <a:lumOff val="70000"/>
+                </a:schemeClr>
+              </a:gs>
+            </a:gsLst>
+            <a:lin ang="5400000" scaled="1"/>
+          </a:gradFill>
+          <a:ln w="63500">
+            <a:noFill/>
+          </a:ln>
+        </p:spPr>
+        <p:style>
+          <a:lnRef idx="2">
+            <a:schemeClr val="accent1">
+              <a:shade val="15000"/>
+            </a:schemeClr>
+          </a:lnRef>
+          <a:fillRef idx="1">
+            <a:schemeClr val="accent1"/>
+          </a:fillRef>
+          <a:effectRef idx="0">
+            <a:schemeClr val="accent1"/>
+          </a:effectRef>
+          <a:fontRef idx="minor">
+            <a:schemeClr val="lt1"/>
+          </a:fontRef>
+        </p:style>
+        <p:txBody>
+          <a:bodyPr rtlCol="0" anchor="ctr"/>
+          <a:lstStyle/>
+          <a:p>
+            <a:pPr algn="ctr"/>
+            <a:endParaRPr lang="ko-KR" altLang="en-US"/>
+          </a:p>
+        </p:txBody>
+      </p:sp>
+      <p:sp>
+        <p:nvSpPr>
+          <p:cNvPr id="36" name="workflow-clarity-text">
+            <a:extLst>
+              <a:ext uri="{FF2B5EF4-FFF2-40B4-BE49-F238E27FC236}">
+                <a16:creationId xmlns:a16="http://schemas.microsoft.com/office/drawing/2014/main" id="{87D89A88-DC00-103E-C65C-127804CD5DC7}"/>
+              </a:ext>
+            </a:extLst>
+          </p:cNvPr>
+          <p:cNvSpPr>
+            <a:spLocks noGrp="1"/>
+          </p:cNvSpPr>
+          <p:nvPr/>
+        </p:nvSpPr>
+        <p:spPr>
+          <a:xfrm>
+            <a:off x="6330493" y="1850641"/>
+            <a:ext cx="5299576" cy="4152901"/>
+          </a:xfrm>
+          <a:prstGeom prst="rect">
+            <a:avLst/>
+          </a:prstGeom>
+          <a:noFill/>
+          <a:ln w="0">
+            <a:noFill/>
+            <a:prstDash val="solid"/>
+          </a:ln>
+        </p:spPr>
+        <p:txBody>
+          <a:bodyPr lIns="0" tIns="0" rIns="0" bIns="0" anchor="t">
+            <a:normAutofit fontScale="92500" lnSpcReduction="10000"/>
+          </a:bodyPr>
+          <a:lstStyle/>
+          <a:p>
+            <a:endParaRPr lang="en-US" altLang="ko-KR" sz="1600" dirty="0">
+              <a:solidFill>
+                <a:schemeClr val="bg1"/>
+              </a:solidFill>
+              <a:latin typeface="Noto Sans KR" panose="020B0200000000000000" pitchFamily="50" charset="-127"/>
+              <a:ea typeface="Noto Sans KR" panose="020B0200000000000000" pitchFamily="50" charset="-127"/>
+            </a:endParaRPr>
+          </a:p>
+          <a:p>
+            <a:pPr marL="285750" indent="-285750">
+              <a:buFontTx/>
+              <a:buChar char="-"/>
+            </a:pPr>
+            <a:r>
+              <a:rPr lang="ko-KR" altLang="ko-KR" sz="1600" b="1" dirty="0">
+                <a:solidFill>
+                  <a:schemeClr val="bg1"/>
+                </a:solidFill>
+                <a:latin typeface="Noto Sans KR" panose="020B0200000000000000" pitchFamily="50" charset="-127"/>
+                <a:ea typeface="Noto Sans KR" panose="020B0200000000000000" pitchFamily="50" charset="-127"/>
+              </a:rPr>
+              <a:t>01. </a:t>
+            </a:r>
+            <a:r>
+              <a:rPr lang="ko-KR" altLang="ko-KR" sz="1600" b="1" dirty="0" err="1">
+                <a:solidFill>
+                  <a:schemeClr val="bg1"/>
+                </a:solidFill>
+                <a:latin typeface="Noto Sans KR" panose="020B0200000000000000" pitchFamily="50" charset="-127"/>
+                <a:ea typeface="Noto Sans KR" panose="020B0200000000000000" pitchFamily="50" charset="-127"/>
+              </a:rPr>
+              <a:t>Scenario</a:t>
+            </a:r>
+            <a:r>
+              <a:rPr lang="ko-KR" altLang="ko-KR" sz="1600" b="1" dirty="0">
+                <a:solidFill>
+                  <a:schemeClr val="bg1"/>
+                </a:solidFill>
+                <a:latin typeface="Noto Sans KR" panose="020B0200000000000000" pitchFamily="50" charset="-127"/>
+                <a:ea typeface="Noto Sans KR" panose="020B0200000000000000" pitchFamily="50" charset="-127"/>
+              </a:rPr>
+              <a:t> &amp; </a:t>
+            </a:r>
+            <a:r>
+              <a:rPr lang="ko-KR" altLang="ko-KR" sz="1600" b="1" dirty="0" err="1">
+                <a:solidFill>
+                  <a:schemeClr val="bg1"/>
+                </a:solidFill>
+                <a:latin typeface="Noto Sans KR" panose="020B0200000000000000" pitchFamily="50" charset="-127"/>
+                <a:ea typeface="Noto Sans KR" panose="020B0200000000000000" pitchFamily="50" charset="-127"/>
+              </a:rPr>
+              <a:t>Clock</a:t>
+            </a:r>
+            <a:endParaRPr lang="en-US" altLang="ko-KR" sz="1600" b="1" dirty="0">
+              <a:solidFill>
+                <a:schemeClr val="bg1"/>
+              </a:solidFill>
+              <a:latin typeface="Noto Sans KR" panose="020B0200000000000000" pitchFamily="50" charset="-127"/>
+              <a:ea typeface="Noto Sans KR" panose="020B0200000000000000" pitchFamily="50" charset="-127"/>
+            </a:endParaRPr>
+          </a:p>
+          <a:p>
+            <a:pPr marL="742950" lvl="1" indent="-285750">
+              <a:buFontTx/>
+              <a:buChar char="-"/>
+            </a:pPr>
+            <a:r>
+              <a:rPr lang="ko-KR" altLang="ko-KR" sz="1600" b="1" dirty="0" err="1">
+                <a:solidFill>
+                  <a:schemeClr val="bg1"/>
+                </a:solidFill>
+                <a:latin typeface="Noto Sans KR" panose="020B0200000000000000" pitchFamily="50" charset="-127"/>
+                <a:ea typeface="Noto Sans KR" panose="020B0200000000000000" pitchFamily="50" charset="-127"/>
+              </a:rPr>
+              <a:t>Day</a:t>
+            </a:r>
+            <a:r>
+              <a:rPr lang="ko-KR" altLang="ko-KR" sz="1600" b="1" dirty="0">
+                <a:solidFill>
+                  <a:schemeClr val="bg1"/>
+                </a:solidFill>
+                <a:latin typeface="Noto Sans KR" panose="020B0200000000000000" pitchFamily="50" charset="-127"/>
+                <a:ea typeface="Noto Sans KR" panose="020B0200000000000000" pitchFamily="50" charset="-127"/>
+              </a:rPr>
+              <a:t> 1~3 진행</a:t>
+            </a:r>
+            <a:r>
+              <a:rPr lang="en-US" altLang="ko-KR" sz="1600" b="1" dirty="0">
+                <a:solidFill>
+                  <a:schemeClr val="bg1"/>
+                </a:solidFill>
+                <a:latin typeface="Noto Sans KR" panose="020B0200000000000000" pitchFamily="50" charset="-127"/>
+                <a:ea typeface="Noto Sans KR" panose="020B0200000000000000" pitchFamily="50" charset="-127"/>
+              </a:rPr>
+              <a:t> </a:t>
+            </a:r>
+            <a:r>
+              <a:rPr lang="ko-KR" altLang="en-US" sz="1600" b="1" dirty="0">
+                <a:solidFill>
+                  <a:schemeClr val="bg1"/>
+                </a:solidFill>
+                <a:latin typeface="Noto Sans KR" panose="020B0200000000000000" pitchFamily="50" charset="-127"/>
+                <a:ea typeface="Noto Sans KR" panose="020B0200000000000000" pitchFamily="50" charset="-127"/>
+              </a:rPr>
+              <a:t>및</a:t>
+            </a:r>
+            <a:r>
+              <a:rPr lang="en-US" altLang="ko-KR" sz="1600" b="1" dirty="0">
+                <a:solidFill>
+                  <a:schemeClr val="bg1"/>
+                </a:solidFill>
+                <a:latin typeface="Noto Sans KR" panose="020B0200000000000000" pitchFamily="50" charset="-127"/>
+                <a:ea typeface="Noto Sans KR" panose="020B0200000000000000" pitchFamily="50" charset="-127"/>
+              </a:rPr>
+              <a:t> Scenario </a:t>
+            </a:r>
+            <a:r>
+              <a:rPr lang="ko-KR" altLang="en-US" sz="1600" b="1" dirty="0">
+                <a:solidFill>
+                  <a:schemeClr val="bg1"/>
+                </a:solidFill>
+                <a:latin typeface="Noto Sans KR" panose="020B0200000000000000" pitchFamily="50" charset="-127"/>
+                <a:ea typeface="Noto Sans KR" panose="020B0200000000000000" pitchFamily="50" charset="-127"/>
+              </a:rPr>
+              <a:t>내</a:t>
+            </a:r>
+            <a:r>
+              <a:rPr lang="ko-KR" altLang="ko-KR" sz="1600" b="1" dirty="0">
+                <a:solidFill>
+                  <a:schemeClr val="bg1"/>
+                </a:solidFill>
+                <a:latin typeface="Noto Sans KR" panose="020B0200000000000000" pitchFamily="50" charset="-127"/>
+                <a:ea typeface="Noto Sans KR" panose="020B0200000000000000" pitchFamily="50" charset="-127"/>
+              </a:rPr>
+              <a:t> 시간 </a:t>
+            </a:r>
+            <a:r>
+              <a:rPr lang="ko-KR" altLang="en-US" sz="1600" b="1" dirty="0">
+                <a:solidFill>
+                  <a:schemeClr val="bg1"/>
+                </a:solidFill>
+                <a:latin typeface="Noto Sans KR" panose="020B0200000000000000" pitchFamily="50" charset="-127"/>
+                <a:ea typeface="Noto Sans KR" panose="020B0200000000000000" pitchFamily="50" charset="-127"/>
+              </a:rPr>
+              <a:t>관리</a:t>
+            </a:r>
+            <a:endParaRPr lang="en-US" altLang="ko-KR" sz="1600" b="1" dirty="0">
+              <a:solidFill>
+                <a:schemeClr val="bg1"/>
+              </a:solidFill>
+              <a:latin typeface="Noto Sans KR" panose="020B0200000000000000" pitchFamily="50" charset="-127"/>
+              <a:ea typeface="Noto Sans KR" panose="020B0200000000000000" pitchFamily="50" charset="-127"/>
+            </a:endParaRPr>
+          </a:p>
+          <a:p>
+            <a:pPr marL="742950" lvl="1" indent="-285750">
+              <a:buFontTx/>
+              <a:buChar char="-"/>
+            </a:pPr>
+            <a:r>
+              <a:rPr lang="ko-KR" altLang="ko-KR" sz="1600" b="1" dirty="0">
+                <a:solidFill>
+                  <a:schemeClr val="bg1"/>
+                </a:solidFill>
+                <a:latin typeface="Noto Sans KR" panose="020B0200000000000000" pitchFamily="50" charset="-127"/>
+                <a:ea typeface="Noto Sans KR" panose="020B0200000000000000" pitchFamily="50" charset="-127"/>
+              </a:rPr>
+              <a:t>시나리오 전환과 재시작을 관리</a:t>
+            </a:r>
+            <a:endParaRPr lang="en-US" altLang="ko-KR" sz="1600" b="1" dirty="0">
+              <a:solidFill>
+                <a:schemeClr val="bg1"/>
+              </a:solidFill>
+              <a:latin typeface="Noto Sans KR" panose="020B0200000000000000" pitchFamily="50" charset="-127"/>
+              <a:ea typeface="Noto Sans KR" panose="020B0200000000000000" pitchFamily="50" charset="-127"/>
+            </a:endParaRPr>
+          </a:p>
+          <a:p>
+            <a:pPr marL="742950" lvl="1" indent="-285750">
+              <a:buFontTx/>
+              <a:buChar char="-"/>
+            </a:pPr>
+            <a:endParaRPr lang="ko-KR" altLang="ko-KR" sz="1600" b="1" dirty="0">
+              <a:solidFill>
+                <a:schemeClr val="bg1"/>
+              </a:solidFill>
+              <a:latin typeface="Noto Sans KR" panose="020B0200000000000000" pitchFamily="50" charset="-127"/>
+              <a:ea typeface="Noto Sans KR" panose="020B0200000000000000" pitchFamily="50" charset="-127"/>
+            </a:endParaRPr>
+          </a:p>
+          <a:p>
+            <a:pPr marL="285750" indent="-285750">
+              <a:buFontTx/>
+              <a:buChar char="-"/>
+            </a:pPr>
+            <a:r>
+              <a:rPr lang="ko-KR" altLang="ko-KR" sz="1600" b="1" dirty="0">
+                <a:solidFill>
+                  <a:schemeClr val="bg1"/>
+                </a:solidFill>
+                <a:latin typeface="Noto Sans KR" panose="020B0200000000000000" pitchFamily="50" charset="-127"/>
+                <a:ea typeface="Noto Sans KR" panose="020B0200000000000000" pitchFamily="50" charset="-127"/>
+              </a:rPr>
+              <a:t>02. </a:t>
+            </a:r>
+            <a:r>
+              <a:rPr lang="ko-KR" altLang="ko-KR" sz="1600" b="1" dirty="0" err="1">
+                <a:solidFill>
+                  <a:schemeClr val="bg1"/>
+                </a:solidFill>
+                <a:latin typeface="Noto Sans KR" panose="020B0200000000000000" pitchFamily="50" charset="-127"/>
+                <a:ea typeface="Noto Sans KR" panose="020B0200000000000000" pitchFamily="50" charset="-127"/>
+              </a:rPr>
+              <a:t>Interaction</a:t>
+            </a:r>
+            <a:r>
+              <a:rPr lang="ko-KR" altLang="ko-KR" sz="1600" b="1" dirty="0">
+                <a:solidFill>
+                  <a:schemeClr val="bg1"/>
+                </a:solidFill>
+                <a:latin typeface="Noto Sans KR" panose="020B0200000000000000" pitchFamily="50" charset="-127"/>
+                <a:ea typeface="Noto Sans KR" panose="020B0200000000000000" pitchFamily="50" charset="-127"/>
+              </a:rPr>
+              <a:t> &amp; </a:t>
+            </a:r>
+            <a:r>
+              <a:rPr lang="ko-KR" altLang="ko-KR" sz="1600" b="1" dirty="0" err="1">
+                <a:solidFill>
+                  <a:schemeClr val="bg1"/>
+                </a:solidFill>
+                <a:latin typeface="Noto Sans KR" panose="020B0200000000000000" pitchFamily="50" charset="-127"/>
+                <a:ea typeface="Noto Sans KR" panose="020B0200000000000000" pitchFamily="50" charset="-127"/>
+              </a:rPr>
+              <a:t>Objectives</a:t>
+            </a:r>
+            <a:endParaRPr lang="en-US" altLang="ko-KR" sz="1600" b="1" dirty="0">
+              <a:solidFill>
+                <a:schemeClr val="bg1"/>
+              </a:solidFill>
+              <a:latin typeface="Noto Sans KR" panose="020B0200000000000000" pitchFamily="50" charset="-127"/>
+              <a:ea typeface="Noto Sans KR" panose="020B0200000000000000" pitchFamily="50" charset="-127"/>
+            </a:endParaRPr>
+          </a:p>
+          <a:p>
+            <a:pPr marL="742950" lvl="1" indent="-285750">
+              <a:buFontTx/>
+              <a:buChar char="-"/>
+            </a:pPr>
+            <a:r>
+              <a:rPr lang="ko-KR" altLang="ko-KR" sz="1600" b="1" dirty="0" err="1">
+                <a:solidFill>
+                  <a:schemeClr val="bg1"/>
+                </a:solidFill>
+                <a:latin typeface="Noto Sans KR" panose="020B0200000000000000" pitchFamily="50" charset="-127"/>
+                <a:ea typeface="Noto Sans KR" panose="020B0200000000000000" pitchFamily="50" charset="-127"/>
+              </a:rPr>
+              <a:t>E</a:t>
+            </a:r>
+            <a:r>
+              <a:rPr lang="ko-KR" altLang="ko-KR" sz="1600" b="1" dirty="0">
+                <a:solidFill>
+                  <a:schemeClr val="bg1"/>
+                </a:solidFill>
+                <a:latin typeface="Noto Sans KR" panose="020B0200000000000000" pitchFamily="50" charset="-127"/>
+                <a:ea typeface="Noto Sans KR" panose="020B0200000000000000" pitchFamily="50" charset="-127"/>
+              </a:rPr>
+              <a:t> 키 하나로 스캔, 회수, 설치, 소등 등 </a:t>
+            </a:r>
+            <a:endParaRPr lang="en-US" altLang="ko-KR" sz="1600" b="1" dirty="0">
+              <a:solidFill>
+                <a:schemeClr val="bg1"/>
+              </a:solidFill>
+              <a:latin typeface="Noto Sans KR" panose="020B0200000000000000" pitchFamily="50" charset="-127"/>
+              <a:ea typeface="Noto Sans KR" panose="020B0200000000000000" pitchFamily="50" charset="-127"/>
+            </a:endParaRPr>
+          </a:p>
+          <a:p>
+            <a:pPr lvl="1"/>
+            <a:r>
+              <a:rPr lang="en-US" altLang="ko-KR" sz="1600" b="1" dirty="0">
+                <a:solidFill>
+                  <a:schemeClr val="bg1"/>
+                </a:solidFill>
+                <a:latin typeface="Noto Sans KR" panose="020B0200000000000000" pitchFamily="50" charset="-127"/>
+                <a:ea typeface="Noto Sans KR" panose="020B0200000000000000" pitchFamily="50" charset="-127"/>
+              </a:rPr>
+              <a:t>      </a:t>
+            </a:r>
+            <a:r>
+              <a:rPr lang="ko-KR" altLang="ko-KR" sz="1600" b="1" dirty="0">
+                <a:solidFill>
+                  <a:schemeClr val="bg1"/>
+                </a:solidFill>
+                <a:latin typeface="Noto Sans KR" panose="020B0200000000000000" pitchFamily="50" charset="-127"/>
+                <a:ea typeface="Noto Sans KR" panose="020B0200000000000000" pitchFamily="50" charset="-127"/>
+              </a:rPr>
+              <a:t>모든 상호작용을 처리하고 목표 진행도를 갱신</a:t>
+            </a:r>
+            <a:endParaRPr lang="en-US" altLang="ko-KR" sz="1600" b="1" dirty="0">
+              <a:solidFill>
+                <a:schemeClr val="bg1"/>
+              </a:solidFill>
+              <a:latin typeface="Noto Sans KR" panose="020B0200000000000000" pitchFamily="50" charset="-127"/>
+              <a:ea typeface="Noto Sans KR" panose="020B0200000000000000" pitchFamily="50" charset="-127"/>
+            </a:endParaRPr>
+          </a:p>
+          <a:p>
+            <a:pPr lvl="1"/>
+            <a:endParaRPr lang="ko-KR" altLang="ko-KR" sz="1600" b="1" dirty="0">
+              <a:solidFill>
+                <a:schemeClr val="bg1"/>
+              </a:solidFill>
+              <a:latin typeface="Noto Sans KR" panose="020B0200000000000000" pitchFamily="50" charset="-127"/>
+              <a:ea typeface="Noto Sans KR" panose="020B0200000000000000" pitchFamily="50" charset="-127"/>
+            </a:endParaRPr>
+          </a:p>
+          <a:p>
+            <a:pPr marL="285750" indent="-285750">
+              <a:buFontTx/>
+              <a:buChar char="-"/>
+            </a:pPr>
+            <a:r>
+              <a:rPr lang="ko-KR" altLang="ko-KR" sz="1600" b="1" dirty="0">
+                <a:solidFill>
+                  <a:schemeClr val="bg1"/>
+                </a:solidFill>
+                <a:latin typeface="Noto Sans KR" panose="020B0200000000000000" pitchFamily="50" charset="-127"/>
+                <a:ea typeface="Noto Sans KR" panose="020B0200000000000000" pitchFamily="50" charset="-127"/>
+              </a:rPr>
+              <a:t>03. </a:t>
+            </a:r>
+            <a:r>
+              <a:rPr lang="ko-KR" altLang="ko-KR" sz="1600" b="1" dirty="0" err="1">
+                <a:solidFill>
+                  <a:schemeClr val="bg1"/>
+                </a:solidFill>
+                <a:latin typeface="Noto Sans KR" panose="020B0200000000000000" pitchFamily="50" charset="-127"/>
+                <a:ea typeface="Noto Sans KR" panose="020B0200000000000000" pitchFamily="50" charset="-127"/>
+              </a:rPr>
+              <a:t>Notebook</a:t>
+            </a:r>
+            <a:r>
+              <a:rPr lang="ko-KR" altLang="ko-KR" sz="1600" b="1" dirty="0">
+                <a:solidFill>
+                  <a:schemeClr val="bg1"/>
+                </a:solidFill>
+                <a:latin typeface="Noto Sans KR" panose="020B0200000000000000" pitchFamily="50" charset="-127"/>
+                <a:ea typeface="Noto Sans KR" panose="020B0200000000000000" pitchFamily="50" charset="-127"/>
+              </a:rPr>
+              <a:t> &amp; HUD</a:t>
+            </a:r>
+            <a:endParaRPr lang="en-US" altLang="ko-KR" sz="1600" b="1" dirty="0">
+              <a:solidFill>
+                <a:schemeClr val="bg1"/>
+              </a:solidFill>
+              <a:latin typeface="Noto Sans KR" panose="020B0200000000000000" pitchFamily="50" charset="-127"/>
+              <a:ea typeface="Noto Sans KR" panose="020B0200000000000000" pitchFamily="50" charset="-127"/>
+            </a:endParaRPr>
+          </a:p>
+          <a:p>
+            <a:pPr marL="742950" lvl="1" indent="-285750">
+              <a:buFontTx/>
+              <a:buChar char="-"/>
+            </a:pPr>
+            <a:r>
+              <a:rPr lang="ko-KR" altLang="ko-KR" sz="1600" b="1" dirty="0" err="1">
+                <a:solidFill>
+                  <a:schemeClr val="bg1"/>
+                </a:solidFill>
+                <a:latin typeface="Noto Sans KR" panose="020B0200000000000000" pitchFamily="50" charset="-127"/>
+                <a:ea typeface="Noto Sans KR" panose="020B0200000000000000" pitchFamily="50" charset="-127"/>
+              </a:rPr>
+              <a:t>Tab</a:t>
+            </a:r>
+            <a:r>
+              <a:rPr lang="ko-KR" altLang="ko-KR" sz="1600" b="1" dirty="0">
+                <a:solidFill>
+                  <a:schemeClr val="bg1"/>
+                </a:solidFill>
+                <a:latin typeface="Noto Sans KR" panose="020B0200000000000000" pitchFamily="50" charset="-127"/>
+                <a:ea typeface="Noto Sans KR" panose="020B0200000000000000" pitchFamily="50" charset="-127"/>
+              </a:rPr>
+              <a:t> 수첩, 목표 UI, 시계, 배터리, 레이더를 통해 </a:t>
+            </a:r>
+            <a:endParaRPr lang="en-US" altLang="ko-KR" sz="1600" b="1" dirty="0">
+              <a:solidFill>
+                <a:schemeClr val="bg1"/>
+              </a:solidFill>
+              <a:latin typeface="Noto Sans KR" panose="020B0200000000000000" pitchFamily="50" charset="-127"/>
+              <a:ea typeface="Noto Sans KR" panose="020B0200000000000000" pitchFamily="50" charset="-127"/>
+            </a:endParaRPr>
+          </a:p>
+          <a:p>
+            <a:pPr lvl="1"/>
+            <a:r>
+              <a:rPr lang="en-US" altLang="ko-KR" sz="1600" b="1" dirty="0">
+                <a:solidFill>
+                  <a:schemeClr val="bg1"/>
+                </a:solidFill>
+                <a:latin typeface="Noto Sans KR" panose="020B0200000000000000" pitchFamily="50" charset="-127"/>
+                <a:ea typeface="Noto Sans KR" panose="020B0200000000000000" pitchFamily="50" charset="-127"/>
+              </a:rPr>
+              <a:t>      </a:t>
+            </a:r>
+            <a:r>
+              <a:rPr lang="ko-KR" altLang="ko-KR" sz="1600" b="1" dirty="0">
+                <a:solidFill>
+                  <a:schemeClr val="bg1"/>
+                </a:solidFill>
+                <a:latin typeface="Noto Sans KR" panose="020B0200000000000000" pitchFamily="50" charset="-127"/>
+                <a:ea typeface="Noto Sans KR" panose="020B0200000000000000" pitchFamily="50" charset="-127"/>
+              </a:rPr>
+              <a:t>필요한 정보만 화면에 전달</a:t>
+            </a:r>
+            <a:endParaRPr lang="en-US" altLang="ko-KR" sz="1600" b="1" dirty="0">
+              <a:solidFill>
+                <a:schemeClr val="bg1"/>
+              </a:solidFill>
+              <a:latin typeface="Noto Sans KR" panose="020B0200000000000000" pitchFamily="50" charset="-127"/>
+              <a:ea typeface="Noto Sans KR" panose="020B0200000000000000" pitchFamily="50" charset="-127"/>
+            </a:endParaRPr>
+          </a:p>
+          <a:p>
+            <a:pPr lvl="1"/>
+            <a:endParaRPr lang="ko-KR" altLang="ko-KR" sz="1600" b="1" dirty="0">
+              <a:solidFill>
+                <a:schemeClr val="bg1"/>
+              </a:solidFill>
+              <a:latin typeface="Noto Sans KR" panose="020B0200000000000000" pitchFamily="50" charset="-127"/>
+              <a:ea typeface="Noto Sans KR" panose="020B0200000000000000" pitchFamily="50" charset="-127"/>
+            </a:endParaRPr>
+          </a:p>
+          <a:p>
+            <a:pPr marL="285750" indent="-285750">
+              <a:buFontTx/>
+              <a:buChar char="-"/>
+            </a:pPr>
+            <a:r>
+              <a:rPr lang="ko-KR" altLang="ko-KR" sz="1600" b="1" dirty="0">
+                <a:solidFill>
+                  <a:schemeClr val="bg1"/>
+                </a:solidFill>
+                <a:latin typeface="Noto Sans KR" panose="020B0200000000000000" pitchFamily="50" charset="-127"/>
+                <a:ea typeface="Noto Sans KR" panose="020B0200000000000000" pitchFamily="50" charset="-127"/>
+              </a:rPr>
+              <a:t>04. </a:t>
+            </a:r>
+            <a:r>
+              <a:rPr lang="ko-KR" altLang="ko-KR" sz="1600" b="1" dirty="0" err="1">
+                <a:solidFill>
+                  <a:schemeClr val="bg1"/>
+                </a:solidFill>
+                <a:latin typeface="Noto Sans KR" panose="020B0200000000000000" pitchFamily="50" charset="-127"/>
+                <a:ea typeface="Noto Sans KR" panose="020B0200000000000000" pitchFamily="50" charset="-127"/>
+              </a:rPr>
+              <a:t>Player</a:t>
+            </a:r>
+            <a:r>
+              <a:rPr lang="ko-KR" altLang="ko-KR" sz="1600" b="1" dirty="0">
+                <a:solidFill>
+                  <a:schemeClr val="bg1"/>
+                </a:solidFill>
+                <a:latin typeface="Noto Sans KR" panose="020B0200000000000000" pitchFamily="50" charset="-127"/>
+                <a:ea typeface="Noto Sans KR" panose="020B0200000000000000" pitchFamily="50" charset="-127"/>
+              </a:rPr>
+              <a:t> </a:t>
+            </a:r>
+            <a:r>
+              <a:rPr lang="ko-KR" altLang="ko-KR" sz="1600" b="1" dirty="0" err="1">
+                <a:solidFill>
+                  <a:schemeClr val="bg1"/>
+                </a:solidFill>
+                <a:latin typeface="Noto Sans KR" panose="020B0200000000000000" pitchFamily="50" charset="-127"/>
+                <a:ea typeface="Noto Sans KR" panose="020B0200000000000000" pitchFamily="50" charset="-127"/>
+              </a:rPr>
+              <a:t>Feedback</a:t>
+            </a:r>
+            <a:endParaRPr lang="en-US" altLang="ko-KR" sz="1600" b="1" dirty="0">
+              <a:solidFill>
+                <a:schemeClr val="bg1"/>
+              </a:solidFill>
+              <a:latin typeface="Noto Sans KR" panose="020B0200000000000000" pitchFamily="50" charset="-127"/>
+              <a:ea typeface="Noto Sans KR" panose="020B0200000000000000" pitchFamily="50" charset="-127"/>
+            </a:endParaRPr>
+          </a:p>
+          <a:p>
+            <a:pPr marL="742950" lvl="1" indent="-285750">
+              <a:buFontTx/>
+              <a:buChar char="-"/>
+            </a:pPr>
+            <a:r>
+              <a:rPr lang="ko-KR" altLang="ko-KR" sz="1600" b="1" dirty="0" err="1">
+                <a:solidFill>
+                  <a:schemeClr val="bg1"/>
+                </a:solidFill>
+                <a:latin typeface="Noto Sans KR" panose="020B0200000000000000" pitchFamily="50" charset="-127"/>
+                <a:ea typeface="Noto Sans KR" panose="020B0200000000000000" pitchFamily="50" charset="-127"/>
+              </a:rPr>
+              <a:t>Headbob</a:t>
+            </a:r>
+            <a:r>
+              <a:rPr lang="ko-KR" altLang="ko-KR" sz="1600" b="1" dirty="0">
+                <a:solidFill>
+                  <a:schemeClr val="bg1"/>
+                </a:solidFill>
+                <a:latin typeface="Noto Sans KR" panose="020B0200000000000000" pitchFamily="50" charset="-127"/>
+                <a:ea typeface="Noto Sans KR" panose="020B0200000000000000" pitchFamily="50" charset="-127"/>
+              </a:rPr>
+              <a:t>, 카메라 낙하, </a:t>
+            </a:r>
+            <a:r>
+              <a:rPr lang="ko-KR" altLang="ko-KR" sz="1600" b="1" dirty="0" err="1">
+                <a:solidFill>
+                  <a:schemeClr val="bg1"/>
+                </a:solidFill>
+                <a:latin typeface="Noto Sans KR" panose="020B0200000000000000" pitchFamily="50" charset="-127"/>
+                <a:ea typeface="Noto Sans KR" panose="020B0200000000000000" pitchFamily="50" charset="-127"/>
+              </a:rPr>
+              <a:t>페이드</a:t>
+            </a:r>
+            <a:r>
+              <a:rPr lang="ko-KR" altLang="ko-KR" sz="1600" b="1" dirty="0">
+                <a:solidFill>
+                  <a:schemeClr val="bg1"/>
+                </a:solidFill>
+                <a:latin typeface="Noto Sans KR" panose="020B0200000000000000" pitchFamily="50" charset="-127"/>
+                <a:ea typeface="Noto Sans KR" panose="020B0200000000000000" pitchFamily="50" charset="-127"/>
+              </a:rPr>
+              <a:t>, </a:t>
+            </a:r>
+            <a:r>
+              <a:rPr lang="ko-KR" altLang="ko-KR" sz="1600" b="1" dirty="0" err="1">
+                <a:solidFill>
+                  <a:schemeClr val="bg1"/>
+                </a:solidFill>
+                <a:latin typeface="Noto Sans KR" panose="020B0200000000000000" pitchFamily="50" charset="-127"/>
+                <a:ea typeface="Noto Sans KR" panose="020B0200000000000000" pitchFamily="50" charset="-127"/>
+              </a:rPr>
+              <a:t>Day</a:t>
+            </a:r>
+            <a:r>
+              <a:rPr lang="ko-KR" altLang="ko-KR" sz="1600" b="1" dirty="0">
+                <a:solidFill>
+                  <a:schemeClr val="bg1"/>
+                </a:solidFill>
+                <a:latin typeface="Noto Sans KR" panose="020B0200000000000000" pitchFamily="50" charset="-127"/>
+                <a:ea typeface="Noto Sans KR" panose="020B0200000000000000" pitchFamily="50" charset="-127"/>
+              </a:rPr>
+              <a:t> 카드로 </a:t>
+            </a:r>
+            <a:endParaRPr lang="en-US" altLang="ko-KR" sz="1600" b="1" dirty="0">
+              <a:solidFill>
+                <a:schemeClr val="bg1"/>
+              </a:solidFill>
+              <a:latin typeface="Noto Sans KR" panose="020B0200000000000000" pitchFamily="50" charset="-127"/>
+              <a:ea typeface="Noto Sans KR" panose="020B0200000000000000" pitchFamily="50" charset="-127"/>
+            </a:endParaRPr>
+          </a:p>
+          <a:p>
+            <a:pPr lvl="1"/>
+            <a:r>
+              <a:rPr lang="en-US" altLang="ko-KR" sz="1600" b="1" dirty="0">
+                <a:solidFill>
+                  <a:schemeClr val="bg1"/>
+                </a:solidFill>
+                <a:latin typeface="Noto Sans KR" panose="020B0200000000000000" pitchFamily="50" charset="-127"/>
+                <a:ea typeface="Noto Sans KR" panose="020B0200000000000000" pitchFamily="50" charset="-127"/>
+              </a:rPr>
+              <a:t>      </a:t>
+            </a:r>
+            <a:r>
+              <a:rPr lang="ko-KR" altLang="ko-KR" sz="1600" b="1" dirty="0">
+                <a:solidFill>
+                  <a:schemeClr val="bg1"/>
+                </a:solidFill>
+                <a:latin typeface="Noto Sans KR" panose="020B0200000000000000" pitchFamily="50" charset="-127"/>
+                <a:ea typeface="Noto Sans KR" panose="020B0200000000000000" pitchFamily="50" charset="-127"/>
+              </a:rPr>
+              <a:t>플레이어의 움직임과 실패/전환 연출을 강화</a:t>
+            </a:r>
+            <a:endParaRPr lang="en-US" altLang="ko-KR" sz="1600" b="1" dirty="0">
+              <a:solidFill>
+                <a:schemeClr val="bg1"/>
+              </a:solidFill>
+              <a:latin typeface="Noto Sans KR" panose="020B0200000000000000" pitchFamily="50" charset="-127"/>
+              <a:ea typeface="Noto Sans KR" panose="020B0200000000000000" pitchFamily="50" charset="-127"/>
+            </a:endParaRPr>
+          </a:p>
+          <a:p>
+            <a:pPr lvl="1"/>
+            <a:endParaRPr lang="ko-KR" altLang="ko-KR" sz="1600" b="1" dirty="0">
+              <a:solidFill>
+                <a:schemeClr val="bg1"/>
+              </a:solidFill>
+              <a:latin typeface="Noto Sans KR" panose="020B0200000000000000" pitchFamily="50" charset="-127"/>
+              <a:ea typeface="Noto Sans KR" panose="020B0200000000000000" pitchFamily="50" charset="-127"/>
+            </a:endParaRPr>
+          </a:p>
+          <a:p>
+            <a:pPr marL="285750" indent="-285750">
+              <a:buFontTx/>
+              <a:buChar char="-"/>
+            </a:pPr>
+            <a:r>
+              <a:rPr lang="ko-KR" altLang="ko-KR" sz="1600" b="1" dirty="0">
+                <a:solidFill>
+                  <a:schemeClr val="bg1"/>
+                </a:solidFill>
+                <a:latin typeface="Noto Sans KR" panose="020B0200000000000000" pitchFamily="50" charset="-127"/>
+                <a:ea typeface="Noto Sans KR" panose="020B0200000000000000" pitchFamily="50" charset="-127"/>
+              </a:rPr>
+              <a:t>05. </a:t>
+            </a:r>
+            <a:r>
+              <a:rPr lang="ko-KR" altLang="ko-KR" sz="1600" b="1" dirty="0" err="1">
+                <a:solidFill>
+                  <a:schemeClr val="bg1"/>
+                </a:solidFill>
+                <a:latin typeface="Noto Sans KR" panose="020B0200000000000000" pitchFamily="50" charset="-127"/>
+                <a:ea typeface="Noto Sans KR" panose="020B0200000000000000" pitchFamily="50" charset="-127"/>
+              </a:rPr>
+              <a:t>Sound</a:t>
+            </a:r>
+            <a:r>
+              <a:rPr lang="ko-KR" altLang="ko-KR" sz="1600" b="1" dirty="0">
+                <a:solidFill>
+                  <a:schemeClr val="bg1"/>
+                </a:solidFill>
+                <a:latin typeface="Noto Sans KR" panose="020B0200000000000000" pitchFamily="50" charset="-127"/>
+                <a:ea typeface="Noto Sans KR" panose="020B0200000000000000" pitchFamily="50" charset="-127"/>
+              </a:rPr>
+              <a:t> </a:t>
+            </a:r>
+            <a:r>
+              <a:rPr lang="en-US" altLang="ko-KR" sz="1600" b="1" dirty="0">
+                <a:solidFill>
+                  <a:schemeClr val="bg1"/>
+                </a:solidFill>
+                <a:latin typeface="Noto Sans KR" panose="020B0200000000000000" pitchFamily="50" charset="-127"/>
+                <a:ea typeface="Noto Sans KR" panose="020B0200000000000000" pitchFamily="50" charset="-127"/>
+              </a:rPr>
+              <a:t>&amp; Video </a:t>
+            </a:r>
+            <a:r>
+              <a:rPr lang="ko-KR" altLang="ko-KR" sz="1600" b="1" dirty="0">
+                <a:solidFill>
+                  <a:schemeClr val="bg1"/>
+                </a:solidFill>
+                <a:latin typeface="Noto Sans KR" panose="020B0200000000000000" pitchFamily="50" charset="-127"/>
+                <a:ea typeface="Noto Sans KR" panose="020B0200000000000000" pitchFamily="50" charset="-127"/>
+              </a:rPr>
+              <a:t>System</a:t>
+            </a:r>
+            <a:endParaRPr lang="en-US" altLang="ko-KR" sz="1600" b="1" dirty="0">
+              <a:solidFill>
+                <a:schemeClr val="bg1"/>
+              </a:solidFill>
+              <a:latin typeface="Noto Sans KR" panose="020B0200000000000000" pitchFamily="50" charset="-127"/>
+              <a:ea typeface="Noto Sans KR" panose="020B0200000000000000" pitchFamily="50" charset="-127"/>
+            </a:endParaRPr>
+          </a:p>
+          <a:p>
+            <a:pPr marL="742950" lvl="1" indent="-285750">
+              <a:buFontTx/>
+              <a:buChar char="-"/>
+            </a:pPr>
+            <a:r>
+              <a:rPr lang="ko-KR" altLang="en-US" sz="1600" b="1" dirty="0">
+                <a:solidFill>
+                  <a:schemeClr val="bg1"/>
+                </a:solidFill>
+                <a:latin typeface="Noto Sans KR" panose="020B0200000000000000" pitchFamily="50" charset="-127"/>
+                <a:ea typeface="Noto Sans KR" panose="020B0200000000000000" pitchFamily="50" charset="-127"/>
+              </a:rPr>
+              <a:t>상황</a:t>
+            </a:r>
+            <a:r>
+              <a:rPr lang="ko-KR" altLang="ko-KR" sz="1600" b="1" dirty="0">
+                <a:solidFill>
+                  <a:schemeClr val="bg1"/>
+                </a:solidFill>
+                <a:latin typeface="Noto Sans KR" panose="020B0200000000000000" pitchFamily="50" charset="-127"/>
+                <a:ea typeface="Noto Sans KR" panose="020B0200000000000000" pitchFamily="50" charset="-127"/>
+              </a:rPr>
+              <a:t>별 BGM, 발소리, 상호작용 효과음, </a:t>
+            </a:r>
+            <a:endParaRPr lang="en-US" altLang="ko-KR" sz="1600" b="1" dirty="0">
+              <a:solidFill>
+                <a:schemeClr val="bg1"/>
+              </a:solidFill>
+              <a:latin typeface="Noto Sans KR" panose="020B0200000000000000" pitchFamily="50" charset="-127"/>
+              <a:ea typeface="Noto Sans KR" panose="020B0200000000000000" pitchFamily="50" charset="-127"/>
+            </a:endParaRPr>
+          </a:p>
+          <a:p>
+            <a:pPr lvl="1"/>
+            <a:r>
+              <a:rPr lang="en-US" altLang="ko-KR" sz="1600" b="1" dirty="0">
+                <a:solidFill>
+                  <a:schemeClr val="bg1"/>
+                </a:solidFill>
+                <a:latin typeface="Noto Sans KR" panose="020B0200000000000000" pitchFamily="50" charset="-127"/>
+                <a:ea typeface="Noto Sans KR" panose="020B0200000000000000" pitchFamily="50" charset="-127"/>
+              </a:rPr>
+              <a:t>      </a:t>
+            </a:r>
+            <a:r>
+              <a:rPr lang="ko-KR" altLang="en-US" sz="1600" b="1" dirty="0" err="1">
+                <a:solidFill>
+                  <a:schemeClr val="bg1"/>
+                </a:solidFill>
+                <a:latin typeface="Noto Sans KR" panose="020B0200000000000000" pitchFamily="50" charset="-127"/>
+                <a:ea typeface="Noto Sans KR" panose="020B0200000000000000" pitchFamily="50" charset="-127"/>
+              </a:rPr>
+              <a:t>인트로</a:t>
+            </a:r>
+            <a:r>
+              <a:rPr lang="en-US" altLang="ko-KR" sz="1600" b="1" dirty="0">
+                <a:solidFill>
+                  <a:schemeClr val="bg1"/>
+                </a:solidFill>
+                <a:latin typeface="Noto Sans KR" panose="020B0200000000000000" pitchFamily="50" charset="-127"/>
+                <a:ea typeface="Noto Sans KR" panose="020B0200000000000000" pitchFamily="50" charset="-127"/>
+              </a:rPr>
+              <a:t>/</a:t>
+            </a:r>
+            <a:r>
+              <a:rPr lang="ko-KR" altLang="en-US" sz="1600" b="1" dirty="0">
+                <a:solidFill>
+                  <a:schemeClr val="bg1"/>
+                </a:solidFill>
+                <a:latin typeface="Noto Sans KR" panose="020B0200000000000000" pitchFamily="50" charset="-127"/>
+                <a:ea typeface="Noto Sans KR" panose="020B0200000000000000" pitchFamily="50" charset="-127"/>
+              </a:rPr>
+              <a:t>엔딩 영상</a:t>
+            </a:r>
+            <a:r>
+              <a:rPr lang="ko-KR" altLang="ko-KR" sz="1600" b="1" dirty="0">
+                <a:solidFill>
+                  <a:schemeClr val="bg1"/>
+                </a:solidFill>
+                <a:latin typeface="Noto Sans KR" panose="020B0200000000000000" pitchFamily="50" charset="-127"/>
+                <a:ea typeface="Noto Sans KR" panose="020B0200000000000000" pitchFamily="50" charset="-127"/>
+              </a:rPr>
+              <a:t> </a:t>
+            </a:r>
+            <a:r>
+              <a:rPr lang="ko-KR" altLang="en-US" sz="1600" b="1" dirty="0">
+                <a:solidFill>
+                  <a:schemeClr val="bg1"/>
+                </a:solidFill>
+                <a:latin typeface="Noto Sans KR" panose="020B0200000000000000" pitchFamily="50" charset="-127"/>
+                <a:ea typeface="Noto Sans KR" panose="020B0200000000000000" pitchFamily="50" charset="-127"/>
+              </a:rPr>
+              <a:t>제작 및 파싱을 통해 몰입도를 높임</a:t>
+            </a:r>
+            <a:endParaRPr lang="ko-KR" altLang="ko-KR" sz="1600" b="1" dirty="0">
+              <a:solidFill>
+                <a:schemeClr val="bg1"/>
+              </a:solidFill>
+              <a:latin typeface="Noto Sans KR" panose="020B0200000000000000" pitchFamily="50" charset="-127"/>
+              <a:ea typeface="Noto Sans KR" panose="020B0200000000000000" pitchFamily="50" charset="-127"/>
+            </a:endParaRPr>
+          </a:p>
+        </p:txBody>
+      </p:sp>
+    </p:spTree>
+    <p:extLst>
+      <p:ext uri="{BB962C8B-B14F-4D97-AF65-F5344CB8AC3E}">
+        <p14:creationId xmlns:p14="http://schemas.microsoft.com/office/powerpoint/2010/main" val="4283908228"/>
       </p:ext>
     </p:extLst>
   </p:cSld>
